--- a/data/bchwtz-topics.pptx
+++ b/data/bchwtz-topics.pptx
@@ -5,14 +5,16 @@
     <p:sldMasterId id="2147483648" r:id="rId1"/>
   </p:sldMasterIdLst>
   <p:notesMasterIdLst>
-    <p:notesMasterId r:id="rId4"/>
+    <p:notesMasterId r:id="rId6"/>
   </p:notesMasterIdLst>
   <p:handoutMasterIdLst>
-    <p:handoutMasterId r:id="rId5"/>
+    <p:handoutMasterId r:id="rId7"/>
   </p:handoutMasterIdLst>
   <p:sldIdLst>
-    <p:sldId id="422" r:id="rId2"/>
+    <p:sldId id="424" r:id="rId2"/>
     <p:sldId id="421" r:id="rId3"/>
+    <p:sldId id="423" r:id="rId4"/>
+    <p:sldId id="422" r:id="rId5"/>
   </p:sldIdLst>
   <p:sldSz cx="9144000" cy="5143500" type="screen16x9"/>
   <p:notesSz cx="6858000" cy="9661525"/>
@@ -2504,7 +2506,7 @@
         <p:cNvPr id="1" name="">
           <a:extLst>
             <a:ext uri="{FF2B5EF4-FFF2-40B4-BE49-F238E27FC236}">
-              <a16:creationId xmlns:a16="http://schemas.microsoft.com/office/drawing/2014/main" id="{7370DDB1-D839-A959-076C-B6B7E6EC6DBC}"/>
+              <a16:creationId xmlns:a16="http://schemas.microsoft.com/office/drawing/2014/main" id="{8F0B4271-568B-CE06-B45D-26200D33FF10}"/>
             </a:ext>
           </a:extLst>
         </p:cNvPr>
@@ -2524,7 +2526,7 @@
           <p:cNvPr id="2" name="Titel 1">
             <a:extLst>
               <a:ext uri="{FF2B5EF4-FFF2-40B4-BE49-F238E27FC236}">
-                <a16:creationId xmlns:a16="http://schemas.microsoft.com/office/drawing/2014/main" id="{86F76CE6-9990-7051-3ACE-101177A8D106}"/>
+                <a16:creationId xmlns:a16="http://schemas.microsoft.com/office/drawing/2014/main" id="{A9D895D2-4057-F22A-E09E-FBA9F3739A40}"/>
               </a:ext>
             </a:extLst>
           </p:cNvPr>
@@ -2542,7 +2544,7 @@
           <a:p>
             <a:r>
               <a:rPr lang="de-DE" sz="1800" dirty="0"/>
-              <a:t>Titel</a:t>
+              <a:t>Erläuterungen</a:t>
             </a:r>
           </a:p>
         </p:txBody>
@@ -2552,7 +2554,7 @@
           <p:cNvPr id="3" name="Textplatzhalter 2">
             <a:extLst>
               <a:ext uri="{FF2B5EF4-FFF2-40B4-BE49-F238E27FC236}">
-                <a16:creationId xmlns:a16="http://schemas.microsoft.com/office/drawing/2014/main" id="{279A0DC2-07C9-9E12-C393-8EC8D893BA42}"/>
+                <a16:creationId xmlns:a16="http://schemas.microsoft.com/office/drawing/2014/main" id="{304C08AA-CED3-6CEF-2198-C4062C51D579}"/>
               </a:ext>
             </a:extLst>
           </p:cNvPr>
@@ -2570,7 +2572,7 @@
           <a:p>
             <a:r>
               <a:rPr lang="en-GB" sz="1400" noProof="0" dirty="0"/>
-              <a:t>Titel Englisch</a:t>
+              <a:t>Explanation</a:t>
             </a:r>
           </a:p>
         </p:txBody>
@@ -2580,7 +2582,7 @@
           <p:cNvPr id="5" name="Inhaltsplatzhalter 3">
             <a:extLst>
               <a:ext uri="{FF2B5EF4-FFF2-40B4-BE49-F238E27FC236}">
-                <a16:creationId xmlns:a16="http://schemas.microsoft.com/office/drawing/2014/main" id="{1D8E8259-933E-A15F-7A40-FEA2C129EC68}"/>
+                <a16:creationId xmlns:a16="http://schemas.microsoft.com/office/drawing/2014/main" id="{E19DDAB1-AC9E-3A6B-ACAB-0391342286C9}"/>
               </a:ext>
             </a:extLst>
           </p:cNvPr>
@@ -2796,71 +2798,7 @@
                 <a:ea typeface="Helvetica Neue" panose="02000503000000020004" pitchFamily="2" charset="0"/>
                 <a:cs typeface="Arial" panose="020B0604020202020204" pitchFamily="34" charset="0"/>
               </a:rPr>
-              <a:t>Lorem </a:t>
-            </a:r>
-            <a:r>
-              <a:rPr lang="de-DE" sz="1000" dirty="0" err="1">
-                <a:latin typeface="Arial" panose="020B0604020202020204" pitchFamily="34" charset="0"/>
-                <a:ea typeface="Helvetica Neue" panose="02000503000000020004" pitchFamily="2" charset="0"/>
-                <a:cs typeface="Arial" panose="020B0604020202020204" pitchFamily="34" charset="0"/>
-              </a:rPr>
-              <a:t>ipsum</a:t>
-            </a:r>
-            <a:r>
-              <a:rPr lang="de-DE" sz="1000" dirty="0">
-                <a:latin typeface="Arial" panose="020B0604020202020204" pitchFamily="34" charset="0"/>
-                <a:ea typeface="Helvetica Neue" panose="02000503000000020004" pitchFamily="2" charset="0"/>
-                <a:cs typeface="Arial" panose="020B0604020202020204" pitchFamily="34" charset="0"/>
-              </a:rPr>
-              <a:t> </a:t>
-            </a:r>
-            <a:r>
-              <a:rPr lang="de-DE" sz="1000" dirty="0" err="1">
-                <a:latin typeface="Arial" panose="020B0604020202020204" pitchFamily="34" charset="0"/>
-                <a:ea typeface="Helvetica Neue" panose="02000503000000020004" pitchFamily="2" charset="0"/>
-                <a:cs typeface="Arial" panose="020B0604020202020204" pitchFamily="34" charset="0"/>
-              </a:rPr>
-              <a:t>dolor</a:t>
-            </a:r>
-            <a:r>
-              <a:rPr lang="de-DE" sz="1000" dirty="0">
-                <a:latin typeface="Arial" panose="020B0604020202020204" pitchFamily="34" charset="0"/>
-                <a:ea typeface="Helvetica Neue" panose="02000503000000020004" pitchFamily="2" charset="0"/>
-                <a:cs typeface="Arial" panose="020B0604020202020204" pitchFamily="34" charset="0"/>
-              </a:rPr>
-              <a:t> </a:t>
-            </a:r>
-            <a:r>
-              <a:rPr lang="de-DE" sz="1000" dirty="0" err="1">
-                <a:latin typeface="Arial" panose="020B0604020202020204" pitchFamily="34" charset="0"/>
-                <a:ea typeface="Helvetica Neue" panose="02000503000000020004" pitchFamily="2" charset="0"/>
-                <a:cs typeface="Arial" panose="020B0604020202020204" pitchFamily="34" charset="0"/>
-              </a:rPr>
-              <a:t>sit</a:t>
-            </a:r>
-            <a:r>
-              <a:rPr lang="de-DE" sz="1000" dirty="0">
-                <a:latin typeface="Arial" panose="020B0604020202020204" pitchFamily="34" charset="0"/>
-                <a:ea typeface="Helvetica Neue" panose="02000503000000020004" pitchFamily="2" charset="0"/>
-                <a:cs typeface="Arial" panose="020B0604020202020204" pitchFamily="34" charset="0"/>
-              </a:rPr>
-              <a:t> </a:t>
-            </a:r>
-            <a:r>
-              <a:rPr lang="de-DE" sz="1000" dirty="0" err="1">
-                <a:latin typeface="Arial" panose="020B0604020202020204" pitchFamily="34" charset="0"/>
-                <a:ea typeface="Helvetica Neue" panose="02000503000000020004" pitchFamily="2" charset="0"/>
-                <a:cs typeface="Arial" panose="020B0604020202020204" pitchFamily="34" charset="0"/>
-              </a:rPr>
-              <a:t>amet</a:t>
-            </a:r>
-            <a:r>
-              <a:rPr lang="de-DE" sz="1000" dirty="0">
-                <a:latin typeface="Arial" panose="020B0604020202020204" pitchFamily="34" charset="0"/>
-                <a:ea typeface="Helvetica Neue" panose="02000503000000020004" pitchFamily="2" charset="0"/>
-                <a:cs typeface="Arial" panose="020B0604020202020204" pitchFamily="34" charset="0"/>
-              </a:rPr>
-              <a:t> Beschreibung ….</a:t>
+              <a:t>Prozess</a:t>
             </a:r>
           </a:p>
           <a:p>
@@ -2871,67 +2809,82 @@
               <a:cs typeface="Arial" panose="020B0604020202020204" pitchFamily="34" charset="0"/>
             </a:endParaRPr>
           </a:p>
+          <a:p>
+            <a:pPr algn="just"/>
+            <a:r>
+              <a:rPr lang="de-DE" sz="1000" kern="0" dirty="0">
+                <a:latin typeface="Arial" panose="020B0604020202020204" pitchFamily="34" charset="0"/>
+                <a:ea typeface="Helvetica Neue" panose="02000503000000020004" pitchFamily="2" charset="0"/>
+                <a:cs typeface="Arial" panose="020B0604020202020204" pitchFamily="34" charset="0"/>
+              </a:rPr>
+              <a:t>1) Thema aussuchen</a:t>
+            </a:r>
+          </a:p>
+          <a:p>
+            <a:pPr algn="just"/>
+            <a:endParaRPr lang="de-DE" sz="1000" kern="0" dirty="0">
+              <a:latin typeface="Arial" panose="020B0604020202020204" pitchFamily="34" charset="0"/>
+              <a:ea typeface="Helvetica Neue" panose="02000503000000020004" pitchFamily="2" charset="0"/>
+              <a:cs typeface="Arial" panose="020B0604020202020204" pitchFamily="34" charset="0"/>
+            </a:endParaRPr>
+          </a:p>
+          <a:p>
+            <a:pPr algn="just"/>
+            <a:r>
+              <a:rPr lang="de-DE" sz="1000" kern="0" dirty="0">
+                <a:latin typeface="Arial" panose="020B0604020202020204" pitchFamily="34" charset="0"/>
+                <a:ea typeface="Helvetica Neue" panose="02000503000000020004" pitchFamily="2" charset="0"/>
+                <a:cs typeface="Arial" panose="020B0604020202020204" pitchFamily="34" charset="0"/>
+              </a:rPr>
+              <a:t>2) Ansprechpartner kontaktieren</a:t>
+            </a:r>
+          </a:p>
+          <a:p>
+            <a:pPr algn="just"/>
+            <a:endParaRPr lang="de-DE" sz="1000" kern="0" dirty="0">
+              <a:latin typeface="Arial" panose="020B0604020202020204" pitchFamily="34" charset="0"/>
+              <a:ea typeface="Helvetica Neue" panose="02000503000000020004" pitchFamily="2" charset="0"/>
+              <a:cs typeface="Arial" panose="020B0604020202020204" pitchFamily="34" charset="0"/>
+            </a:endParaRPr>
+          </a:p>
+          <a:p>
+            <a:pPr algn="just"/>
+            <a:r>
+              <a:rPr lang="de-DE" sz="1000" kern="0" dirty="0">
+                <a:latin typeface="Arial" panose="020B0604020202020204" pitchFamily="34" charset="0"/>
+                <a:ea typeface="Helvetica Neue" panose="02000503000000020004" pitchFamily="2" charset="0"/>
+                <a:cs typeface="Arial" panose="020B0604020202020204" pitchFamily="34" charset="0"/>
+              </a:rPr>
+              <a:t>3) Einstiegsliteratur ansehen</a:t>
+            </a:r>
+          </a:p>
+          <a:p>
+            <a:pPr algn="just"/>
+            <a:endParaRPr lang="de-DE" sz="1000" kern="0" dirty="0">
+              <a:latin typeface="Arial" panose="020B0604020202020204" pitchFamily="34" charset="0"/>
+              <a:ea typeface="Helvetica Neue" panose="02000503000000020004" pitchFamily="2" charset="0"/>
+              <a:cs typeface="Arial" panose="020B0604020202020204" pitchFamily="34" charset="0"/>
+            </a:endParaRPr>
+          </a:p>
+          <a:p>
+            <a:pPr algn="just"/>
+            <a:r>
+              <a:rPr lang="de-DE" sz="1000" kern="0" dirty="0">
+                <a:latin typeface="Arial" panose="020B0604020202020204" pitchFamily="34" charset="0"/>
+                <a:ea typeface="Helvetica Neue" panose="02000503000000020004" pitchFamily="2" charset="0"/>
+                <a:cs typeface="Arial" panose="020B0604020202020204" pitchFamily="34" charset="0"/>
+              </a:rPr>
+              <a:t>4)</a:t>
+            </a:r>
+          </a:p>
         </p:txBody>
       </p:sp>
-      <p:cxnSp>
-        <p:nvCxnSpPr>
-          <p:cNvPr id="6" name="Gerade Verbindung 5">
+      <p:sp>
+        <p:nvSpPr>
+          <p:cNvPr id="8" name="Inhaltsplatzhalter 3">
             <a:extLst>
               <a:ext uri="{FF2B5EF4-FFF2-40B4-BE49-F238E27FC236}">
-                <a16:creationId xmlns:a16="http://schemas.microsoft.com/office/drawing/2014/main" id="{856BE49C-E23E-53FE-681D-F1A6399FB497}"/>
-              </a:ext>
-            </a:extLst>
-          </p:cNvPr>
-          <p:cNvCxnSpPr>
-            <a:cxnSpLocks/>
-          </p:cNvCxnSpPr>
-          <p:nvPr/>
-        </p:nvCxnSpPr>
-        <p:spPr bwMode="auto">
-          <a:xfrm>
-            <a:off x="5038699" y="3147633"/>
-            <a:ext cx="4104000" cy="0"/>
-          </a:xfrm>
-          <a:prstGeom prst="line">
-            <a:avLst/>
-          </a:prstGeom>
-          <a:noFill/>
-          <a:ln w="38100" cap="sq" cmpd="sng" algn="ctr">
-            <a:solidFill>
-              <a:srgbClr val="BE006E"/>
-            </a:solidFill>
-            <a:prstDash val="solid"/>
-            <a:miter lim="800000"/>
-            <a:headEnd type="none" w="med" len="med"/>
-            <a:tailEnd type="none" w="med" len="med"/>
-          </a:ln>
-          <a:effectLst/>
-          <a:extLst>
-            <a:ext uri="{909E8E84-426E-40dd-AFC4-6F175D3DCCD1}">
-              <a14:hiddenFill xmlns="" xmlns:a14="http://schemas.microsoft.com/office/drawing/2010/main">
-                <a:solidFill>
-                  <a:schemeClr val="accent2"/>
-                </a:solidFill>
-              </a14:hiddenFill>
-            </a:ext>
-            <a:ext uri="{AF507438-7753-43e0-B8FC-AC1667EBCBE1}">
-              <a14:hiddenEffects xmlns="" xmlns:a14="http://schemas.microsoft.com/office/drawing/2010/main">
-                <a:effectLst>
-                  <a:outerShdw blurRad="63500" dist="35921" dir="2700000" algn="ctr" rotWithShape="0">
-                    <a:schemeClr val="bg2"/>
-                  </a:outerShdw>
-                </a:effectLst>
-              </a14:hiddenEffects>
-            </a:ext>
-          </a:extLst>
-        </p:spPr>
-      </p:cxnSp>
-      <p:sp>
-        <p:nvSpPr>
-          <p:cNvPr id="7" name="Inhaltsplatzhalter 3">
-            <a:extLst>
-              <a:ext uri="{FF2B5EF4-FFF2-40B4-BE49-F238E27FC236}">
-                <a16:creationId xmlns:a16="http://schemas.microsoft.com/office/drawing/2014/main" id="{FABC9D9F-77DB-BCE1-8D1D-C91530880C9C}"/>
+                <a16:creationId xmlns:a16="http://schemas.microsoft.com/office/drawing/2014/main" id="{19278A0C-D777-4C65-A4F7-9C30A66DB3C9}"/>
               </a:ext>
             </a:extLst>
           </p:cNvPr>
@@ -2942,8 +2895,8 @@
         </p:nvSpPr>
         <p:spPr>
           <a:xfrm>
-            <a:off x="5198510" y="3212688"/>
-            <a:ext cx="1939270" cy="504322"/>
+            <a:off x="4821457" y="1128025"/>
+            <a:ext cx="4066742" cy="3423387"/>
           </a:xfrm>
           <a:prstGeom prst="rect">
             <a:avLst/>
@@ -3140,1110 +3093,27 @@
             </a:lvl9pPr>
           </a:lstStyle>
           <a:p>
-            <a:pPr>
-              <a:spcAft>
-                <a:spcPts val="0"/>
-              </a:spcAft>
-            </a:pPr>
-            <a:r>
-              <a:rPr lang="de-DE" sz="1000" b="1" kern="0" dirty="0"/>
-              <a:t>Prof. Dr. Benjamin Buchwitz</a:t>
-            </a:r>
-          </a:p>
-          <a:p>
-            <a:pPr>
-              <a:spcAft>
-                <a:spcPts val="0"/>
-              </a:spcAft>
-            </a:pPr>
-            <a:r>
-              <a:rPr lang="de-DE" sz="1000" i="1" kern="0" dirty="0"/>
-              <a:t>Fachhochschule Südwestfalen</a:t>
-            </a:r>
-          </a:p>
-          <a:p>
-            <a:pPr>
-              <a:spcBef>
-                <a:spcPts val="400"/>
-              </a:spcBef>
-              <a:spcAft>
-                <a:spcPts val="0"/>
-              </a:spcAft>
-            </a:pPr>
-            <a:r>
-              <a:rPr lang="de-DE" sz="1000" kern="0" dirty="0" err="1"/>
-              <a:t>benjamin.buchwitz@fh-swf.de</a:t>
-            </a:r>
-            <a:endParaRPr lang="de-DE" sz="1000" kern="0" dirty="0"/>
-          </a:p>
-        </p:txBody>
-      </p:sp>
-      <p:sp>
-        <p:nvSpPr>
-          <p:cNvPr id="9" name="Textplatzhalter 2">
-            <a:extLst>
-              <a:ext uri="{FF2B5EF4-FFF2-40B4-BE49-F238E27FC236}">
-                <a16:creationId xmlns:a16="http://schemas.microsoft.com/office/drawing/2014/main" id="{FEABD3CB-75A3-50A0-454E-B4A195F665C7}"/>
-              </a:ext>
-            </a:extLst>
-          </p:cNvPr>
-          <p:cNvSpPr txBox="1">
-            <a:spLocks/>
-          </p:cNvSpPr>
-          <p:nvPr/>
-        </p:nvSpPr>
-        <p:spPr>
-          <a:xfrm>
-            <a:off x="5025052" y="2900723"/>
-            <a:ext cx="4432850" cy="260558"/>
-          </a:xfrm>
-          <a:prstGeom prst="rect">
-            <a:avLst/>
-          </a:prstGeom>
-        </p:spPr>
-        <p:txBody>
-          <a:bodyPr vert="horz" lIns="0" tIns="0" rIns="0" bIns="0" anchor="t" anchorCtr="0"/>
-          <a:lstStyle>
-            <a:lvl1pPr marL="0" marR="0" indent="0" algn="l" defTabSz="914400" rtl="0" eaLnBrk="0" fontAlgn="base" latinLnBrk="0" hangingPunct="0">
-              <a:lnSpc>
-                <a:spcPct val="100000"/>
-              </a:lnSpc>
-              <a:spcBef>
-                <a:spcPct val="0"/>
-              </a:spcBef>
-              <a:spcAft>
-                <a:spcPct val="30000"/>
-              </a:spcAft>
-              <a:buClr>
-                <a:srgbClr val="005EAD"/>
-              </a:buClr>
-              <a:buSzTx/>
-              <a:buFont typeface="Wingdings" charset="0"/>
-              <a:buNone/>
-              <a:tabLst/>
-              <a:defRPr sz="1800" b="1">
-                <a:solidFill>
-                  <a:schemeClr val="tx1"/>
-                </a:solidFill>
-                <a:latin typeface="Arial"/>
-                <a:ea typeface="+mn-ea"/>
-                <a:cs typeface="Arial"/>
-              </a:defRPr>
-            </a:lvl1pPr>
-            <a:lvl2pPr marL="665163" indent="-285750" algn="l" rtl="0" eaLnBrk="1" fontAlgn="base" hangingPunct="1">
-              <a:spcBef>
-                <a:spcPct val="0"/>
-              </a:spcBef>
-              <a:spcAft>
-                <a:spcPct val="30000"/>
-              </a:spcAft>
-              <a:buClr>
-                <a:srgbClr val="005EAD"/>
-              </a:buClr>
-              <a:buFont typeface="Wingdings" charset="0"/>
-              <a:buChar char="§"/>
-              <a:defRPr sz="1600">
-                <a:solidFill>
-                  <a:schemeClr val="tx1"/>
-                </a:solidFill>
-                <a:latin typeface="Arial"/>
-                <a:ea typeface="+mn-ea"/>
-                <a:cs typeface="Arial"/>
-              </a:defRPr>
-            </a:lvl2pPr>
-            <a:lvl3pPr marL="1084263" indent="-228600" algn="l" rtl="0" eaLnBrk="1" fontAlgn="base" hangingPunct="1">
-              <a:spcBef>
-                <a:spcPct val="0"/>
-              </a:spcBef>
-              <a:spcAft>
-                <a:spcPct val="30000"/>
-              </a:spcAft>
-              <a:buClr>
-                <a:srgbClr val="005EAD"/>
-              </a:buClr>
-              <a:buFont typeface="Wingdings" charset="0"/>
-              <a:buChar char="§"/>
-              <a:defRPr sz="1600">
-                <a:solidFill>
-                  <a:schemeClr val="tx1"/>
-                </a:solidFill>
-                <a:latin typeface="Arial"/>
-                <a:ea typeface="+mn-ea"/>
-                <a:cs typeface="Arial"/>
-              </a:defRPr>
-            </a:lvl3pPr>
-            <a:lvl4pPr marL="1503363" indent="-228600" algn="l" rtl="0" eaLnBrk="1" fontAlgn="base" hangingPunct="1">
-              <a:spcBef>
-                <a:spcPct val="0"/>
-              </a:spcBef>
-              <a:spcAft>
-                <a:spcPct val="30000"/>
-              </a:spcAft>
-              <a:buClr>
-                <a:srgbClr val="005EAD"/>
-              </a:buClr>
-              <a:buFont typeface="Wingdings" charset="0"/>
-              <a:buChar char="§"/>
-              <a:tabLst/>
-              <a:defRPr sz="1600">
-                <a:solidFill>
-                  <a:schemeClr val="tx1"/>
-                </a:solidFill>
-                <a:latin typeface="Arial"/>
-                <a:ea typeface="+mn-ea"/>
-                <a:cs typeface="Arial"/>
-              </a:defRPr>
-            </a:lvl4pPr>
-            <a:lvl5pPr marL="1922463" indent="-228600" algn="l" rtl="0" eaLnBrk="1" fontAlgn="base" hangingPunct="1">
-              <a:spcBef>
-                <a:spcPct val="0"/>
-              </a:spcBef>
-              <a:spcAft>
-                <a:spcPct val="30000"/>
-              </a:spcAft>
-              <a:buClr>
-                <a:srgbClr val="005EAD"/>
-              </a:buClr>
-              <a:buFont typeface="Wingdings" charset="0"/>
-              <a:buChar char="§"/>
-              <a:defRPr sz="1600">
-                <a:solidFill>
-                  <a:schemeClr val="tx1"/>
-                </a:solidFill>
-                <a:latin typeface="Arial"/>
-                <a:ea typeface="+mn-ea"/>
-                <a:cs typeface="Arial"/>
-              </a:defRPr>
-            </a:lvl5pPr>
-            <a:lvl6pPr marL="2379663" indent="-228600" algn="l" rtl="0" eaLnBrk="1" fontAlgn="base" hangingPunct="1">
-              <a:spcBef>
-                <a:spcPct val="0"/>
-              </a:spcBef>
-              <a:spcAft>
-                <a:spcPct val="30000"/>
-              </a:spcAft>
-              <a:buClr>
-                <a:srgbClr val="00377D"/>
-              </a:buClr>
-              <a:buFont typeface="Wingdings" charset="0"/>
-              <a:buChar char="§"/>
-              <a:defRPr sz="1600">
-                <a:solidFill>
-                  <a:schemeClr val="tx1"/>
-                </a:solidFill>
-                <a:latin typeface="+mn-lt"/>
-                <a:ea typeface="+mn-ea"/>
-              </a:defRPr>
-            </a:lvl6pPr>
-            <a:lvl7pPr marL="2836863" indent="-228600" algn="l" rtl="0" eaLnBrk="1" fontAlgn="base" hangingPunct="1">
-              <a:spcBef>
-                <a:spcPct val="0"/>
-              </a:spcBef>
-              <a:spcAft>
-                <a:spcPct val="30000"/>
-              </a:spcAft>
-              <a:buClr>
-                <a:srgbClr val="00377D"/>
-              </a:buClr>
-              <a:buFont typeface="Wingdings" charset="0"/>
-              <a:buChar char="§"/>
-              <a:defRPr sz="1600">
-                <a:solidFill>
-                  <a:schemeClr val="tx1"/>
-                </a:solidFill>
-                <a:latin typeface="+mn-lt"/>
-                <a:ea typeface="+mn-ea"/>
-              </a:defRPr>
-            </a:lvl7pPr>
-            <a:lvl8pPr marL="3294063" indent="-228600" algn="l" rtl="0" eaLnBrk="1" fontAlgn="base" hangingPunct="1">
-              <a:spcBef>
-                <a:spcPct val="0"/>
-              </a:spcBef>
-              <a:spcAft>
-                <a:spcPct val="30000"/>
-              </a:spcAft>
-              <a:buClr>
-                <a:srgbClr val="00377D"/>
-              </a:buClr>
-              <a:buFont typeface="Wingdings" charset="0"/>
-              <a:buChar char="§"/>
-              <a:defRPr sz="1600">
-                <a:solidFill>
-                  <a:schemeClr val="tx1"/>
-                </a:solidFill>
-                <a:latin typeface="+mn-lt"/>
-                <a:ea typeface="+mn-ea"/>
-              </a:defRPr>
-            </a:lvl8pPr>
-            <a:lvl9pPr marL="3751263" indent="-228600" algn="l" rtl="0" eaLnBrk="1" fontAlgn="base" hangingPunct="1">
-              <a:spcBef>
-                <a:spcPct val="0"/>
-              </a:spcBef>
-              <a:spcAft>
-                <a:spcPct val="30000"/>
-              </a:spcAft>
-              <a:buClr>
-                <a:srgbClr val="00377D"/>
-              </a:buClr>
-              <a:buFont typeface="Wingdings" charset="0"/>
-              <a:buChar char="§"/>
-              <a:defRPr sz="1600">
-                <a:solidFill>
-                  <a:schemeClr val="tx1"/>
-                </a:solidFill>
-                <a:latin typeface="+mn-lt"/>
-                <a:ea typeface="+mn-ea"/>
-              </a:defRPr>
-            </a:lvl9pPr>
-          </a:lstStyle>
-          <a:p>
-            <a:pPr>
-              <a:spcAft>
-                <a:spcPts val="400"/>
-              </a:spcAft>
-            </a:pPr>
-            <a:r>
-              <a:rPr lang="de-DE" sz="1200" kern="0" dirty="0"/>
-              <a:t>Ansprechpartner</a:t>
-            </a:r>
-          </a:p>
-        </p:txBody>
-      </p:sp>
-      <p:sp>
-        <p:nvSpPr>
-          <p:cNvPr id="10" name="Inhaltsplatzhalter 3">
-            <a:extLst>
-              <a:ext uri="{FF2B5EF4-FFF2-40B4-BE49-F238E27FC236}">
-                <a16:creationId xmlns:a16="http://schemas.microsoft.com/office/drawing/2014/main" id="{9A64A5D8-9132-2C22-B52C-F23EC67A04E7}"/>
-              </a:ext>
-            </a:extLst>
-          </p:cNvPr>
-          <p:cNvSpPr txBox="1">
-            <a:spLocks/>
-          </p:cNvSpPr>
-          <p:nvPr/>
-        </p:nvSpPr>
-        <p:spPr>
-          <a:xfrm>
-            <a:off x="7293333" y="3212688"/>
-            <a:ext cx="1850668" cy="504322"/>
-          </a:xfrm>
-          <a:prstGeom prst="rect">
-            <a:avLst/>
-          </a:prstGeom>
-        </p:spPr>
-        <p:txBody>
-          <a:bodyPr lIns="0" tIns="0" rIns="0" bIns="0"/>
-          <a:lstStyle>
-            <a:lvl1pPr marL="0" indent="0" algn="l" rtl="0" eaLnBrk="1" fontAlgn="base" hangingPunct="1">
-              <a:spcBef>
-                <a:spcPct val="0"/>
-              </a:spcBef>
-              <a:spcAft>
-                <a:spcPct val="30000"/>
-              </a:spcAft>
-              <a:buClr>
-                <a:srgbClr val="005EAD"/>
-              </a:buClr>
-              <a:buFont typeface="Wingdings" charset="0"/>
-              <a:buNone/>
-              <a:defRPr sz="1400">
-                <a:solidFill>
-                  <a:schemeClr val="tx1"/>
-                </a:solidFill>
-                <a:latin typeface="Arial"/>
-                <a:ea typeface="+mn-ea"/>
-                <a:cs typeface="Arial"/>
-              </a:defRPr>
-            </a:lvl1pPr>
-            <a:lvl2pPr marL="631825" indent="-180975" algn="l" rtl="0" eaLnBrk="1" fontAlgn="base" hangingPunct="1">
-              <a:spcBef>
-                <a:spcPct val="0"/>
-              </a:spcBef>
-              <a:spcAft>
-                <a:spcPct val="30000"/>
-              </a:spcAft>
-              <a:buClr>
-                <a:srgbClr val="005EAD"/>
-              </a:buClr>
-              <a:buFont typeface="Wingdings" charset="0"/>
-              <a:buChar char="§"/>
-              <a:defRPr sz="1600">
-                <a:solidFill>
-                  <a:schemeClr val="tx1"/>
-                </a:solidFill>
-                <a:latin typeface="Arial"/>
-                <a:ea typeface="+mn-ea"/>
-                <a:cs typeface="Arial"/>
-              </a:defRPr>
-            </a:lvl2pPr>
-            <a:lvl3pPr marL="1084263" indent="-228600" algn="l" rtl="0" eaLnBrk="1" fontAlgn="base" hangingPunct="1">
-              <a:spcBef>
-                <a:spcPct val="0"/>
-              </a:spcBef>
-              <a:spcAft>
-                <a:spcPct val="30000"/>
-              </a:spcAft>
-              <a:buClr>
-                <a:srgbClr val="005EAD"/>
-              </a:buClr>
-              <a:buFont typeface="Wingdings" charset="0"/>
-              <a:buChar char="§"/>
-              <a:defRPr sz="1600">
-                <a:solidFill>
-                  <a:schemeClr val="tx1"/>
-                </a:solidFill>
-                <a:latin typeface="Arial"/>
-                <a:ea typeface="+mn-ea"/>
-                <a:cs typeface="Arial"/>
-              </a:defRPr>
-            </a:lvl3pPr>
-            <a:lvl4pPr marL="1503363" indent="-228600" algn="l" rtl="0" eaLnBrk="1" fontAlgn="base" hangingPunct="1">
-              <a:spcBef>
-                <a:spcPct val="0"/>
-              </a:spcBef>
-              <a:spcAft>
-                <a:spcPct val="30000"/>
-              </a:spcAft>
-              <a:buClr>
-                <a:srgbClr val="005EAD"/>
-              </a:buClr>
-              <a:buFont typeface="Wingdings" charset="0"/>
-              <a:buChar char="§"/>
-              <a:tabLst/>
-              <a:defRPr sz="1600">
-                <a:solidFill>
-                  <a:schemeClr val="tx1"/>
-                </a:solidFill>
-                <a:latin typeface="Arial"/>
-                <a:ea typeface="+mn-ea"/>
-                <a:cs typeface="Arial"/>
-              </a:defRPr>
-            </a:lvl4pPr>
-            <a:lvl5pPr marL="1922463" indent="-228600" algn="l" rtl="0" eaLnBrk="1" fontAlgn="base" hangingPunct="1">
-              <a:spcBef>
-                <a:spcPct val="0"/>
-              </a:spcBef>
-              <a:spcAft>
-                <a:spcPct val="30000"/>
-              </a:spcAft>
-              <a:buClr>
-                <a:srgbClr val="005EAD"/>
-              </a:buClr>
-              <a:buFont typeface="Wingdings" charset="0"/>
-              <a:buChar char="§"/>
-              <a:defRPr sz="1600">
-                <a:solidFill>
-                  <a:schemeClr val="tx1"/>
-                </a:solidFill>
-                <a:latin typeface="Arial"/>
-                <a:ea typeface="+mn-ea"/>
-                <a:cs typeface="Arial"/>
-              </a:defRPr>
-            </a:lvl5pPr>
-            <a:lvl6pPr marL="2379663" indent="-228600" algn="l" rtl="0" eaLnBrk="1" fontAlgn="base" hangingPunct="1">
-              <a:spcBef>
-                <a:spcPct val="0"/>
-              </a:spcBef>
-              <a:spcAft>
-                <a:spcPct val="30000"/>
-              </a:spcAft>
-              <a:buClr>
-                <a:srgbClr val="00377D"/>
-              </a:buClr>
-              <a:buFont typeface="Wingdings" charset="0"/>
-              <a:buChar char="§"/>
-              <a:defRPr sz="1600">
-                <a:solidFill>
-                  <a:schemeClr val="tx1"/>
-                </a:solidFill>
-                <a:latin typeface="+mn-lt"/>
-                <a:ea typeface="+mn-ea"/>
-              </a:defRPr>
-            </a:lvl6pPr>
-            <a:lvl7pPr marL="2836863" indent="-228600" algn="l" rtl="0" eaLnBrk="1" fontAlgn="base" hangingPunct="1">
-              <a:spcBef>
-                <a:spcPct val="0"/>
-              </a:spcBef>
-              <a:spcAft>
-                <a:spcPct val="30000"/>
-              </a:spcAft>
-              <a:buClr>
-                <a:srgbClr val="00377D"/>
-              </a:buClr>
-              <a:buFont typeface="Wingdings" charset="0"/>
-              <a:buChar char="§"/>
-              <a:defRPr sz="1600">
-                <a:solidFill>
-                  <a:schemeClr val="tx1"/>
-                </a:solidFill>
-                <a:latin typeface="+mn-lt"/>
-                <a:ea typeface="+mn-ea"/>
-              </a:defRPr>
-            </a:lvl7pPr>
-            <a:lvl8pPr marL="3294063" indent="-228600" algn="l" rtl="0" eaLnBrk="1" fontAlgn="base" hangingPunct="1">
-              <a:spcBef>
-                <a:spcPct val="0"/>
-              </a:spcBef>
-              <a:spcAft>
-                <a:spcPct val="30000"/>
-              </a:spcAft>
-              <a:buClr>
-                <a:srgbClr val="00377D"/>
-              </a:buClr>
-              <a:buFont typeface="Wingdings" charset="0"/>
-              <a:buChar char="§"/>
-              <a:defRPr sz="1600">
-                <a:solidFill>
-                  <a:schemeClr val="tx1"/>
-                </a:solidFill>
-                <a:latin typeface="+mn-lt"/>
-                <a:ea typeface="+mn-ea"/>
-              </a:defRPr>
-            </a:lvl8pPr>
-            <a:lvl9pPr marL="3751263" indent="-228600" algn="l" rtl="0" eaLnBrk="1" fontAlgn="base" hangingPunct="1">
-              <a:spcBef>
-                <a:spcPct val="0"/>
-              </a:spcBef>
-              <a:spcAft>
-                <a:spcPct val="30000"/>
-              </a:spcAft>
-              <a:buClr>
-                <a:srgbClr val="00377D"/>
-              </a:buClr>
-              <a:buFont typeface="Wingdings" charset="0"/>
-              <a:buChar char="§"/>
-              <a:defRPr sz="1600">
-                <a:solidFill>
-                  <a:schemeClr val="tx1"/>
-                </a:solidFill>
-                <a:latin typeface="+mn-lt"/>
-                <a:ea typeface="+mn-ea"/>
-              </a:defRPr>
-            </a:lvl9pPr>
-          </a:lstStyle>
-          <a:p>
-            <a:pPr>
-              <a:spcAft>
-                <a:spcPts val="0"/>
-              </a:spcAft>
-            </a:pPr>
-            <a:r>
-              <a:rPr lang="de-DE" sz="1000" b="1" kern="0" dirty="0"/>
-              <a:t>André Münzberg, </a:t>
-            </a:r>
-            <a:r>
-              <a:rPr lang="de-DE" sz="1000" b="1" kern="0" dirty="0" err="1"/>
-              <a:t>M.Sc</a:t>
-            </a:r>
-            <a:r>
-              <a:rPr lang="de-DE" sz="1000" b="1" kern="0" dirty="0"/>
-              <a:t>.</a:t>
-            </a:r>
-          </a:p>
-          <a:p>
-            <a:pPr>
-              <a:spcAft>
-                <a:spcPts val="0"/>
-              </a:spcAft>
-            </a:pPr>
-            <a:r>
-              <a:rPr lang="de-DE" sz="1000" i="1" kern="0" dirty="0"/>
-              <a:t>Firma/Organisation</a:t>
-            </a:r>
-          </a:p>
-          <a:p>
-            <a:pPr>
-              <a:spcBef>
-                <a:spcPts val="400"/>
-              </a:spcBef>
-              <a:spcAft>
-                <a:spcPts val="0"/>
-              </a:spcAft>
-            </a:pPr>
-            <a:r>
-              <a:rPr lang="de-DE" sz="1000" kern="0" dirty="0" err="1"/>
-              <a:t>email@email.com</a:t>
-            </a:r>
-            <a:endParaRPr lang="de-DE" sz="1000" kern="0" dirty="0"/>
-          </a:p>
-        </p:txBody>
-      </p:sp>
-      <p:cxnSp>
-        <p:nvCxnSpPr>
-          <p:cNvPr id="12" name="Gerade Verbindung 11">
-            <a:extLst>
-              <a:ext uri="{FF2B5EF4-FFF2-40B4-BE49-F238E27FC236}">
-                <a16:creationId xmlns:a16="http://schemas.microsoft.com/office/drawing/2014/main" id="{D6F33B2D-BAB9-7B3B-24F3-2E3CE2CC87E4}"/>
-              </a:ext>
-            </a:extLst>
-          </p:cNvPr>
-          <p:cNvCxnSpPr/>
-          <p:nvPr/>
-        </p:nvCxnSpPr>
-        <p:spPr bwMode="auto">
-          <a:xfrm>
-            <a:off x="5052346" y="1374935"/>
-            <a:ext cx="4104000" cy="0"/>
-          </a:xfrm>
-          <a:prstGeom prst="line">
-            <a:avLst/>
-          </a:prstGeom>
-          <a:noFill/>
-          <a:ln w="38100" cap="sq" cmpd="sng" algn="ctr">
-            <a:solidFill>
-              <a:srgbClr val="BE006E"/>
-            </a:solidFill>
-            <a:prstDash val="solid"/>
-            <a:miter lim="800000"/>
-            <a:headEnd type="none" w="med" len="med"/>
-            <a:tailEnd type="none" w="med" len="med"/>
-          </a:ln>
-          <a:effectLst/>
-          <a:extLst>
-            <a:ext uri="{909E8E84-426E-40dd-AFC4-6F175D3DCCD1}">
-              <a14:hiddenFill xmlns="" xmlns:a14="http://schemas.microsoft.com/office/drawing/2010/main">
-                <a:solidFill>
-                  <a:schemeClr val="accent2"/>
-                </a:solidFill>
-              </a14:hiddenFill>
-            </a:ext>
-            <a:ext uri="{AF507438-7753-43e0-B8FC-AC1667EBCBE1}">
-              <a14:hiddenEffects xmlns="" xmlns:a14="http://schemas.microsoft.com/office/drawing/2010/main">
-                <a:effectLst>
-                  <a:outerShdw blurRad="63500" dist="35921" dir="2700000" algn="ctr" rotWithShape="0">
-                    <a:schemeClr val="bg2"/>
-                  </a:outerShdw>
-                </a:effectLst>
-              </a14:hiddenEffects>
-            </a:ext>
-          </a:extLst>
-        </p:spPr>
-      </p:cxnSp>
-      <p:sp>
-        <p:nvSpPr>
-          <p:cNvPr id="13" name="Inhaltsplatzhalter 3">
-            <a:extLst>
-              <a:ext uri="{FF2B5EF4-FFF2-40B4-BE49-F238E27FC236}">
-                <a16:creationId xmlns:a16="http://schemas.microsoft.com/office/drawing/2014/main" id="{81AAD97A-ECF4-A7C9-6975-7074118A30D8}"/>
-              </a:ext>
-            </a:extLst>
-          </p:cNvPr>
-          <p:cNvSpPr txBox="1">
-            <a:spLocks/>
-          </p:cNvSpPr>
-          <p:nvPr/>
-        </p:nvSpPr>
-        <p:spPr>
-          <a:xfrm>
-            <a:off x="5212157" y="1439990"/>
-            <a:ext cx="3676042" cy="1309224"/>
-          </a:xfrm>
-          <a:prstGeom prst="rect">
-            <a:avLst/>
-          </a:prstGeom>
-        </p:spPr>
-        <p:txBody>
-          <a:bodyPr lIns="0" tIns="0" rIns="0" bIns="0"/>
-          <a:lstStyle>
-            <a:lvl1pPr marL="0" indent="0" algn="l" rtl="0" eaLnBrk="1" fontAlgn="base" hangingPunct="1">
-              <a:spcBef>
-                <a:spcPct val="0"/>
-              </a:spcBef>
-              <a:spcAft>
-                <a:spcPct val="30000"/>
-              </a:spcAft>
-              <a:buClr>
-                <a:srgbClr val="005EAD"/>
-              </a:buClr>
-              <a:buFont typeface="Wingdings" charset="0"/>
-              <a:buNone/>
-              <a:defRPr sz="1400">
-                <a:solidFill>
-                  <a:schemeClr val="tx1"/>
-                </a:solidFill>
-                <a:latin typeface="Arial"/>
-                <a:ea typeface="+mn-ea"/>
-                <a:cs typeface="Arial"/>
-              </a:defRPr>
-            </a:lvl1pPr>
-            <a:lvl2pPr marL="631825" indent="-180975" algn="l" rtl="0" eaLnBrk="1" fontAlgn="base" hangingPunct="1">
-              <a:spcBef>
-                <a:spcPct val="0"/>
-              </a:spcBef>
-              <a:spcAft>
-                <a:spcPct val="30000"/>
-              </a:spcAft>
-              <a:buClr>
-                <a:srgbClr val="005EAD"/>
-              </a:buClr>
-              <a:buFont typeface="Wingdings" charset="0"/>
-              <a:buChar char="§"/>
-              <a:defRPr sz="1600">
-                <a:solidFill>
-                  <a:schemeClr val="tx1"/>
-                </a:solidFill>
-                <a:latin typeface="Arial"/>
-                <a:ea typeface="+mn-ea"/>
-                <a:cs typeface="Arial"/>
-              </a:defRPr>
-            </a:lvl2pPr>
-            <a:lvl3pPr marL="1084263" indent="-228600" algn="l" rtl="0" eaLnBrk="1" fontAlgn="base" hangingPunct="1">
-              <a:spcBef>
-                <a:spcPct val="0"/>
-              </a:spcBef>
-              <a:spcAft>
-                <a:spcPct val="30000"/>
-              </a:spcAft>
-              <a:buClr>
-                <a:srgbClr val="005EAD"/>
-              </a:buClr>
-              <a:buFont typeface="Wingdings" charset="0"/>
-              <a:buChar char="§"/>
-              <a:defRPr sz="1600">
-                <a:solidFill>
-                  <a:schemeClr val="tx1"/>
-                </a:solidFill>
-                <a:latin typeface="Arial"/>
-                <a:ea typeface="+mn-ea"/>
-                <a:cs typeface="Arial"/>
-              </a:defRPr>
-            </a:lvl3pPr>
-            <a:lvl4pPr marL="1503363" indent="-228600" algn="l" rtl="0" eaLnBrk="1" fontAlgn="base" hangingPunct="1">
-              <a:spcBef>
-                <a:spcPct val="0"/>
-              </a:spcBef>
-              <a:spcAft>
-                <a:spcPct val="30000"/>
-              </a:spcAft>
-              <a:buClr>
-                <a:srgbClr val="005EAD"/>
-              </a:buClr>
-              <a:buFont typeface="Wingdings" charset="0"/>
-              <a:buChar char="§"/>
-              <a:tabLst/>
-              <a:defRPr sz="1600">
-                <a:solidFill>
-                  <a:schemeClr val="tx1"/>
-                </a:solidFill>
-                <a:latin typeface="Arial"/>
-                <a:ea typeface="+mn-ea"/>
-                <a:cs typeface="Arial"/>
-              </a:defRPr>
-            </a:lvl4pPr>
-            <a:lvl5pPr marL="1922463" indent="-228600" algn="l" rtl="0" eaLnBrk="1" fontAlgn="base" hangingPunct="1">
-              <a:spcBef>
-                <a:spcPct val="0"/>
-              </a:spcBef>
-              <a:spcAft>
-                <a:spcPct val="30000"/>
-              </a:spcAft>
-              <a:buClr>
-                <a:srgbClr val="005EAD"/>
-              </a:buClr>
-              <a:buFont typeface="Wingdings" charset="0"/>
-              <a:buChar char="§"/>
-              <a:defRPr sz="1600">
-                <a:solidFill>
-                  <a:schemeClr val="tx1"/>
-                </a:solidFill>
-                <a:latin typeface="Arial"/>
-                <a:ea typeface="+mn-ea"/>
-                <a:cs typeface="Arial"/>
-              </a:defRPr>
-            </a:lvl5pPr>
-            <a:lvl6pPr marL="2379663" indent="-228600" algn="l" rtl="0" eaLnBrk="1" fontAlgn="base" hangingPunct="1">
-              <a:spcBef>
-                <a:spcPct val="0"/>
-              </a:spcBef>
-              <a:spcAft>
-                <a:spcPct val="30000"/>
-              </a:spcAft>
-              <a:buClr>
-                <a:srgbClr val="00377D"/>
-              </a:buClr>
-              <a:buFont typeface="Wingdings" charset="0"/>
-              <a:buChar char="§"/>
-              <a:defRPr sz="1600">
-                <a:solidFill>
-                  <a:schemeClr val="tx1"/>
-                </a:solidFill>
-                <a:latin typeface="+mn-lt"/>
-                <a:ea typeface="+mn-ea"/>
-              </a:defRPr>
-            </a:lvl6pPr>
-            <a:lvl7pPr marL="2836863" indent="-228600" algn="l" rtl="0" eaLnBrk="1" fontAlgn="base" hangingPunct="1">
-              <a:spcBef>
-                <a:spcPct val="0"/>
-              </a:spcBef>
-              <a:spcAft>
-                <a:spcPct val="30000"/>
-              </a:spcAft>
-              <a:buClr>
-                <a:srgbClr val="00377D"/>
-              </a:buClr>
-              <a:buFont typeface="Wingdings" charset="0"/>
-              <a:buChar char="§"/>
-              <a:defRPr sz="1600">
-                <a:solidFill>
-                  <a:schemeClr val="tx1"/>
-                </a:solidFill>
-                <a:latin typeface="+mn-lt"/>
-                <a:ea typeface="+mn-ea"/>
-              </a:defRPr>
-            </a:lvl7pPr>
-            <a:lvl8pPr marL="3294063" indent="-228600" algn="l" rtl="0" eaLnBrk="1" fontAlgn="base" hangingPunct="1">
-              <a:spcBef>
-                <a:spcPct val="0"/>
-              </a:spcBef>
-              <a:spcAft>
-                <a:spcPct val="30000"/>
-              </a:spcAft>
-              <a:buClr>
-                <a:srgbClr val="00377D"/>
-              </a:buClr>
-              <a:buFont typeface="Wingdings" charset="0"/>
-              <a:buChar char="§"/>
-              <a:defRPr sz="1600">
-                <a:solidFill>
-                  <a:schemeClr val="tx1"/>
-                </a:solidFill>
-                <a:latin typeface="+mn-lt"/>
-                <a:ea typeface="+mn-ea"/>
-              </a:defRPr>
-            </a:lvl8pPr>
-            <a:lvl9pPr marL="3751263" indent="-228600" algn="l" rtl="0" eaLnBrk="1" fontAlgn="base" hangingPunct="1">
-              <a:spcBef>
-                <a:spcPct val="0"/>
-              </a:spcBef>
-              <a:spcAft>
-                <a:spcPct val="30000"/>
-              </a:spcAft>
-              <a:buClr>
-                <a:srgbClr val="00377D"/>
-              </a:buClr>
-              <a:buFont typeface="Wingdings" charset="0"/>
-              <a:buChar char="§"/>
-              <a:defRPr sz="1600">
-                <a:solidFill>
-                  <a:schemeClr val="tx1"/>
-                </a:solidFill>
-                <a:latin typeface="+mn-lt"/>
-                <a:ea typeface="+mn-ea"/>
-              </a:defRPr>
-            </a:lvl9pPr>
-          </a:lstStyle>
-          <a:p>
-            <a:pPr>
-              <a:spcAft>
-                <a:spcPts val="400"/>
-              </a:spcAft>
-            </a:pPr>
-            <a:r>
-              <a:rPr lang="en-GB" sz="1000" noProof="0" dirty="0">
+            <a:pPr algn="just"/>
+            <a:r>
+              <a:rPr lang="de-DE" sz="1000" dirty="0">
                 <a:latin typeface="Arial" panose="020B0604020202020204" pitchFamily="34" charset="0"/>
                 <a:ea typeface="Helvetica Neue" panose="02000503000000020004" pitchFamily="2" charset="0"/>
                 <a:cs typeface="Arial" panose="020B0604020202020204" pitchFamily="34" charset="0"/>
               </a:rPr>
-              <a:t>Ordentlich </a:t>
-            </a:r>
-            <a:r>
-              <a:rPr lang="en-GB" sz="1000" noProof="0" dirty="0" err="1">
-                <a:latin typeface="Arial" panose="020B0604020202020204" pitchFamily="34" charset="0"/>
-                <a:ea typeface="Helvetica Neue" panose="02000503000000020004" pitchFamily="2" charset="0"/>
-                <a:cs typeface="Arial" panose="020B0604020202020204" pitchFamily="34" charset="0"/>
-              </a:rPr>
-              <a:t>formatierte</a:t>
-            </a:r>
-            <a:r>
-              <a:rPr lang="en-GB" sz="1000" noProof="0" dirty="0">
-                <a:latin typeface="Arial" panose="020B0604020202020204" pitchFamily="34" charset="0"/>
-                <a:ea typeface="Helvetica Neue" panose="02000503000000020004" pitchFamily="2" charset="0"/>
-                <a:cs typeface="Arial" panose="020B0604020202020204" pitchFamily="34" charset="0"/>
-              </a:rPr>
-              <a:t> </a:t>
-            </a:r>
-            <a:r>
-              <a:rPr lang="en-GB" sz="1000" noProof="0" dirty="0" err="1">
-                <a:latin typeface="Arial" panose="020B0604020202020204" pitchFamily="34" charset="0"/>
-                <a:ea typeface="Helvetica Neue" panose="02000503000000020004" pitchFamily="2" charset="0"/>
-                <a:cs typeface="Arial" panose="020B0604020202020204" pitchFamily="34" charset="0"/>
-              </a:rPr>
-              <a:t>Quellenangabe</a:t>
-            </a:r>
-            <a:endParaRPr lang="en-GB" sz="1000" kern="0" noProof="0" dirty="0"/>
-          </a:p>
-        </p:txBody>
-      </p:sp>
-      <p:sp>
-        <p:nvSpPr>
-          <p:cNvPr id="14" name="Textplatzhalter 2">
-            <a:extLst>
-              <a:ext uri="{FF2B5EF4-FFF2-40B4-BE49-F238E27FC236}">
-                <a16:creationId xmlns:a16="http://schemas.microsoft.com/office/drawing/2014/main" id="{707F1DEF-E60A-1B77-7520-5A4DFD2DFA7F}"/>
-              </a:ext>
-            </a:extLst>
-          </p:cNvPr>
-          <p:cNvSpPr txBox="1">
-            <a:spLocks/>
-          </p:cNvSpPr>
-          <p:nvPr/>
-        </p:nvSpPr>
-        <p:spPr>
-          <a:xfrm>
-            <a:off x="5038699" y="1128025"/>
-            <a:ext cx="4432850" cy="260558"/>
-          </a:xfrm>
-          <a:prstGeom prst="rect">
-            <a:avLst/>
-          </a:prstGeom>
-        </p:spPr>
-        <p:txBody>
-          <a:bodyPr vert="horz" lIns="0" tIns="0" rIns="0" bIns="0" anchor="t" anchorCtr="0"/>
-          <a:lstStyle>
-            <a:lvl1pPr marL="0" marR="0" indent="0" algn="l" defTabSz="914400" rtl="0" eaLnBrk="0" fontAlgn="base" latinLnBrk="0" hangingPunct="0">
-              <a:lnSpc>
-                <a:spcPct val="100000"/>
-              </a:lnSpc>
-              <a:spcBef>
-                <a:spcPct val="0"/>
-              </a:spcBef>
-              <a:spcAft>
-                <a:spcPct val="30000"/>
-              </a:spcAft>
-              <a:buClr>
-                <a:srgbClr val="005EAD"/>
-              </a:buClr>
-              <a:buSzTx/>
-              <a:buFont typeface="Wingdings" charset="0"/>
-              <a:buNone/>
-              <a:tabLst/>
-              <a:defRPr sz="1800" b="1">
-                <a:solidFill>
-                  <a:schemeClr val="tx1"/>
-                </a:solidFill>
-                <a:latin typeface="Arial"/>
-                <a:ea typeface="+mn-ea"/>
-                <a:cs typeface="Arial"/>
-              </a:defRPr>
-            </a:lvl1pPr>
-            <a:lvl2pPr marL="665163" indent="-285750" algn="l" rtl="0" eaLnBrk="1" fontAlgn="base" hangingPunct="1">
-              <a:spcBef>
-                <a:spcPct val="0"/>
-              </a:spcBef>
-              <a:spcAft>
-                <a:spcPct val="30000"/>
-              </a:spcAft>
-              <a:buClr>
-                <a:srgbClr val="005EAD"/>
-              </a:buClr>
-              <a:buFont typeface="Wingdings" charset="0"/>
-              <a:buChar char="§"/>
-              <a:defRPr sz="1600">
-                <a:solidFill>
-                  <a:schemeClr val="tx1"/>
-                </a:solidFill>
-                <a:latin typeface="Arial"/>
-                <a:ea typeface="+mn-ea"/>
-                <a:cs typeface="Arial"/>
-              </a:defRPr>
-            </a:lvl2pPr>
-            <a:lvl3pPr marL="1084263" indent="-228600" algn="l" rtl="0" eaLnBrk="1" fontAlgn="base" hangingPunct="1">
-              <a:spcBef>
-                <a:spcPct val="0"/>
-              </a:spcBef>
-              <a:spcAft>
-                <a:spcPct val="30000"/>
-              </a:spcAft>
-              <a:buClr>
-                <a:srgbClr val="005EAD"/>
-              </a:buClr>
-              <a:buFont typeface="Wingdings" charset="0"/>
-              <a:buChar char="§"/>
-              <a:defRPr sz="1600">
-                <a:solidFill>
-                  <a:schemeClr val="tx1"/>
-                </a:solidFill>
-                <a:latin typeface="Arial"/>
-                <a:ea typeface="+mn-ea"/>
-                <a:cs typeface="Arial"/>
-              </a:defRPr>
-            </a:lvl3pPr>
-            <a:lvl4pPr marL="1503363" indent="-228600" algn="l" rtl="0" eaLnBrk="1" fontAlgn="base" hangingPunct="1">
-              <a:spcBef>
-                <a:spcPct val="0"/>
-              </a:spcBef>
-              <a:spcAft>
-                <a:spcPct val="30000"/>
-              </a:spcAft>
-              <a:buClr>
-                <a:srgbClr val="005EAD"/>
-              </a:buClr>
-              <a:buFont typeface="Wingdings" charset="0"/>
-              <a:buChar char="§"/>
-              <a:tabLst/>
-              <a:defRPr sz="1600">
-                <a:solidFill>
-                  <a:schemeClr val="tx1"/>
-                </a:solidFill>
-                <a:latin typeface="Arial"/>
-                <a:ea typeface="+mn-ea"/>
-                <a:cs typeface="Arial"/>
-              </a:defRPr>
-            </a:lvl4pPr>
-            <a:lvl5pPr marL="1922463" indent="-228600" algn="l" rtl="0" eaLnBrk="1" fontAlgn="base" hangingPunct="1">
-              <a:spcBef>
-                <a:spcPct val="0"/>
-              </a:spcBef>
-              <a:spcAft>
-                <a:spcPct val="30000"/>
-              </a:spcAft>
-              <a:buClr>
-                <a:srgbClr val="005EAD"/>
-              </a:buClr>
-              <a:buFont typeface="Wingdings" charset="0"/>
-              <a:buChar char="§"/>
-              <a:defRPr sz="1600">
-                <a:solidFill>
-                  <a:schemeClr val="tx1"/>
-                </a:solidFill>
-                <a:latin typeface="Arial"/>
-                <a:ea typeface="+mn-ea"/>
-                <a:cs typeface="Arial"/>
-              </a:defRPr>
-            </a:lvl5pPr>
-            <a:lvl6pPr marL="2379663" indent="-228600" algn="l" rtl="0" eaLnBrk="1" fontAlgn="base" hangingPunct="1">
-              <a:spcBef>
-                <a:spcPct val="0"/>
-              </a:spcBef>
-              <a:spcAft>
-                <a:spcPct val="30000"/>
-              </a:spcAft>
-              <a:buClr>
-                <a:srgbClr val="00377D"/>
-              </a:buClr>
-              <a:buFont typeface="Wingdings" charset="0"/>
-              <a:buChar char="§"/>
-              <a:defRPr sz="1600">
-                <a:solidFill>
-                  <a:schemeClr val="tx1"/>
-                </a:solidFill>
-                <a:latin typeface="+mn-lt"/>
-                <a:ea typeface="+mn-ea"/>
-              </a:defRPr>
-            </a:lvl6pPr>
-            <a:lvl7pPr marL="2836863" indent="-228600" algn="l" rtl="0" eaLnBrk="1" fontAlgn="base" hangingPunct="1">
-              <a:spcBef>
-                <a:spcPct val="0"/>
-              </a:spcBef>
-              <a:spcAft>
-                <a:spcPct val="30000"/>
-              </a:spcAft>
-              <a:buClr>
-                <a:srgbClr val="00377D"/>
-              </a:buClr>
-              <a:buFont typeface="Wingdings" charset="0"/>
-              <a:buChar char="§"/>
-              <a:defRPr sz="1600">
-                <a:solidFill>
-                  <a:schemeClr val="tx1"/>
-                </a:solidFill>
-                <a:latin typeface="+mn-lt"/>
-                <a:ea typeface="+mn-ea"/>
-              </a:defRPr>
-            </a:lvl7pPr>
-            <a:lvl8pPr marL="3294063" indent="-228600" algn="l" rtl="0" eaLnBrk="1" fontAlgn="base" hangingPunct="1">
-              <a:spcBef>
-                <a:spcPct val="0"/>
-              </a:spcBef>
-              <a:spcAft>
-                <a:spcPct val="30000"/>
-              </a:spcAft>
-              <a:buClr>
-                <a:srgbClr val="00377D"/>
-              </a:buClr>
-              <a:buFont typeface="Wingdings" charset="0"/>
-              <a:buChar char="§"/>
-              <a:defRPr sz="1600">
-                <a:solidFill>
-                  <a:schemeClr val="tx1"/>
-                </a:solidFill>
-                <a:latin typeface="+mn-lt"/>
-                <a:ea typeface="+mn-ea"/>
-              </a:defRPr>
-            </a:lvl8pPr>
-            <a:lvl9pPr marL="3751263" indent="-228600" algn="l" rtl="0" eaLnBrk="1" fontAlgn="base" hangingPunct="1">
-              <a:spcBef>
-                <a:spcPct val="0"/>
-              </a:spcBef>
-              <a:spcAft>
-                <a:spcPct val="30000"/>
-              </a:spcAft>
-              <a:buClr>
-                <a:srgbClr val="00377D"/>
-              </a:buClr>
-              <a:buFont typeface="Wingdings" charset="0"/>
-              <a:buChar char="§"/>
-              <a:defRPr sz="1600">
-                <a:solidFill>
-                  <a:schemeClr val="tx1"/>
-                </a:solidFill>
-                <a:latin typeface="+mn-lt"/>
-                <a:ea typeface="+mn-ea"/>
-              </a:defRPr>
-            </a:lvl9pPr>
-          </a:lstStyle>
-          <a:p>
-            <a:pPr>
-              <a:spcAft>
-                <a:spcPts val="400"/>
-              </a:spcAft>
-            </a:pPr>
-            <a:r>
-              <a:rPr lang="de-DE" sz="1200" kern="0" dirty="0"/>
-              <a:t>Einstiegsliteratur</a:t>
-            </a:r>
-          </a:p>
-        </p:txBody>
-      </p:sp>
-      <p:sp>
-        <p:nvSpPr>
-          <p:cNvPr id="20" name="Textfeld 19">
-            <a:extLst>
-              <a:ext uri="{FF2B5EF4-FFF2-40B4-BE49-F238E27FC236}">
-                <a16:creationId xmlns:a16="http://schemas.microsoft.com/office/drawing/2014/main" id="{D7A300C9-7F69-7AF9-1DBB-F109F3865252}"/>
-              </a:ext>
-            </a:extLst>
-          </p:cNvPr>
-          <p:cNvSpPr txBox="1"/>
-          <p:nvPr/>
-        </p:nvSpPr>
-        <p:spPr>
-          <a:xfrm>
-            <a:off x="5198510" y="3957851"/>
-            <a:ext cx="3689688" cy="504322"/>
-          </a:xfrm>
-          <a:prstGeom prst="rect">
-            <a:avLst/>
-          </a:prstGeom>
-          <a:noFill/>
-          <a:ln>
-            <a:solidFill>
-              <a:schemeClr val="bg1">
-                <a:lumMod val="50000"/>
-              </a:schemeClr>
-            </a:solidFill>
-          </a:ln>
-        </p:spPr>
-        <p:txBody>
-          <a:bodyPr wrap="square" numCol="2" rtlCol="0" anchor="ctr">
-            <a:noAutofit/>
-          </a:bodyPr>
-          <a:lstStyle/>
-          <a:p>
-            <a:pPr algn="l"/>
-            <a:r>
-              <a:rPr lang="de-DE" sz="800" b="1" dirty="0">
+              <a:t>Felderbeschreibung:</a:t>
+            </a:r>
+          </a:p>
+          <a:p>
+            <a:pPr algn="just"/>
+            <a:endParaRPr lang="de-DE" sz="1000" dirty="0">
+              <a:latin typeface="Arial" panose="020B0604020202020204" pitchFamily="34" charset="0"/>
+              <a:ea typeface="Helvetica Neue" panose="02000503000000020004" pitchFamily="2" charset="0"/>
+              <a:cs typeface="Arial" panose="020B0604020202020204" pitchFamily="34" charset="0"/>
+            </a:endParaRPr>
+          </a:p>
+          <a:p>
+            <a:r>
+              <a:rPr lang="de-DE" sz="1000" b="1" dirty="0">
                 <a:solidFill>
                   <a:schemeClr val="bg1">
                     <a:lumMod val="50000"/>
@@ -4253,20 +3123,19 @@
               <a:t>Niveau</a:t>
             </a:r>
             <a:r>
-              <a:rPr lang="de-DE" sz="800" dirty="0">
+              <a:rPr lang="de-DE" sz="1000" dirty="0">
                 <a:solidFill>
                   <a:schemeClr val="bg1">
                     <a:lumMod val="50000"/>
                   </a:schemeClr>
                 </a:solidFill>
               </a:rPr>
-              <a:t>: Master</a:t>
-            </a:r>
-          </a:p>
-          <a:p>
-            <a:pPr algn="l"/>
-            <a:r>
-              <a:rPr lang="de-DE" sz="800" b="1" dirty="0">
+              <a:t>: Bachelor oder Master</a:t>
+            </a:r>
+          </a:p>
+          <a:p>
+            <a:r>
+              <a:rPr lang="de-DE" sz="1000" b="1" dirty="0">
                 <a:solidFill>
                   <a:schemeClr val="bg1">
                     <a:lumMod val="50000"/>
@@ -4276,7 +3145,7 @@
               <a:t>Art</a:t>
             </a:r>
             <a:r>
-              <a:rPr lang="de-DE" sz="800" dirty="0">
+              <a:rPr lang="de-DE" sz="1000" dirty="0">
                 <a:solidFill>
                   <a:schemeClr val="bg1">
                     <a:lumMod val="50000"/>
@@ -4287,9 +3156,8 @@
             </a:r>
           </a:p>
           <a:p>
-            <a:pPr algn="l"/>
-            <a:r>
-              <a:rPr lang="de-DE" sz="800" b="1" dirty="0">
+            <a:r>
+              <a:rPr lang="de-DE" sz="1000" b="1" dirty="0">
                 <a:solidFill>
                   <a:schemeClr val="bg1">
                     <a:lumMod val="50000"/>
@@ -4299,7 +3167,7 @@
               <a:t>Methode: </a:t>
             </a:r>
             <a:r>
-              <a:rPr lang="de-DE" sz="800" dirty="0">
+              <a:rPr lang="de-DE" sz="1000" dirty="0">
                 <a:solidFill>
                   <a:schemeClr val="bg1">
                     <a:lumMod val="50000"/>
@@ -4310,9 +3178,8 @@
             </a:r>
           </a:p>
           <a:p>
-            <a:pPr algn="l"/>
-            <a:r>
-              <a:rPr lang="de-DE" sz="800" b="1" dirty="0">
+            <a:r>
+              <a:rPr lang="de-DE" sz="1000" b="1" dirty="0">
                 <a:solidFill>
                   <a:schemeClr val="bg1">
                     <a:lumMod val="50000"/>
@@ -4322,7 +3189,7 @@
               <a:t>Unternehmenskooperation</a:t>
             </a:r>
             <a:r>
-              <a:rPr lang="de-DE" sz="800" dirty="0">
+              <a:rPr lang="de-DE" sz="1000" dirty="0">
                 <a:solidFill>
                   <a:schemeClr val="bg1">
                     <a:lumMod val="50000"/>
@@ -4333,9 +3200,8 @@
             </a:r>
           </a:p>
           <a:p>
-            <a:pPr algn="l"/>
-            <a:r>
-              <a:rPr lang="de-DE" sz="800" b="1" dirty="0">
+            <a:r>
+              <a:rPr lang="de-DE" sz="1000" b="1" dirty="0">
                 <a:solidFill>
                   <a:schemeClr val="bg1">
                     <a:lumMod val="50000"/>
@@ -4345,7 +3211,7 @@
               <a:t>Sperrvermerk</a:t>
             </a:r>
             <a:r>
-              <a:rPr lang="de-DE" sz="800" dirty="0">
+              <a:rPr lang="de-DE" sz="1000" dirty="0">
                 <a:solidFill>
                   <a:schemeClr val="bg1">
                     <a:lumMod val="50000"/>
@@ -4356,9 +3222,8 @@
             </a:r>
           </a:p>
           <a:p>
-            <a:pPr algn="l"/>
-            <a:r>
-              <a:rPr lang="de-DE" sz="800" b="1" dirty="0">
+            <a:r>
+              <a:rPr lang="de-DE" sz="1000" b="1" dirty="0">
                 <a:solidFill>
                   <a:schemeClr val="bg1">
                     <a:lumMod val="50000"/>
@@ -4368,7 +3233,7 @@
               <a:t>Start: </a:t>
             </a:r>
             <a:r>
-              <a:rPr lang="de-DE" sz="800" dirty="0">
+              <a:rPr lang="de-DE" sz="1000" dirty="0">
                 <a:solidFill>
                   <a:schemeClr val="bg1">
                     <a:lumMod val="50000"/>
@@ -4377,13 +3242,37 @@
               </a:rPr>
               <a:t>ab sofort</a:t>
             </a:r>
+          </a:p>
+          <a:p>
+            <a:pPr algn="just"/>
+            <a:endParaRPr lang="de-DE" sz="1000" dirty="0">
+              <a:latin typeface="Arial" panose="020B0604020202020204" pitchFamily="34" charset="0"/>
+              <a:ea typeface="Helvetica Neue" panose="02000503000000020004" pitchFamily="2" charset="0"/>
+              <a:cs typeface="Arial" panose="020B0604020202020204" pitchFamily="34" charset="0"/>
+            </a:endParaRPr>
+          </a:p>
+          <a:p>
+            <a:pPr algn="just"/>
+            <a:endParaRPr lang="de-DE" sz="1000" kern="0" dirty="0">
+              <a:latin typeface="Arial" panose="020B0604020202020204" pitchFamily="34" charset="0"/>
+              <a:ea typeface="Helvetica Neue" panose="02000503000000020004" pitchFamily="2" charset="0"/>
+              <a:cs typeface="Arial" panose="020B0604020202020204" pitchFamily="34" charset="0"/>
+            </a:endParaRPr>
+          </a:p>
+          <a:p>
+            <a:pPr algn="just"/>
+            <a:endParaRPr lang="de-DE" sz="1000" kern="0" dirty="0">
+              <a:latin typeface="Arial" panose="020B0604020202020204" pitchFamily="34" charset="0"/>
+              <a:ea typeface="Helvetica Neue" panose="02000503000000020004" pitchFamily="2" charset="0"/>
+              <a:cs typeface="Arial" panose="020B0604020202020204" pitchFamily="34" charset="0"/>
+            </a:endParaRPr>
           </a:p>
         </p:txBody>
       </p:sp>
     </p:spTree>
     <p:extLst>
       <p:ext uri="{BB962C8B-B14F-4D97-AF65-F5344CB8AC3E}">
-        <p14:creationId xmlns:p14="http://schemas.microsoft.com/office/powerpoint/2010/main" val="2003205683"/>
+        <p14:creationId xmlns:p14="http://schemas.microsoft.com/office/powerpoint/2010/main" val="2684919364"/>
       </p:ext>
     </p:extLst>
   </p:cSld>
@@ -4436,7 +3325,7 @@
           <a:p>
             <a:r>
               <a:rPr lang="de-DE" sz="1800" dirty="0"/>
-              <a:t>Bio-Sensor basierte Sicherheitsschätzung in der betrieblichen Prognostik</a:t>
+              <a:t>Bio-Sensor basierte Konfidenzschätzung in der betrieblichen Prognostik</a:t>
             </a:r>
           </a:p>
         </p:txBody>
@@ -4758,6 +3647,7 @@
             </a:r>
           </a:p>
           <a:p>
+            <a:pPr algn="just"/>
             <a:r>
               <a:rPr lang="de-DE" sz="1000" dirty="0">
                 <a:latin typeface="Arial" panose="020B0604020202020204" pitchFamily="34" charset="0"/>
@@ -5072,10 +3962,10 @@
               </a:spcAft>
             </a:pPr>
             <a:r>
-              <a:rPr lang="de-DE" sz="1000" kern="0" dirty="0" err="1"/>
+              <a:rPr lang="de-DE" sz="900" i="1" kern="0" dirty="0" err="1"/>
               <a:t>benjamin.buchwitz@fh-swf.de</a:t>
             </a:r>
-            <a:endParaRPr lang="de-DE" sz="1000" kern="0" dirty="0"/>
+            <a:endParaRPr lang="de-DE" sz="900" i="1" kern="0" dirty="0"/>
           </a:p>
         </p:txBody>
       </p:sp>
@@ -5550,7 +4440,7 @@
             </a:pPr>
             <a:r>
               <a:rPr lang="de-DE" sz="1000" i="1" kern="0" dirty="0"/>
-              <a:t>Firma/Organisation</a:t>
+              <a:t>Fachhochschule Südwestfalen</a:t>
             </a:r>
           </a:p>
           <a:p>
@@ -5563,10 +4453,10 @@
               </a:spcAft>
             </a:pPr>
             <a:r>
-              <a:rPr lang="de-DE" sz="1000" kern="0" dirty="0" err="1"/>
-              <a:t>email@email.com</a:t>
-            </a:r>
-            <a:endParaRPr lang="de-DE" sz="1000" kern="0" dirty="0"/>
+              <a:rPr lang="de-DE" sz="900" i="1" kern="0" dirty="0" err="1"/>
+              <a:t>muenzberg.andre@fh-swf.de</a:t>
+            </a:r>
+            <a:endParaRPr lang="de-DE" sz="900" i="1" kern="0" dirty="0"/>
           </a:p>
         </p:txBody>
       </p:sp>
@@ -5841,76 +4731,43 @@
               </a:spcAft>
             </a:pPr>
             <a:r>
-              <a:rPr lang="en-GB" sz="1000" noProof="0" dirty="0" err="1">
+              <a:rPr lang="en-US" sz="1000" noProof="0" dirty="0">
                 <a:latin typeface="Arial" panose="020B0604020202020204" pitchFamily="34" charset="0"/>
                 <a:ea typeface="Helvetica Neue" panose="02000503000000020004" pitchFamily="2" charset="0"/>
                 <a:cs typeface="Arial" panose="020B0604020202020204" pitchFamily="34" charset="0"/>
               </a:rPr>
-              <a:t>Gelbrich</a:t>
-            </a:r>
-            <a:r>
-              <a:rPr lang="en-GB" sz="1000" noProof="0" dirty="0">
+              <a:t>Lawrence, M., Goodwin, P., O’Connor, M., and </a:t>
+            </a:r>
+            <a:r>
+              <a:rPr lang="en-US" sz="1000" noProof="0" dirty="0" err="1">
                 <a:latin typeface="Arial" panose="020B0604020202020204" pitchFamily="34" charset="0"/>
                 <a:ea typeface="Helvetica Neue" panose="02000503000000020004" pitchFamily="2" charset="0"/>
                 <a:cs typeface="Arial" panose="020B0604020202020204" pitchFamily="34" charset="0"/>
               </a:rPr>
-              <a:t>, K., </a:t>
-            </a:r>
-            <a:r>
-              <a:rPr lang="en-GB" sz="1000" noProof="0" dirty="0" err="1">
+              <a:t>Önkal</a:t>
+            </a:r>
+            <a:r>
+              <a:rPr lang="en-US" sz="1000" noProof="0" dirty="0">
                 <a:latin typeface="Arial" panose="020B0604020202020204" pitchFamily="34" charset="0"/>
                 <a:ea typeface="Helvetica Neue" panose="02000503000000020004" pitchFamily="2" charset="0"/>
                 <a:cs typeface="Arial" panose="020B0604020202020204" pitchFamily="34" charset="0"/>
               </a:rPr>
-              <a:t>Kerath</a:t>
-            </a:r>
-            <a:r>
-              <a:rPr lang="en-GB" sz="1000" noProof="0" dirty="0">
+              <a:t>, D. (2006). Judgmental forecasting: A review of progress over the last 25 years. International Journal of Forecasting, 22(3):493–518.</a:t>
+            </a:r>
+          </a:p>
+          <a:p>
+            <a:pPr>
+              <a:spcAft>
+                <a:spcPts val="400"/>
+              </a:spcAft>
+            </a:pPr>
+            <a:r>
+              <a:rPr lang="en-US" sz="1000" dirty="0">
                 <a:latin typeface="Arial" panose="020B0604020202020204" pitchFamily="34" charset="0"/>
                 <a:ea typeface="Helvetica Neue" panose="02000503000000020004" pitchFamily="2" charset="0"/>
                 <a:cs typeface="Arial" panose="020B0604020202020204" pitchFamily="34" charset="0"/>
               </a:rPr>
-              <a:t>, A., &amp; Chun, H. H. (2023). Matching digital companions with customers: The role of perceived similarity. Psychology &amp; Marketing, 40(11), 2291-2305.</a:t>
-            </a:r>
-            <a:endParaRPr lang="en-GB" sz="1000" kern="0" noProof="0" dirty="0">
-              <a:latin typeface="Arial" panose="020B0604020202020204" pitchFamily="34" charset="0"/>
-              <a:ea typeface="Helvetica Neue" panose="02000503000000020004" pitchFamily="2" charset="0"/>
-              <a:cs typeface="Arial" panose="020B0604020202020204" pitchFamily="34" charset="0"/>
-            </a:endParaRPr>
-          </a:p>
-          <a:p>
-            <a:pPr>
-              <a:spcAft>
-                <a:spcPts val="400"/>
-              </a:spcAft>
-            </a:pPr>
-            <a:r>
-              <a:rPr lang="en-GB" sz="1000" kern="0" noProof="0" dirty="0"/>
-              <a:t>Daniel </a:t>
-            </a:r>
-            <a:r>
-              <a:rPr lang="en-GB" sz="1000" kern="0" noProof="0" dirty="0" err="1"/>
-              <a:t>Tumpal</a:t>
-            </a:r>
-            <a:r>
-              <a:rPr lang="en-GB" sz="1000" kern="0" noProof="0" dirty="0"/>
-              <a:t> </a:t>
-            </a:r>
-            <a:r>
-              <a:rPr lang="en-GB" sz="1000" kern="0" noProof="0" dirty="0" err="1"/>
-              <a:t>Hamonangan</a:t>
-            </a:r>
-            <a:r>
-              <a:rPr lang="en-GB" sz="1000" kern="0" noProof="0" dirty="0"/>
-              <a:t> </a:t>
-            </a:r>
-            <a:r>
-              <a:rPr lang="en-GB" sz="1000" kern="0" noProof="0" dirty="0" err="1"/>
-              <a:t>Aruan</a:t>
-            </a:r>
-            <a:r>
-              <a:rPr lang="en-GB" sz="1000" kern="0" noProof="0" dirty="0"/>
-              <a:t>, Roberta Crouch, Pascale Quester, (2018) "Relative importance of country of service delivery, country of person and country of brand in hybrid service evaluation: a conjoint analysis approach", Journal of Product &amp; Brand Management, 27 (7), 819-831.</a:t>
+              <a:t>Reimers, S. and Harvey, N. (2023). Bars, lines and points: The effect of graph format on judgmental forecasting. International Journal of Forecasting, 40 (1):44-61.</a:t>
             </a:r>
           </a:p>
         </p:txBody>
@@ -6324,6 +5181,3802 @@
     <p:extLst>
       <p:ext uri="{BB962C8B-B14F-4D97-AF65-F5344CB8AC3E}">
         <p14:creationId xmlns:p14="http://schemas.microsoft.com/office/powerpoint/2010/main" val="4038282655"/>
+      </p:ext>
+    </p:extLst>
+  </p:cSld>
+  <p:clrMapOvr>
+    <a:masterClrMapping/>
+  </p:clrMapOvr>
+  <p:transition>
+    <p:fade/>
+  </p:transition>
+</p:sld>
+</file>
+
+<file path=ppt/slides/slide3.xml><?xml version="1.0" encoding="utf-8"?>
+<p:sld xmlns:a="http://schemas.openxmlformats.org/drawingml/2006/main" xmlns:r="http://schemas.openxmlformats.org/officeDocument/2006/relationships" xmlns:p="http://schemas.openxmlformats.org/presentationml/2006/main">
+  <p:cSld>
+    <p:spTree>
+      <p:nvGrpSpPr>
+        <p:cNvPr id="1" name="">
+          <a:extLst>
+            <a:ext uri="{FF2B5EF4-FFF2-40B4-BE49-F238E27FC236}">
+              <a16:creationId xmlns:a16="http://schemas.microsoft.com/office/drawing/2014/main" id="{C9814140-8E86-CD35-280F-203293DF106D}"/>
+            </a:ext>
+          </a:extLst>
+        </p:cNvPr>
+        <p:cNvGrpSpPr/>
+        <p:nvPr/>
+      </p:nvGrpSpPr>
+      <p:grpSpPr>
+        <a:xfrm>
+          <a:off x="0" y="0"/>
+          <a:ext cx="0" cy="0"/>
+          <a:chOff x="0" y="0"/>
+          <a:chExt cx="0" cy="0"/>
+        </a:xfrm>
+      </p:grpSpPr>
+      <p:sp>
+        <p:nvSpPr>
+          <p:cNvPr id="2" name="Titel 1">
+            <a:extLst>
+              <a:ext uri="{FF2B5EF4-FFF2-40B4-BE49-F238E27FC236}">
+                <a16:creationId xmlns:a16="http://schemas.microsoft.com/office/drawing/2014/main" id="{CEA48000-ABBC-F5B5-C92C-A5294A2E7B9C}"/>
+              </a:ext>
+            </a:extLst>
+          </p:cNvPr>
+          <p:cNvSpPr>
+            <a:spLocks noGrp="1"/>
+          </p:cNvSpPr>
+          <p:nvPr>
+            <p:ph type="title"/>
+          </p:nvPr>
+        </p:nvSpPr>
+        <p:spPr/>
+        <p:txBody>
+          <a:bodyPr/>
+          <a:lstStyle/>
+          <a:p>
+            <a:r>
+              <a:rPr lang="de-DE" sz="1800" dirty="0"/>
+              <a:t>Automatisierung von Verdampfungsprozessen in Rotationsverdampfern</a:t>
+            </a:r>
+          </a:p>
+        </p:txBody>
+      </p:sp>
+      <p:sp>
+        <p:nvSpPr>
+          <p:cNvPr id="3" name="Textplatzhalter 2">
+            <a:extLst>
+              <a:ext uri="{FF2B5EF4-FFF2-40B4-BE49-F238E27FC236}">
+                <a16:creationId xmlns:a16="http://schemas.microsoft.com/office/drawing/2014/main" id="{3FF3A813-C795-7132-E78C-00E79CB9815B}"/>
+              </a:ext>
+            </a:extLst>
+          </p:cNvPr>
+          <p:cNvSpPr>
+            <a:spLocks noGrp="1"/>
+          </p:cNvSpPr>
+          <p:nvPr>
+            <p:ph type="body" sz="quarter" idx="10"/>
+          </p:nvPr>
+        </p:nvSpPr>
+        <p:spPr/>
+        <p:txBody>
+          <a:bodyPr/>
+          <a:lstStyle/>
+          <a:p>
+            <a:r>
+              <a:rPr lang="en-GB" sz="1400" dirty="0"/>
+              <a:t>Automation of Evaporation Processes for Rotary Evaporators</a:t>
+            </a:r>
+            <a:endParaRPr lang="en-GB" sz="1400" noProof="0" dirty="0"/>
+          </a:p>
+        </p:txBody>
+      </p:sp>
+      <p:sp>
+        <p:nvSpPr>
+          <p:cNvPr id="5" name="Inhaltsplatzhalter 3">
+            <a:extLst>
+              <a:ext uri="{FF2B5EF4-FFF2-40B4-BE49-F238E27FC236}">
+                <a16:creationId xmlns:a16="http://schemas.microsoft.com/office/drawing/2014/main" id="{5971A47C-B867-F273-DFAD-429524D0FEBE}"/>
+              </a:ext>
+            </a:extLst>
+          </p:cNvPr>
+          <p:cNvSpPr txBox="1">
+            <a:spLocks/>
+          </p:cNvSpPr>
+          <p:nvPr/>
+        </p:nvSpPr>
+        <p:spPr>
+          <a:xfrm>
+            <a:off x="254713" y="1128025"/>
+            <a:ext cx="4432849" cy="3423387"/>
+          </a:xfrm>
+          <a:prstGeom prst="rect">
+            <a:avLst/>
+          </a:prstGeom>
+        </p:spPr>
+        <p:txBody>
+          <a:bodyPr lIns="0" tIns="0" rIns="0" bIns="0"/>
+          <a:lstStyle>
+            <a:lvl1pPr marL="0" indent="0" algn="l" rtl="0" eaLnBrk="1" fontAlgn="base" hangingPunct="1">
+              <a:spcBef>
+                <a:spcPct val="0"/>
+              </a:spcBef>
+              <a:spcAft>
+                <a:spcPct val="30000"/>
+              </a:spcAft>
+              <a:buClr>
+                <a:srgbClr val="005EAD"/>
+              </a:buClr>
+              <a:buFont typeface="Wingdings" charset="0"/>
+              <a:buNone/>
+              <a:defRPr sz="1400">
+                <a:solidFill>
+                  <a:schemeClr val="tx1"/>
+                </a:solidFill>
+                <a:latin typeface="Arial"/>
+                <a:ea typeface="+mn-ea"/>
+                <a:cs typeface="Arial"/>
+              </a:defRPr>
+            </a:lvl1pPr>
+            <a:lvl2pPr marL="631825" indent="-180975" algn="l" rtl="0" eaLnBrk="1" fontAlgn="base" hangingPunct="1">
+              <a:spcBef>
+                <a:spcPct val="0"/>
+              </a:spcBef>
+              <a:spcAft>
+                <a:spcPct val="30000"/>
+              </a:spcAft>
+              <a:buClr>
+                <a:srgbClr val="005EAD"/>
+              </a:buClr>
+              <a:buFont typeface="Wingdings" charset="0"/>
+              <a:buChar char="§"/>
+              <a:defRPr sz="1600">
+                <a:solidFill>
+                  <a:schemeClr val="tx1"/>
+                </a:solidFill>
+                <a:latin typeface="Arial"/>
+                <a:ea typeface="+mn-ea"/>
+                <a:cs typeface="Arial"/>
+              </a:defRPr>
+            </a:lvl2pPr>
+            <a:lvl3pPr marL="1084263" indent="-228600" algn="l" rtl="0" eaLnBrk="1" fontAlgn="base" hangingPunct="1">
+              <a:spcBef>
+                <a:spcPct val="0"/>
+              </a:spcBef>
+              <a:spcAft>
+                <a:spcPct val="30000"/>
+              </a:spcAft>
+              <a:buClr>
+                <a:srgbClr val="005EAD"/>
+              </a:buClr>
+              <a:buFont typeface="Wingdings" charset="0"/>
+              <a:buChar char="§"/>
+              <a:defRPr sz="1600">
+                <a:solidFill>
+                  <a:schemeClr val="tx1"/>
+                </a:solidFill>
+                <a:latin typeface="Arial"/>
+                <a:ea typeface="+mn-ea"/>
+                <a:cs typeface="Arial"/>
+              </a:defRPr>
+            </a:lvl3pPr>
+            <a:lvl4pPr marL="1503363" indent="-228600" algn="l" rtl="0" eaLnBrk="1" fontAlgn="base" hangingPunct="1">
+              <a:spcBef>
+                <a:spcPct val="0"/>
+              </a:spcBef>
+              <a:spcAft>
+                <a:spcPct val="30000"/>
+              </a:spcAft>
+              <a:buClr>
+                <a:srgbClr val="005EAD"/>
+              </a:buClr>
+              <a:buFont typeface="Wingdings" charset="0"/>
+              <a:buChar char="§"/>
+              <a:tabLst/>
+              <a:defRPr sz="1600">
+                <a:solidFill>
+                  <a:schemeClr val="tx1"/>
+                </a:solidFill>
+                <a:latin typeface="Arial"/>
+                <a:ea typeface="+mn-ea"/>
+                <a:cs typeface="Arial"/>
+              </a:defRPr>
+            </a:lvl4pPr>
+            <a:lvl5pPr marL="1922463" indent="-228600" algn="l" rtl="0" eaLnBrk="1" fontAlgn="base" hangingPunct="1">
+              <a:spcBef>
+                <a:spcPct val="0"/>
+              </a:spcBef>
+              <a:spcAft>
+                <a:spcPct val="30000"/>
+              </a:spcAft>
+              <a:buClr>
+                <a:srgbClr val="005EAD"/>
+              </a:buClr>
+              <a:buFont typeface="Wingdings" charset="0"/>
+              <a:buChar char="§"/>
+              <a:defRPr sz="1600">
+                <a:solidFill>
+                  <a:schemeClr val="tx1"/>
+                </a:solidFill>
+                <a:latin typeface="Arial"/>
+                <a:ea typeface="+mn-ea"/>
+                <a:cs typeface="Arial"/>
+              </a:defRPr>
+            </a:lvl5pPr>
+            <a:lvl6pPr marL="2379663" indent="-228600" algn="l" rtl="0" eaLnBrk="1" fontAlgn="base" hangingPunct="1">
+              <a:spcBef>
+                <a:spcPct val="0"/>
+              </a:spcBef>
+              <a:spcAft>
+                <a:spcPct val="30000"/>
+              </a:spcAft>
+              <a:buClr>
+                <a:srgbClr val="00377D"/>
+              </a:buClr>
+              <a:buFont typeface="Wingdings" charset="0"/>
+              <a:buChar char="§"/>
+              <a:defRPr sz="1600">
+                <a:solidFill>
+                  <a:schemeClr val="tx1"/>
+                </a:solidFill>
+                <a:latin typeface="+mn-lt"/>
+                <a:ea typeface="+mn-ea"/>
+              </a:defRPr>
+            </a:lvl6pPr>
+            <a:lvl7pPr marL="2836863" indent="-228600" algn="l" rtl="0" eaLnBrk="1" fontAlgn="base" hangingPunct="1">
+              <a:spcBef>
+                <a:spcPct val="0"/>
+              </a:spcBef>
+              <a:spcAft>
+                <a:spcPct val="30000"/>
+              </a:spcAft>
+              <a:buClr>
+                <a:srgbClr val="00377D"/>
+              </a:buClr>
+              <a:buFont typeface="Wingdings" charset="0"/>
+              <a:buChar char="§"/>
+              <a:defRPr sz="1600">
+                <a:solidFill>
+                  <a:schemeClr val="tx1"/>
+                </a:solidFill>
+                <a:latin typeface="+mn-lt"/>
+                <a:ea typeface="+mn-ea"/>
+              </a:defRPr>
+            </a:lvl7pPr>
+            <a:lvl8pPr marL="3294063" indent="-228600" algn="l" rtl="0" eaLnBrk="1" fontAlgn="base" hangingPunct="1">
+              <a:spcBef>
+                <a:spcPct val="0"/>
+              </a:spcBef>
+              <a:spcAft>
+                <a:spcPct val="30000"/>
+              </a:spcAft>
+              <a:buClr>
+                <a:srgbClr val="00377D"/>
+              </a:buClr>
+              <a:buFont typeface="Wingdings" charset="0"/>
+              <a:buChar char="§"/>
+              <a:defRPr sz="1600">
+                <a:solidFill>
+                  <a:schemeClr val="tx1"/>
+                </a:solidFill>
+                <a:latin typeface="+mn-lt"/>
+                <a:ea typeface="+mn-ea"/>
+              </a:defRPr>
+            </a:lvl8pPr>
+            <a:lvl9pPr marL="3751263" indent="-228600" algn="l" rtl="0" eaLnBrk="1" fontAlgn="base" hangingPunct="1">
+              <a:spcBef>
+                <a:spcPct val="0"/>
+              </a:spcBef>
+              <a:spcAft>
+                <a:spcPct val="30000"/>
+              </a:spcAft>
+              <a:buClr>
+                <a:srgbClr val="00377D"/>
+              </a:buClr>
+              <a:buFont typeface="Wingdings" charset="0"/>
+              <a:buChar char="§"/>
+              <a:defRPr sz="1600">
+                <a:solidFill>
+                  <a:schemeClr val="tx1"/>
+                </a:solidFill>
+                <a:latin typeface="+mn-lt"/>
+                <a:ea typeface="+mn-ea"/>
+              </a:defRPr>
+            </a:lvl9pPr>
+          </a:lstStyle>
+          <a:p>
+            <a:pPr algn="just"/>
+            <a:endParaRPr lang="de-DE" sz="1000" dirty="0">
+              <a:latin typeface="Arial" panose="020B0604020202020204" pitchFamily="34" charset="0"/>
+              <a:ea typeface="Helvetica Neue" panose="02000503000000020004" pitchFamily="2" charset="0"/>
+              <a:cs typeface="Arial" panose="020B0604020202020204" pitchFamily="34" charset="0"/>
+            </a:endParaRPr>
+          </a:p>
+          <a:p>
+            <a:pPr algn="just"/>
+            <a:r>
+              <a:rPr lang="de-DE" sz="1000" dirty="0">
+                <a:latin typeface="Arial" panose="020B0604020202020204" pitchFamily="34" charset="0"/>
+                <a:ea typeface="Helvetica Neue" panose="02000503000000020004" pitchFamily="2" charset="0"/>
+                <a:cs typeface="Arial" panose="020B0604020202020204" pitchFamily="34" charset="0"/>
+              </a:rPr>
+              <a:t>Destillationsprozesse werden </a:t>
+            </a:r>
+            <a:r>
+              <a:rPr lang="de-DE" sz="1000" dirty="0" err="1">
+                <a:latin typeface="Arial" panose="020B0604020202020204" pitchFamily="34" charset="0"/>
+                <a:ea typeface="Helvetica Neue" panose="02000503000000020004" pitchFamily="2" charset="0"/>
+                <a:cs typeface="Arial" panose="020B0604020202020204" pitchFamily="34" charset="0"/>
+              </a:rPr>
+              <a:t>häfuig</a:t>
+            </a:r>
+            <a:r>
+              <a:rPr lang="de-DE" sz="1000" dirty="0">
+                <a:latin typeface="Arial" panose="020B0604020202020204" pitchFamily="34" charset="0"/>
+                <a:ea typeface="Helvetica Neue" panose="02000503000000020004" pitchFamily="2" charset="0"/>
+                <a:cs typeface="Arial" panose="020B0604020202020204" pitchFamily="34" charset="0"/>
+              </a:rPr>
+              <a:t> in </a:t>
+            </a:r>
+            <a:r>
+              <a:rPr lang="de-DE" sz="1000" dirty="0" err="1">
+                <a:latin typeface="Arial" panose="020B0604020202020204" pitchFamily="34" charset="0"/>
+                <a:ea typeface="Helvetica Neue" panose="02000503000000020004" pitchFamily="2" charset="0"/>
+                <a:cs typeface="Arial" panose="020B0604020202020204" pitchFamily="34" charset="0"/>
+              </a:rPr>
+              <a:t>chargen</a:t>
+            </a:r>
+            <a:r>
+              <a:rPr lang="de-DE" sz="1000" dirty="0">
+                <a:latin typeface="Arial" panose="020B0604020202020204" pitchFamily="34" charset="0"/>
+                <a:ea typeface="Helvetica Neue" panose="02000503000000020004" pitchFamily="2" charset="0"/>
+                <a:cs typeface="Arial" panose="020B0604020202020204" pitchFamily="34" charset="0"/>
+              </a:rPr>
+              <a:t> durch</a:t>
+            </a:r>
+          </a:p>
+          <a:p>
+            <a:pPr algn="just"/>
+            <a:endParaRPr lang="de-DE" sz="1000" kern="0" dirty="0">
+              <a:latin typeface="Arial" panose="020B0604020202020204" pitchFamily="34" charset="0"/>
+              <a:ea typeface="Helvetica Neue" panose="02000503000000020004" pitchFamily="2" charset="0"/>
+              <a:cs typeface="Arial" panose="020B0604020202020204" pitchFamily="34" charset="0"/>
+            </a:endParaRPr>
+          </a:p>
+          <a:p>
+            <a:pPr algn="just"/>
+            <a:r>
+              <a:rPr lang="de-DE" sz="1000" b="1" kern="0" dirty="0">
+                <a:latin typeface="Arial" panose="020B0604020202020204" pitchFamily="34" charset="0"/>
+                <a:ea typeface="Helvetica Neue" panose="02000503000000020004" pitchFamily="2" charset="0"/>
+                <a:cs typeface="Arial" panose="020B0604020202020204" pitchFamily="34" charset="0"/>
+              </a:rPr>
+              <a:t>Hinweis: </a:t>
+            </a:r>
+            <a:r>
+              <a:rPr lang="de-DE" sz="1000" kern="0" dirty="0">
+                <a:latin typeface="Arial" panose="020B0604020202020204" pitchFamily="34" charset="0"/>
+                <a:ea typeface="Helvetica Neue" panose="02000503000000020004" pitchFamily="2" charset="0"/>
+                <a:cs typeface="Arial" panose="020B0604020202020204" pitchFamily="34" charset="0"/>
+              </a:rPr>
+              <a:t>Grundsätzlich besteht die Automatisierung aus einer mechanischen und einer elektrotechnischen bzw. steuerungstechnischen Komponente. Sollten Sie dieses Thema wählen, können Sie wählen, ob Sie die an den mechanischen, den elektrotechnischen oder beiden Bestandteilen der Automatisierung arbeiten. </a:t>
+            </a:r>
+          </a:p>
+        </p:txBody>
+      </p:sp>
+      <p:cxnSp>
+        <p:nvCxnSpPr>
+          <p:cNvPr id="6" name="Gerade Verbindung 5">
+            <a:extLst>
+              <a:ext uri="{FF2B5EF4-FFF2-40B4-BE49-F238E27FC236}">
+                <a16:creationId xmlns:a16="http://schemas.microsoft.com/office/drawing/2014/main" id="{3FF8EA8A-D78B-7774-61B9-DC5905C0BCD1}"/>
+              </a:ext>
+            </a:extLst>
+          </p:cNvPr>
+          <p:cNvCxnSpPr>
+            <a:cxnSpLocks/>
+          </p:cNvCxnSpPr>
+          <p:nvPr/>
+        </p:nvCxnSpPr>
+        <p:spPr bwMode="auto">
+          <a:xfrm>
+            <a:off x="5038699" y="3147633"/>
+            <a:ext cx="4104000" cy="0"/>
+          </a:xfrm>
+          <a:prstGeom prst="line">
+            <a:avLst/>
+          </a:prstGeom>
+          <a:noFill/>
+          <a:ln w="38100" cap="sq" cmpd="sng" algn="ctr">
+            <a:solidFill>
+              <a:srgbClr val="BE006E"/>
+            </a:solidFill>
+            <a:prstDash val="solid"/>
+            <a:miter lim="800000"/>
+            <a:headEnd type="none" w="med" len="med"/>
+            <a:tailEnd type="none" w="med" len="med"/>
+          </a:ln>
+          <a:effectLst/>
+          <a:extLst>
+            <a:ext uri="{909E8E84-426E-40dd-AFC4-6F175D3DCCD1}">
+              <a14:hiddenFill xmlns="" xmlns:a14="http://schemas.microsoft.com/office/drawing/2010/main">
+                <a:solidFill>
+                  <a:schemeClr val="accent2"/>
+                </a:solidFill>
+              </a14:hiddenFill>
+            </a:ext>
+            <a:ext uri="{AF507438-7753-43e0-B8FC-AC1667EBCBE1}">
+              <a14:hiddenEffects xmlns="" xmlns:a14="http://schemas.microsoft.com/office/drawing/2010/main">
+                <a:effectLst>
+                  <a:outerShdw blurRad="63500" dist="35921" dir="2700000" algn="ctr" rotWithShape="0">
+                    <a:schemeClr val="bg2"/>
+                  </a:outerShdw>
+                </a:effectLst>
+              </a14:hiddenEffects>
+            </a:ext>
+          </a:extLst>
+        </p:spPr>
+      </p:cxnSp>
+      <p:sp>
+        <p:nvSpPr>
+          <p:cNvPr id="7" name="Inhaltsplatzhalter 3">
+            <a:extLst>
+              <a:ext uri="{FF2B5EF4-FFF2-40B4-BE49-F238E27FC236}">
+                <a16:creationId xmlns:a16="http://schemas.microsoft.com/office/drawing/2014/main" id="{7E244919-1365-B011-9B47-E03BA15414A1}"/>
+              </a:ext>
+            </a:extLst>
+          </p:cNvPr>
+          <p:cNvSpPr txBox="1">
+            <a:spLocks/>
+          </p:cNvSpPr>
+          <p:nvPr/>
+        </p:nvSpPr>
+        <p:spPr>
+          <a:xfrm>
+            <a:off x="5198510" y="3212688"/>
+            <a:ext cx="1939270" cy="504322"/>
+          </a:xfrm>
+          <a:prstGeom prst="rect">
+            <a:avLst/>
+          </a:prstGeom>
+        </p:spPr>
+        <p:txBody>
+          <a:bodyPr lIns="0" tIns="0" rIns="0" bIns="0"/>
+          <a:lstStyle>
+            <a:lvl1pPr marL="0" indent="0" algn="l" rtl="0" eaLnBrk="1" fontAlgn="base" hangingPunct="1">
+              <a:spcBef>
+                <a:spcPct val="0"/>
+              </a:spcBef>
+              <a:spcAft>
+                <a:spcPct val="30000"/>
+              </a:spcAft>
+              <a:buClr>
+                <a:srgbClr val="005EAD"/>
+              </a:buClr>
+              <a:buFont typeface="Wingdings" charset="0"/>
+              <a:buNone/>
+              <a:defRPr sz="1400">
+                <a:solidFill>
+                  <a:schemeClr val="tx1"/>
+                </a:solidFill>
+                <a:latin typeface="Arial"/>
+                <a:ea typeface="+mn-ea"/>
+                <a:cs typeface="Arial"/>
+              </a:defRPr>
+            </a:lvl1pPr>
+            <a:lvl2pPr marL="631825" indent="-180975" algn="l" rtl="0" eaLnBrk="1" fontAlgn="base" hangingPunct="1">
+              <a:spcBef>
+                <a:spcPct val="0"/>
+              </a:spcBef>
+              <a:spcAft>
+                <a:spcPct val="30000"/>
+              </a:spcAft>
+              <a:buClr>
+                <a:srgbClr val="005EAD"/>
+              </a:buClr>
+              <a:buFont typeface="Wingdings" charset="0"/>
+              <a:buChar char="§"/>
+              <a:defRPr sz="1600">
+                <a:solidFill>
+                  <a:schemeClr val="tx1"/>
+                </a:solidFill>
+                <a:latin typeface="Arial"/>
+                <a:ea typeface="+mn-ea"/>
+                <a:cs typeface="Arial"/>
+              </a:defRPr>
+            </a:lvl2pPr>
+            <a:lvl3pPr marL="1084263" indent="-228600" algn="l" rtl="0" eaLnBrk="1" fontAlgn="base" hangingPunct="1">
+              <a:spcBef>
+                <a:spcPct val="0"/>
+              </a:spcBef>
+              <a:spcAft>
+                <a:spcPct val="30000"/>
+              </a:spcAft>
+              <a:buClr>
+                <a:srgbClr val="005EAD"/>
+              </a:buClr>
+              <a:buFont typeface="Wingdings" charset="0"/>
+              <a:buChar char="§"/>
+              <a:defRPr sz="1600">
+                <a:solidFill>
+                  <a:schemeClr val="tx1"/>
+                </a:solidFill>
+                <a:latin typeface="Arial"/>
+                <a:ea typeface="+mn-ea"/>
+                <a:cs typeface="Arial"/>
+              </a:defRPr>
+            </a:lvl3pPr>
+            <a:lvl4pPr marL="1503363" indent="-228600" algn="l" rtl="0" eaLnBrk="1" fontAlgn="base" hangingPunct="1">
+              <a:spcBef>
+                <a:spcPct val="0"/>
+              </a:spcBef>
+              <a:spcAft>
+                <a:spcPct val="30000"/>
+              </a:spcAft>
+              <a:buClr>
+                <a:srgbClr val="005EAD"/>
+              </a:buClr>
+              <a:buFont typeface="Wingdings" charset="0"/>
+              <a:buChar char="§"/>
+              <a:tabLst/>
+              <a:defRPr sz="1600">
+                <a:solidFill>
+                  <a:schemeClr val="tx1"/>
+                </a:solidFill>
+                <a:latin typeface="Arial"/>
+                <a:ea typeface="+mn-ea"/>
+                <a:cs typeface="Arial"/>
+              </a:defRPr>
+            </a:lvl4pPr>
+            <a:lvl5pPr marL="1922463" indent="-228600" algn="l" rtl="0" eaLnBrk="1" fontAlgn="base" hangingPunct="1">
+              <a:spcBef>
+                <a:spcPct val="0"/>
+              </a:spcBef>
+              <a:spcAft>
+                <a:spcPct val="30000"/>
+              </a:spcAft>
+              <a:buClr>
+                <a:srgbClr val="005EAD"/>
+              </a:buClr>
+              <a:buFont typeface="Wingdings" charset="0"/>
+              <a:buChar char="§"/>
+              <a:defRPr sz="1600">
+                <a:solidFill>
+                  <a:schemeClr val="tx1"/>
+                </a:solidFill>
+                <a:latin typeface="Arial"/>
+                <a:ea typeface="+mn-ea"/>
+                <a:cs typeface="Arial"/>
+              </a:defRPr>
+            </a:lvl5pPr>
+            <a:lvl6pPr marL="2379663" indent="-228600" algn="l" rtl="0" eaLnBrk="1" fontAlgn="base" hangingPunct="1">
+              <a:spcBef>
+                <a:spcPct val="0"/>
+              </a:spcBef>
+              <a:spcAft>
+                <a:spcPct val="30000"/>
+              </a:spcAft>
+              <a:buClr>
+                <a:srgbClr val="00377D"/>
+              </a:buClr>
+              <a:buFont typeface="Wingdings" charset="0"/>
+              <a:buChar char="§"/>
+              <a:defRPr sz="1600">
+                <a:solidFill>
+                  <a:schemeClr val="tx1"/>
+                </a:solidFill>
+                <a:latin typeface="+mn-lt"/>
+                <a:ea typeface="+mn-ea"/>
+              </a:defRPr>
+            </a:lvl6pPr>
+            <a:lvl7pPr marL="2836863" indent="-228600" algn="l" rtl="0" eaLnBrk="1" fontAlgn="base" hangingPunct="1">
+              <a:spcBef>
+                <a:spcPct val="0"/>
+              </a:spcBef>
+              <a:spcAft>
+                <a:spcPct val="30000"/>
+              </a:spcAft>
+              <a:buClr>
+                <a:srgbClr val="00377D"/>
+              </a:buClr>
+              <a:buFont typeface="Wingdings" charset="0"/>
+              <a:buChar char="§"/>
+              <a:defRPr sz="1600">
+                <a:solidFill>
+                  <a:schemeClr val="tx1"/>
+                </a:solidFill>
+                <a:latin typeface="+mn-lt"/>
+                <a:ea typeface="+mn-ea"/>
+              </a:defRPr>
+            </a:lvl7pPr>
+            <a:lvl8pPr marL="3294063" indent="-228600" algn="l" rtl="0" eaLnBrk="1" fontAlgn="base" hangingPunct="1">
+              <a:spcBef>
+                <a:spcPct val="0"/>
+              </a:spcBef>
+              <a:spcAft>
+                <a:spcPct val="30000"/>
+              </a:spcAft>
+              <a:buClr>
+                <a:srgbClr val="00377D"/>
+              </a:buClr>
+              <a:buFont typeface="Wingdings" charset="0"/>
+              <a:buChar char="§"/>
+              <a:defRPr sz="1600">
+                <a:solidFill>
+                  <a:schemeClr val="tx1"/>
+                </a:solidFill>
+                <a:latin typeface="+mn-lt"/>
+                <a:ea typeface="+mn-ea"/>
+              </a:defRPr>
+            </a:lvl8pPr>
+            <a:lvl9pPr marL="3751263" indent="-228600" algn="l" rtl="0" eaLnBrk="1" fontAlgn="base" hangingPunct="1">
+              <a:spcBef>
+                <a:spcPct val="0"/>
+              </a:spcBef>
+              <a:spcAft>
+                <a:spcPct val="30000"/>
+              </a:spcAft>
+              <a:buClr>
+                <a:srgbClr val="00377D"/>
+              </a:buClr>
+              <a:buFont typeface="Wingdings" charset="0"/>
+              <a:buChar char="§"/>
+              <a:defRPr sz="1600">
+                <a:solidFill>
+                  <a:schemeClr val="tx1"/>
+                </a:solidFill>
+                <a:latin typeface="+mn-lt"/>
+                <a:ea typeface="+mn-ea"/>
+              </a:defRPr>
+            </a:lvl9pPr>
+          </a:lstStyle>
+          <a:p>
+            <a:pPr>
+              <a:spcAft>
+                <a:spcPts val="0"/>
+              </a:spcAft>
+            </a:pPr>
+            <a:r>
+              <a:rPr lang="de-DE" sz="1000" b="1" kern="0" dirty="0"/>
+              <a:t>Prof. Dr. Benjamin Buchwitz</a:t>
+            </a:r>
+          </a:p>
+          <a:p>
+            <a:pPr>
+              <a:spcAft>
+                <a:spcPts val="0"/>
+              </a:spcAft>
+            </a:pPr>
+            <a:r>
+              <a:rPr lang="de-DE" sz="1000" i="1" kern="0" dirty="0"/>
+              <a:t>Fachhochschule Südwestfalen</a:t>
+            </a:r>
+          </a:p>
+          <a:p>
+            <a:pPr>
+              <a:spcBef>
+                <a:spcPts val="400"/>
+              </a:spcBef>
+              <a:spcAft>
+                <a:spcPts val="0"/>
+              </a:spcAft>
+            </a:pPr>
+            <a:r>
+              <a:rPr lang="de-DE" sz="900" i="1" kern="0" dirty="0" err="1"/>
+              <a:t>benjamin.buchwitz@fh-swf.de</a:t>
+            </a:r>
+            <a:endParaRPr lang="de-DE" sz="900" i="1" kern="0" dirty="0"/>
+          </a:p>
+        </p:txBody>
+      </p:sp>
+      <p:sp>
+        <p:nvSpPr>
+          <p:cNvPr id="9" name="Textplatzhalter 2">
+            <a:extLst>
+              <a:ext uri="{FF2B5EF4-FFF2-40B4-BE49-F238E27FC236}">
+                <a16:creationId xmlns:a16="http://schemas.microsoft.com/office/drawing/2014/main" id="{D06A09AD-B874-104E-D1D1-EA87C4063563}"/>
+              </a:ext>
+            </a:extLst>
+          </p:cNvPr>
+          <p:cNvSpPr txBox="1">
+            <a:spLocks/>
+          </p:cNvSpPr>
+          <p:nvPr/>
+        </p:nvSpPr>
+        <p:spPr>
+          <a:xfrm>
+            <a:off x="5025052" y="2900723"/>
+            <a:ext cx="4432850" cy="260558"/>
+          </a:xfrm>
+          <a:prstGeom prst="rect">
+            <a:avLst/>
+          </a:prstGeom>
+        </p:spPr>
+        <p:txBody>
+          <a:bodyPr vert="horz" lIns="0" tIns="0" rIns="0" bIns="0" anchor="t" anchorCtr="0"/>
+          <a:lstStyle>
+            <a:lvl1pPr marL="0" marR="0" indent="0" algn="l" defTabSz="914400" rtl="0" eaLnBrk="0" fontAlgn="base" latinLnBrk="0" hangingPunct="0">
+              <a:lnSpc>
+                <a:spcPct val="100000"/>
+              </a:lnSpc>
+              <a:spcBef>
+                <a:spcPct val="0"/>
+              </a:spcBef>
+              <a:spcAft>
+                <a:spcPct val="30000"/>
+              </a:spcAft>
+              <a:buClr>
+                <a:srgbClr val="005EAD"/>
+              </a:buClr>
+              <a:buSzTx/>
+              <a:buFont typeface="Wingdings" charset="0"/>
+              <a:buNone/>
+              <a:tabLst/>
+              <a:defRPr sz="1800" b="1">
+                <a:solidFill>
+                  <a:schemeClr val="tx1"/>
+                </a:solidFill>
+                <a:latin typeface="Arial"/>
+                <a:ea typeface="+mn-ea"/>
+                <a:cs typeface="Arial"/>
+              </a:defRPr>
+            </a:lvl1pPr>
+            <a:lvl2pPr marL="665163" indent="-285750" algn="l" rtl="0" eaLnBrk="1" fontAlgn="base" hangingPunct="1">
+              <a:spcBef>
+                <a:spcPct val="0"/>
+              </a:spcBef>
+              <a:spcAft>
+                <a:spcPct val="30000"/>
+              </a:spcAft>
+              <a:buClr>
+                <a:srgbClr val="005EAD"/>
+              </a:buClr>
+              <a:buFont typeface="Wingdings" charset="0"/>
+              <a:buChar char="§"/>
+              <a:defRPr sz="1600">
+                <a:solidFill>
+                  <a:schemeClr val="tx1"/>
+                </a:solidFill>
+                <a:latin typeface="Arial"/>
+                <a:ea typeface="+mn-ea"/>
+                <a:cs typeface="Arial"/>
+              </a:defRPr>
+            </a:lvl2pPr>
+            <a:lvl3pPr marL="1084263" indent="-228600" algn="l" rtl="0" eaLnBrk="1" fontAlgn="base" hangingPunct="1">
+              <a:spcBef>
+                <a:spcPct val="0"/>
+              </a:spcBef>
+              <a:spcAft>
+                <a:spcPct val="30000"/>
+              </a:spcAft>
+              <a:buClr>
+                <a:srgbClr val="005EAD"/>
+              </a:buClr>
+              <a:buFont typeface="Wingdings" charset="0"/>
+              <a:buChar char="§"/>
+              <a:defRPr sz="1600">
+                <a:solidFill>
+                  <a:schemeClr val="tx1"/>
+                </a:solidFill>
+                <a:latin typeface="Arial"/>
+                <a:ea typeface="+mn-ea"/>
+                <a:cs typeface="Arial"/>
+              </a:defRPr>
+            </a:lvl3pPr>
+            <a:lvl4pPr marL="1503363" indent="-228600" algn="l" rtl="0" eaLnBrk="1" fontAlgn="base" hangingPunct="1">
+              <a:spcBef>
+                <a:spcPct val="0"/>
+              </a:spcBef>
+              <a:spcAft>
+                <a:spcPct val="30000"/>
+              </a:spcAft>
+              <a:buClr>
+                <a:srgbClr val="005EAD"/>
+              </a:buClr>
+              <a:buFont typeface="Wingdings" charset="0"/>
+              <a:buChar char="§"/>
+              <a:tabLst/>
+              <a:defRPr sz="1600">
+                <a:solidFill>
+                  <a:schemeClr val="tx1"/>
+                </a:solidFill>
+                <a:latin typeface="Arial"/>
+                <a:ea typeface="+mn-ea"/>
+                <a:cs typeface="Arial"/>
+              </a:defRPr>
+            </a:lvl4pPr>
+            <a:lvl5pPr marL="1922463" indent="-228600" algn="l" rtl="0" eaLnBrk="1" fontAlgn="base" hangingPunct="1">
+              <a:spcBef>
+                <a:spcPct val="0"/>
+              </a:spcBef>
+              <a:spcAft>
+                <a:spcPct val="30000"/>
+              </a:spcAft>
+              <a:buClr>
+                <a:srgbClr val="005EAD"/>
+              </a:buClr>
+              <a:buFont typeface="Wingdings" charset="0"/>
+              <a:buChar char="§"/>
+              <a:defRPr sz="1600">
+                <a:solidFill>
+                  <a:schemeClr val="tx1"/>
+                </a:solidFill>
+                <a:latin typeface="Arial"/>
+                <a:ea typeface="+mn-ea"/>
+                <a:cs typeface="Arial"/>
+              </a:defRPr>
+            </a:lvl5pPr>
+            <a:lvl6pPr marL="2379663" indent="-228600" algn="l" rtl="0" eaLnBrk="1" fontAlgn="base" hangingPunct="1">
+              <a:spcBef>
+                <a:spcPct val="0"/>
+              </a:spcBef>
+              <a:spcAft>
+                <a:spcPct val="30000"/>
+              </a:spcAft>
+              <a:buClr>
+                <a:srgbClr val="00377D"/>
+              </a:buClr>
+              <a:buFont typeface="Wingdings" charset="0"/>
+              <a:buChar char="§"/>
+              <a:defRPr sz="1600">
+                <a:solidFill>
+                  <a:schemeClr val="tx1"/>
+                </a:solidFill>
+                <a:latin typeface="+mn-lt"/>
+                <a:ea typeface="+mn-ea"/>
+              </a:defRPr>
+            </a:lvl6pPr>
+            <a:lvl7pPr marL="2836863" indent="-228600" algn="l" rtl="0" eaLnBrk="1" fontAlgn="base" hangingPunct="1">
+              <a:spcBef>
+                <a:spcPct val="0"/>
+              </a:spcBef>
+              <a:spcAft>
+                <a:spcPct val="30000"/>
+              </a:spcAft>
+              <a:buClr>
+                <a:srgbClr val="00377D"/>
+              </a:buClr>
+              <a:buFont typeface="Wingdings" charset="0"/>
+              <a:buChar char="§"/>
+              <a:defRPr sz="1600">
+                <a:solidFill>
+                  <a:schemeClr val="tx1"/>
+                </a:solidFill>
+                <a:latin typeface="+mn-lt"/>
+                <a:ea typeface="+mn-ea"/>
+              </a:defRPr>
+            </a:lvl7pPr>
+            <a:lvl8pPr marL="3294063" indent="-228600" algn="l" rtl="0" eaLnBrk="1" fontAlgn="base" hangingPunct="1">
+              <a:spcBef>
+                <a:spcPct val="0"/>
+              </a:spcBef>
+              <a:spcAft>
+                <a:spcPct val="30000"/>
+              </a:spcAft>
+              <a:buClr>
+                <a:srgbClr val="00377D"/>
+              </a:buClr>
+              <a:buFont typeface="Wingdings" charset="0"/>
+              <a:buChar char="§"/>
+              <a:defRPr sz="1600">
+                <a:solidFill>
+                  <a:schemeClr val="tx1"/>
+                </a:solidFill>
+                <a:latin typeface="+mn-lt"/>
+                <a:ea typeface="+mn-ea"/>
+              </a:defRPr>
+            </a:lvl8pPr>
+            <a:lvl9pPr marL="3751263" indent="-228600" algn="l" rtl="0" eaLnBrk="1" fontAlgn="base" hangingPunct="1">
+              <a:spcBef>
+                <a:spcPct val="0"/>
+              </a:spcBef>
+              <a:spcAft>
+                <a:spcPct val="30000"/>
+              </a:spcAft>
+              <a:buClr>
+                <a:srgbClr val="00377D"/>
+              </a:buClr>
+              <a:buFont typeface="Wingdings" charset="0"/>
+              <a:buChar char="§"/>
+              <a:defRPr sz="1600">
+                <a:solidFill>
+                  <a:schemeClr val="tx1"/>
+                </a:solidFill>
+                <a:latin typeface="+mn-lt"/>
+                <a:ea typeface="+mn-ea"/>
+              </a:defRPr>
+            </a:lvl9pPr>
+          </a:lstStyle>
+          <a:p>
+            <a:pPr>
+              <a:spcAft>
+                <a:spcPts val="400"/>
+              </a:spcAft>
+            </a:pPr>
+            <a:r>
+              <a:rPr lang="de-DE" sz="1200" kern="0" dirty="0"/>
+              <a:t>Ansprechpartner</a:t>
+            </a:r>
+          </a:p>
+        </p:txBody>
+      </p:sp>
+      <p:sp>
+        <p:nvSpPr>
+          <p:cNvPr id="10" name="Inhaltsplatzhalter 3">
+            <a:extLst>
+              <a:ext uri="{FF2B5EF4-FFF2-40B4-BE49-F238E27FC236}">
+                <a16:creationId xmlns:a16="http://schemas.microsoft.com/office/drawing/2014/main" id="{609C5739-B06D-ED85-F0C8-9814BF46E6F7}"/>
+              </a:ext>
+            </a:extLst>
+          </p:cNvPr>
+          <p:cNvSpPr txBox="1">
+            <a:spLocks/>
+          </p:cNvSpPr>
+          <p:nvPr/>
+        </p:nvSpPr>
+        <p:spPr>
+          <a:xfrm>
+            <a:off x="7293333" y="3212688"/>
+            <a:ext cx="1850668" cy="504322"/>
+          </a:xfrm>
+          <a:prstGeom prst="rect">
+            <a:avLst/>
+          </a:prstGeom>
+        </p:spPr>
+        <p:txBody>
+          <a:bodyPr lIns="0" tIns="0" rIns="0" bIns="0"/>
+          <a:lstStyle>
+            <a:lvl1pPr marL="0" indent="0" algn="l" rtl="0" eaLnBrk="1" fontAlgn="base" hangingPunct="1">
+              <a:spcBef>
+                <a:spcPct val="0"/>
+              </a:spcBef>
+              <a:spcAft>
+                <a:spcPct val="30000"/>
+              </a:spcAft>
+              <a:buClr>
+                <a:srgbClr val="005EAD"/>
+              </a:buClr>
+              <a:buFont typeface="Wingdings" charset="0"/>
+              <a:buNone/>
+              <a:defRPr sz="1400">
+                <a:solidFill>
+                  <a:schemeClr val="tx1"/>
+                </a:solidFill>
+                <a:latin typeface="Arial"/>
+                <a:ea typeface="+mn-ea"/>
+                <a:cs typeface="Arial"/>
+              </a:defRPr>
+            </a:lvl1pPr>
+            <a:lvl2pPr marL="631825" indent="-180975" algn="l" rtl="0" eaLnBrk="1" fontAlgn="base" hangingPunct="1">
+              <a:spcBef>
+                <a:spcPct val="0"/>
+              </a:spcBef>
+              <a:spcAft>
+                <a:spcPct val="30000"/>
+              </a:spcAft>
+              <a:buClr>
+                <a:srgbClr val="005EAD"/>
+              </a:buClr>
+              <a:buFont typeface="Wingdings" charset="0"/>
+              <a:buChar char="§"/>
+              <a:defRPr sz="1600">
+                <a:solidFill>
+                  <a:schemeClr val="tx1"/>
+                </a:solidFill>
+                <a:latin typeface="Arial"/>
+                <a:ea typeface="+mn-ea"/>
+                <a:cs typeface="Arial"/>
+              </a:defRPr>
+            </a:lvl2pPr>
+            <a:lvl3pPr marL="1084263" indent="-228600" algn="l" rtl="0" eaLnBrk="1" fontAlgn="base" hangingPunct="1">
+              <a:spcBef>
+                <a:spcPct val="0"/>
+              </a:spcBef>
+              <a:spcAft>
+                <a:spcPct val="30000"/>
+              </a:spcAft>
+              <a:buClr>
+                <a:srgbClr val="005EAD"/>
+              </a:buClr>
+              <a:buFont typeface="Wingdings" charset="0"/>
+              <a:buChar char="§"/>
+              <a:defRPr sz="1600">
+                <a:solidFill>
+                  <a:schemeClr val="tx1"/>
+                </a:solidFill>
+                <a:latin typeface="Arial"/>
+                <a:ea typeface="+mn-ea"/>
+                <a:cs typeface="Arial"/>
+              </a:defRPr>
+            </a:lvl3pPr>
+            <a:lvl4pPr marL="1503363" indent="-228600" algn="l" rtl="0" eaLnBrk="1" fontAlgn="base" hangingPunct="1">
+              <a:spcBef>
+                <a:spcPct val="0"/>
+              </a:spcBef>
+              <a:spcAft>
+                <a:spcPct val="30000"/>
+              </a:spcAft>
+              <a:buClr>
+                <a:srgbClr val="005EAD"/>
+              </a:buClr>
+              <a:buFont typeface="Wingdings" charset="0"/>
+              <a:buChar char="§"/>
+              <a:tabLst/>
+              <a:defRPr sz="1600">
+                <a:solidFill>
+                  <a:schemeClr val="tx1"/>
+                </a:solidFill>
+                <a:latin typeface="Arial"/>
+                <a:ea typeface="+mn-ea"/>
+                <a:cs typeface="Arial"/>
+              </a:defRPr>
+            </a:lvl4pPr>
+            <a:lvl5pPr marL="1922463" indent="-228600" algn="l" rtl="0" eaLnBrk="1" fontAlgn="base" hangingPunct="1">
+              <a:spcBef>
+                <a:spcPct val="0"/>
+              </a:spcBef>
+              <a:spcAft>
+                <a:spcPct val="30000"/>
+              </a:spcAft>
+              <a:buClr>
+                <a:srgbClr val="005EAD"/>
+              </a:buClr>
+              <a:buFont typeface="Wingdings" charset="0"/>
+              <a:buChar char="§"/>
+              <a:defRPr sz="1600">
+                <a:solidFill>
+                  <a:schemeClr val="tx1"/>
+                </a:solidFill>
+                <a:latin typeface="Arial"/>
+                <a:ea typeface="+mn-ea"/>
+                <a:cs typeface="Arial"/>
+              </a:defRPr>
+            </a:lvl5pPr>
+            <a:lvl6pPr marL="2379663" indent="-228600" algn="l" rtl="0" eaLnBrk="1" fontAlgn="base" hangingPunct="1">
+              <a:spcBef>
+                <a:spcPct val="0"/>
+              </a:spcBef>
+              <a:spcAft>
+                <a:spcPct val="30000"/>
+              </a:spcAft>
+              <a:buClr>
+                <a:srgbClr val="00377D"/>
+              </a:buClr>
+              <a:buFont typeface="Wingdings" charset="0"/>
+              <a:buChar char="§"/>
+              <a:defRPr sz="1600">
+                <a:solidFill>
+                  <a:schemeClr val="tx1"/>
+                </a:solidFill>
+                <a:latin typeface="+mn-lt"/>
+                <a:ea typeface="+mn-ea"/>
+              </a:defRPr>
+            </a:lvl6pPr>
+            <a:lvl7pPr marL="2836863" indent="-228600" algn="l" rtl="0" eaLnBrk="1" fontAlgn="base" hangingPunct="1">
+              <a:spcBef>
+                <a:spcPct val="0"/>
+              </a:spcBef>
+              <a:spcAft>
+                <a:spcPct val="30000"/>
+              </a:spcAft>
+              <a:buClr>
+                <a:srgbClr val="00377D"/>
+              </a:buClr>
+              <a:buFont typeface="Wingdings" charset="0"/>
+              <a:buChar char="§"/>
+              <a:defRPr sz="1600">
+                <a:solidFill>
+                  <a:schemeClr val="tx1"/>
+                </a:solidFill>
+                <a:latin typeface="+mn-lt"/>
+                <a:ea typeface="+mn-ea"/>
+              </a:defRPr>
+            </a:lvl7pPr>
+            <a:lvl8pPr marL="3294063" indent="-228600" algn="l" rtl="0" eaLnBrk="1" fontAlgn="base" hangingPunct="1">
+              <a:spcBef>
+                <a:spcPct val="0"/>
+              </a:spcBef>
+              <a:spcAft>
+                <a:spcPct val="30000"/>
+              </a:spcAft>
+              <a:buClr>
+                <a:srgbClr val="00377D"/>
+              </a:buClr>
+              <a:buFont typeface="Wingdings" charset="0"/>
+              <a:buChar char="§"/>
+              <a:defRPr sz="1600">
+                <a:solidFill>
+                  <a:schemeClr val="tx1"/>
+                </a:solidFill>
+                <a:latin typeface="+mn-lt"/>
+                <a:ea typeface="+mn-ea"/>
+              </a:defRPr>
+            </a:lvl8pPr>
+            <a:lvl9pPr marL="3751263" indent="-228600" algn="l" rtl="0" eaLnBrk="1" fontAlgn="base" hangingPunct="1">
+              <a:spcBef>
+                <a:spcPct val="0"/>
+              </a:spcBef>
+              <a:spcAft>
+                <a:spcPct val="30000"/>
+              </a:spcAft>
+              <a:buClr>
+                <a:srgbClr val="00377D"/>
+              </a:buClr>
+              <a:buFont typeface="Wingdings" charset="0"/>
+              <a:buChar char="§"/>
+              <a:defRPr sz="1600">
+                <a:solidFill>
+                  <a:schemeClr val="tx1"/>
+                </a:solidFill>
+                <a:latin typeface="+mn-lt"/>
+                <a:ea typeface="+mn-ea"/>
+              </a:defRPr>
+            </a:lvl9pPr>
+          </a:lstStyle>
+          <a:p>
+            <a:pPr>
+              <a:spcAft>
+                <a:spcPts val="0"/>
+              </a:spcAft>
+            </a:pPr>
+            <a:r>
+              <a:rPr lang="de-DE" sz="1000" b="1" kern="0" dirty="0"/>
+              <a:t>André Münzberg, </a:t>
+            </a:r>
+            <a:r>
+              <a:rPr lang="de-DE" sz="1000" b="1" kern="0" dirty="0" err="1"/>
+              <a:t>M.Sc</a:t>
+            </a:r>
+            <a:r>
+              <a:rPr lang="de-DE" sz="1000" b="1" kern="0" dirty="0"/>
+              <a:t>.</a:t>
+            </a:r>
+          </a:p>
+          <a:p>
+            <a:pPr>
+              <a:spcAft>
+                <a:spcPts val="0"/>
+              </a:spcAft>
+            </a:pPr>
+            <a:r>
+              <a:rPr lang="de-DE" sz="1000" i="1" kern="0" dirty="0"/>
+              <a:t>Fachhochschule Südwestfalen</a:t>
+            </a:r>
+          </a:p>
+          <a:p>
+            <a:pPr>
+              <a:spcBef>
+                <a:spcPts val="400"/>
+              </a:spcBef>
+              <a:spcAft>
+                <a:spcPts val="0"/>
+              </a:spcAft>
+            </a:pPr>
+            <a:r>
+              <a:rPr lang="de-DE" sz="900" i="1" kern="0" dirty="0" err="1"/>
+              <a:t>muenzberg.andre@fh-swf.de</a:t>
+            </a:r>
+            <a:endParaRPr lang="de-DE" sz="900" i="1" kern="0" dirty="0"/>
+          </a:p>
+        </p:txBody>
+      </p:sp>
+      <p:cxnSp>
+        <p:nvCxnSpPr>
+          <p:cNvPr id="12" name="Gerade Verbindung 11">
+            <a:extLst>
+              <a:ext uri="{FF2B5EF4-FFF2-40B4-BE49-F238E27FC236}">
+                <a16:creationId xmlns:a16="http://schemas.microsoft.com/office/drawing/2014/main" id="{3879E472-E768-8C7C-787B-081D48070637}"/>
+              </a:ext>
+            </a:extLst>
+          </p:cNvPr>
+          <p:cNvCxnSpPr/>
+          <p:nvPr/>
+        </p:nvCxnSpPr>
+        <p:spPr bwMode="auto">
+          <a:xfrm>
+            <a:off x="5052346" y="1374935"/>
+            <a:ext cx="4104000" cy="0"/>
+          </a:xfrm>
+          <a:prstGeom prst="line">
+            <a:avLst/>
+          </a:prstGeom>
+          <a:noFill/>
+          <a:ln w="38100" cap="sq" cmpd="sng" algn="ctr">
+            <a:solidFill>
+              <a:srgbClr val="BE006E"/>
+            </a:solidFill>
+            <a:prstDash val="solid"/>
+            <a:miter lim="800000"/>
+            <a:headEnd type="none" w="med" len="med"/>
+            <a:tailEnd type="none" w="med" len="med"/>
+          </a:ln>
+          <a:effectLst/>
+          <a:extLst>
+            <a:ext uri="{909E8E84-426E-40dd-AFC4-6F175D3DCCD1}">
+              <a14:hiddenFill xmlns="" xmlns:a14="http://schemas.microsoft.com/office/drawing/2010/main">
+                <a:solidFill>
+                  <a:schemeClr val="accent2"/>
+                </a:solidFill>
+              </a14:hiddenFill>
+            </a:ext>
+            <a:ext uri="{AF507438-7753-43e0-B8FC-AC1667EBCBE1}">
+              <a14:hiddenEffects xmlns="" xmlns:a14="http://schemas.microsoft.com/office/drawing/2010/main">
+                <a:effectLst>
+                  <a:outerShdw blurRad="63500" dist="35921" dir="2700000" algn="ctr" rotWithShape="0">
+                    <a:schemeClr val="bg2"/>
+                  </a:outerShdw>
+                </a:effectLst>
+              </a14:hiddenEffects>
+            </a:ext>
+          </a:extLst>
+        </p:spPr>
+      </p:cxnSp>
+      <p:sp>
+        <p:nvSpPr>
+          <p:cNvPr id="13" name="Inhaltsplatzhalter 3">
+            <a:extLst>
+              <a:ext uri="{FF2B5EF4-FFF2-40B4-BE49-F238E27FC236}">
+                <a16:creationId xmlns:a16="http://schemas.microsoft.com/office/drawing/2014/main" id="{4DA83BB4-5B74-8C0C-FD06-2E6EB5CAA15C}"/>
+              </a:ext>
+            </a:extLst>
+          </p:cNvPr>
+          <p:cNvSpPr txBox="1">
+            <a:spLocks/>
+          </p:cNvSpPr>
+          <p:nvPr/>
+        </p:nvSpPr>
+        <p:spPr>
+          <a:xfrm>
+            <a:off x="5212157" y="1439990"/>
+            <a:ext cx="3676042" cy="1309224"/>
+          </a:xfrm>
+          <a:prstGeom prst="rect">
+            <a:avLst/>
+          </a:prstGeom>
+        </p:spPr>
+        <p:txBody>
+          <a:bodyPr lIns="0" tIns="0" rIns="0" bIns="0"/>
+          <a:lstStyle>
+            <a:lvl1pPr marL="0" indent="0" algn="l" rtl="0" eaLnBrk="1" fontAlgn="base" hangingPunct="1">
+              <a:spcBef>
+                <a:spcPct val="0"/>
+              </a:spcBef>
+              <a:spcAft>
+                <a:spcPct val="30000"/>
+              </a:spcAft>
+              <a:buClr>
+                <a:srgbClr val="005EAD"/>
+              </a:buClr>
+              <a:buFont typeface="Wingdings" charset="0"/>
+              <a:buNone/>
+              <a:defRPr sz="1400">
+                <a:solidFill>
+                  <a:schemeClr val="tx1"/>
+                </a:solidFill>
+                <a:latin typeface="Arial"/>
+                <a:ea typeface="+mn-ea"/>
+                <a:cs typeface="Arial"/>
+              </a:defRPr>
+            </a:lvl1pPr>
+            <a:lvl2pPr marL="631825" indent="-180975" algn="l" rtl="0" eaLnBrk="1" fontAlgn="base" hangingPunct="1">
+              <a:spcBef>
+                <a:spcPct val="0"/>
+              </a:spcBef>
+              <a:spcAft>
+                <a:spcPct val="30000"/>
+              </a:spcAft>
+              <a:buClr>
+                <a:srgbClr val="005EAD"/>
+              </a:buClr>
+              <a:buFont typeface="Wingdings" charset="0"/>
+              <a:buChar char="§"/>
+              <a:defRPr sz="1600">
+                <a:solidFill>
+                  <a:schemeClr val="tx1"/>
+                </a:solidFill>
+                <a:latin typeface="Arial"/>
+                <a:ea typeface="+mn-ea"/>
+                <a:cs typeface="Arial"/>
+              </a:defRPr>
+            </a:lvl2pPr>
+            <a:lvl3pPr marL="1084263" indent="-228600" algn="l" rtl="0" eaLnBrk="1" fontAlgn="base" hangingPunct="1">
+              <a:spcBef>
+                <a:spcPct val="0"/>
+              </a:spcBef>
+              <a:spcAft>
+                <a:spcPct val="30000"/>
+              </a:spcAft>
+              <a:buClr>
+                <a:srgbClr val="005EAD"/>
+              </a:buClr>
+              <a:buFont typeface="Wingdings" charset="0"/>
+              <a:buChar char="§"/>
+              <a:defRPr sz="1600">
+                <a:solidFill>
+                  <a:schemeClr val="tx1"/>
+                </a:solidFill>
+                <a:latin typeface="Arial"/>
+                <a:ea typeface="+mn-ea"/>
+                <a:cs typeface="Arial"/>
+              </a:defRPr>
+            </a:lvl3pPr>
+            <a:lvl4pPr marL="1503363" indent="-228600" algn="l" rtl="0" eaLnBrk="1" fontAlgn="base" hangingPunct="1">
+              <a:spcBef>
+                <a:spcPct val="0"/>
+              </a:spcBef>
+              <a:spcAft>
+                <a:spcPct val="30000"/>
+              </a:spcAft>
+              <a:buClr>
+                <a:srgbClr val="005EAD"/>
+              </a:buClr>
+              <a:buFont typeface="Wingdings" charset="0"/>
+              <a:buChar char="§"/>
+              <a:tabLst/>
+              <a:defRPr sz="1600">
+                <a:solidFill>
+                  <a:schemeClr val="tx1"/>
+                </a:solidFill>
+                <a:latin typeface="Arial"/>
+                <a:ea typeface="+mn-ea"/>
+                <a:cs typeface="Arial"/>
+              </a:defRPr>
+            </a:lvl4pPr>
+            <a:lvl5pPr marL="1922463" indent="-228600" algn="l" rtl="0" eaLnBrk="1" fontAlgn="base" hangingPunct="1">
+              <a:spcBef>
+                <a:spcPct val="0"/>
+              </a:spcBef>
+              <a:spcAft>
+                <a:spcPct val="30000"/>
+              </a:spcAft>
+              <a:buClr>
+                <a:srgbClr val="005EAD"/>
+              </a:buClr>
+              <a:buFont typeface="Wingdings" charset="0"/>
+              <a:buChar char="§"/>
+              <a:defRPr sz="1600">
+                <a:solidFill>
+                  <a:schemeClr val="tx1"/>
+                </a:solidFill>
+                <a:latin typeface="Arial"/>
+                <a:ea typeface="+mn-ea"/>
+                <a:cs typeface="Arial"/>
+              </a:defRPr>
+            </a:lvl5pPr>
+            <a:lvl6pPr marL="2379663" indent="-228600" algn="l" rtl="0" eaLnBrk="1" fontAlgn="base" hangingPunct="1">
+              <a:spcBef>
+                <a:spcPct val="0"/>
+              </a:spcBef>
+              <a:spcAft>
+                <a:spcPct val="30000"/>
+              </a:spcAft>
+              <a:buClr>
+                <a:srgbClr val="00377D"/>
+              </a:buClr>
+              <a:buFont typeface="Wingdings" charset="0"/>
+              <a:buChar char="§"/>
+              <a:defRPr sz="1600">
+                <a:solidFill>
+                  <a:schemeClr val="tx1"/>
+                </a:solidFill>
+                <a:latin typeface="+mn-lt"/>
+                <a:ea typeface="+mn-ea"/>
+              </a:defRPr>
+            </a:lvl6pPr>
+            <a:lvl7pPr marL="2836863" indent="-228600" algn="l" rtl="0" eaLnBrk="1" fontAlgn="base" hangingPunct="1">
+              <a:spcBef>
+                <a:spcPct val="0"/>
+              </a:spcBef>
+              <a:spcAft>
+                <a:spcPct val="30000"/>
+              </a:spcAft>
+              <a:buClr>
+                <a:srgbClr val="00377D"/>
+              </a:buClr>
+              <a:buFont typeface="Wingdings" charset="0"/>
+              <a:buChar char="§"/>
+              <a:defRPr sz="1600">
+                <a:solidFill>
+                  <a:schemeClr val="tx1"/>
+                </a:solidFill>
+                <a:latin typeface="+mn-lt"/>
+                <a:ea typeface="+mn-ea"/>
+              </a:defRPr>
+            </a:lvl7pPr>
+            <a:lvl8pPr marL="3294063" indent="-228600" algn="l" rtl="0" eaLnBrk="1" fontAlgn="base" hangingPunct="1">
+              <a:spcBef>
+                <a:spcPct val="0"/>
+              </a:spcBef>
+              <a:spcAft>
+                <a:spcPct val="30000"/>
+              </a:spcAft>
+              <a:buClr>
+                <a:srgbClr val="00377D"/>
+              </a:buClr>
+              <a:buFont typeface="Wingdings" charset="0"/>
+              <a:buChar char="§"/>
+              <a:defRPr sz="1600">
+                <a:solidFill>
+                  <a:schemeClr val="tx1"/>
+                </a:solidFill>
+                <a:latin typeface="+mn-lt"/>
+                <a:ea typeface="+mn-ea"/>
+              </a:defRPr>
+            </a:lvl8pPr>
+            <a:lvl9pPr marL="3751263" indent="-228600" algn="l" rtl="0" eaLnBrk="1" fontAlgn="base" hangingPunct="1">
+              <a:spcBef>
+                <a:spcPct val="0"/>
+              </a:spcBef>
+              <a:spcAft>
+                <a:spcPct val="30000"/>
+              </a:spcAft>
+              <a:buClr>
+                <a:srgbClr val="00377D"/>
+              </a:buClr>
+              <a:buFont typeface="Wingdings" charset="0"/>
+              <a:buChar char="§"/>
+              <a:defRPr sz="1600">
+                <a:solidFill>
+                  <a:schemeClr val="tx1"/>
+                </a:solidFill>
+                <a:latin typeface="+mn-lt"/>
+                <a:ea typeface="+mn-ea"/>
+              </a:defRPr>
+            </a:lvl9pPr>
+          </a:lstStyle>
+          <a:p>
+            <a:pPr>
+              <a:spcAft>
+                <a:spcPts val="400"/>
+              </a:spcAft>
+            </a:pPr>
+            <a:r>
+              <a:rPr lang="en-GB" sz="1000" kern="0" dirty="0" err="1"/>
+              <a:t>Heidolph</a:t>
+            </a:r>
+            <a:r>
+              <a:rPr lang="en-GB" sz="1000" kern="0" dirty="0"/>
+              <a:t> (2026). Automated Evaporation , https://</a:t>
+            </a:r>
+            <a:r>
+              <a:rPr lang="en-GB" sz="1000" kern="0" dirty="0" err="1"/>
+              <a:t>heidolph.com</a:t>
+            </a:r>
+            <a:r>
+              <a:rPr lang="en-GB" sz="1000" kern="0" dirty="0"/>
+              <a:t>/</a:t>
+            </a:r>
+            <a:r>
+              <a:rPr lang="en-GB" sz="1000" kern="0" dirty="0" err="1"/>
+              <a:t>emea</a:t>
+            </a:r>
+            <a:r>
+              <a:rPr lang="en-GB" sz="1000" kern="0" dirty="0"/>
+              <a:t>/</a:t>
+            </a:r>
+            <a:r>
+              <a:rPr lang="en-GB" sz="1000" kern="0" dirty="0" err="1"/>
+              <a:t>en</a:t>
+            </a:r>
+            <a:r>
+              <a:rPr lang="en-GB" sz="1000" kern="0" dirty="0"/>
+              <a:t>/automated-evaporation~c22</a:t>
+            </a:r>
+            <a:endParaRPr lang="en-GB" sz="1000" kern="0" noProof="0" dirty="0"/>
+          </a:p>
+        </p:txBody>
+      </p:sp>
+      <p:sp>
+        <p:nvSpPr>
+          <p:cNvPr id="14" name="Textplatzhalter 2">
+            <a:extLst>
+              <a:ext uri="{FF2B5EF4-FFF2-40B4-BE49-F238E27FC236}">
+                <a16:creationId xmlns:a16="http://schemas.microsoft.com/office/drawing/2014/main" id="{B8F4018F-E9E9-2BD4-5C71-B61370C9C3DD}"/>
+              </a:ext>
+            </a:extLst>
+          </p:cNvPr>
+          <p:cNvSpPr txBox="1">
+            <a:spLocks/>
+          </p:cNvSpPr>
+          <p:nvPr/>
+        </p:nvSpPr>
+        <p:spPr>
+          <a:xfrm>
+            <a:off x="5038699" y="1128025"/>
+            <a:ext cx="4432850" cy="260558"/>
+          </a:xfrm>
+          <a:prstGeom prst="rect">
+            <a:avLst/>
+          </a:prstGeom>
+        </p:spPr>
+        <p:txBody>
+          <a:bodyPr vert="horz" lIns="0" tIns="0" rIns="0" bIns="0" anchor="t" anchorCtr="0"/>
+          <a:lstStyle>
+            <a:lvl1pPr marL="0" marR="0" indent="0" algn="l" defTabSz="914400" rtl="0" eaLnBrk="0" fontAlgn="base" latinLnBrk="0" hangingPunct="0">
+              <a:lnSpc>
+                <a:spcPct val="100000"/>
+              </a:lnSpc>
+              <a:spcBef>
+                <a:spcPct val="0"/>
+              </a:spcBef>
+              <a:spcAft>
+                <a:spcPct val="30000"/>
+              </a:spcAft>
+              <a:buClr>
+                <a:srgbClr val="005EAD"/>
+              </a:buClr>
+              <a:buSzTx/>
+              <a:buFont typeface="Wingdings" charset="0"/>
+              <a:buNone/>
+              <a:tabLst/>
+              <a:defRPr sz="1800" b="1">
+                <a:solidFill>
+                  <a:schemeClr val="tx1"/>
+                </a:solidFill>
+                <a:latin typeface="Arial"/>
+                <a:ea typeface="+mn-ea"/>
+                <a:cs typeface="Arial"/>
+              </a:defRPr>
+            </a:lvl1pPr>
+            <a:lvl2pPr marL="665163" indent="-285750" algn="l" rtl="0" eaLnBrk="1" fontAlgn="base" hangingPunct="1">
+              <a:spcBef>
+                <a:spcPct val="0"/>
+              </a:spcBef>
+              <a:spcAft>
+                <a:spcPct val="30000"/>
+              </a:spcAft>
+              <a:buClr>
+                <a:srgbClr val="005EAD"/>
+              </a:buClr>
+              <a:buFont typeface="Wingdings" charset="0"/>
+              <a:buChar char="§"/>
+              <a:defRPr sz="1600">
+                <a:solidFill>
+                  <a:schemeClr val="tx1"/>
+                </a:solidFill>
+                <a:latin typeface="Arial"/>
+                <a:ea typeface="+mn-ea"/>
+                <a:cs typeface="Arial"/>
+              </a:defRPr>
+            </a:lvl2pPr>
+            <a:lvl3pPr marL="1084263" indent="-228600" algn="l" rtl="0" eaLnBrk="1" fontAlgn="base" hangingPunct="1">
+              <a:spcBef>
+                <a:spcPct val="0"/>
+              </a:spcBef>
+              <a:spcAft>
+                <a:spcPct val="30000"/>
+              </a:spcAft>
+              <a:buClr>
+                <a:srgbClr val="005EAD"/>
+              </a:buClr>
+              <a:buFont typeface="Wingdings" charset="0"/>
+              <a:buChar char="§"/>
+              <a:defRPr sz="1600">
+                <a:solidFill>
+                  <a:schemeClr val="tx1"/>
+                </a:solidFill>
+                <a:latin typeface="Arial"/>
+                <a:ea typeface="+mn-ea"/>
+                <a:cs typeface="Arial"/>
+              </a:defRPr>
+            </a:lvl3pPr>
+            <a:lvl4pPr marL="1503363" indent="-228600" algn="l" rtl="0" eaLnBrk="1" fontAlgn="base" hangingPunct="1">
+              <a:spcBef>
+                <a:spcPct val="0"/>
+              </a:spcBef>
+              <a:spcAft>
+                <a:spcPct val="30000"/>
+              </a:spcAft>
+              <a:buClr>
+                <a:srgbClr val="005EAD"/>
+              </a:buClr>
+              <a:buFont typeface="Wingdings" charset="0"/>
+              <a:buChar char="§"/>
+              <a:tabLst/>
+              <a:defRPr sz="1600">
+                <a:solidFill>
+                  <a:schemeClr val="tx1"/>
+                </a:solidFill>
+                <a:latin typeface="Arial"/>
+                <a:ea typeface="+mn-ea"/>
+                <a:cs typeface="Arial"/>
+              </a:defRPr>
+            </a:lvl4pPr>
+            <a:lvl5pPr marL="1922463" indent="-228600" algn="l" rtl="0" eaLnBrk="1" fontAlgn="base" hangingPunct="1">
+              <a:spcBef>
+                <a:spcPct val="0"/>
+              </a:spcBef>
+              <a:spcAft>
+                <a:spcPct val="30000"/>
+              </a:spcAft>
+              <a:buClr>
+                <a:srgbClr val="005EAD"/>
+              </a:buClr>
+              <a:buFont typeface="Wingdings" charset="0"/>
+              <a:buChar char="§"/>
+              <a:defRPr sz="1600">
+                <a:solidFill>
+                  <a:schemeClr val="tx1"/>
+                </a:solidFill>
+                <a:latin typeface="Arial"/>
+                <a:ea typeface="+mn-ea"/>
+                <a:cs typeface="Arial"/>
+              </a:defRPr>
+            </a:lvl5pPr>
+            <a:lvl6pPr marL="2379663" indent="-228600" algn="l" rtl="0" eaLnBrk="1" fontAlgn="base" hangingPunct="1">
+              <a:spcBef>
+                <a:spcPct val="0"/>
+              </a:spcBef>
+              <a:spcAft>
+                <a:spcPct val="30000"/>
+              </a:spcAft>
+              <a:buClr>
+                <a:srgbClr val="00377D"/>
+              </a:buClr>
+              <a:buFont typeface="Wingdings" charset="0"/>
+              <a:buChar char="§"/>
+              <a:defRPr sz="1600">
+                <a:solidFill>
+                  <a:schemeClr val="tx1"/>
+                </a:solidFill>
+                <a:latin typeface="+mn-lt"/>
+                <a:ea typeface="+mn-ea"/>
+              </a:defRPr>
+            </a:lvl6pPr>
+            <a:lvl7pPr marL="2836863" indent="-228600" algn="l" rtl="0" eaLnBrk="1" fontAlgn="base" hangingPunct="1">
+              <a:spcBef>
+                <a:spcPct val="0"/>
+              </a:spcBef>
+              <a:spcAft>
+                <a:spcPct val="30000"/>
+              </a:spcAft>
+              <a:buClr>
+                <a:srgbClr val="00377D"/>
+              </a:buClr>
+              <a:buFont typeface="Wingdings" charset="0"/>
+              <a:buChar char="§"/>
+              <a:defRPr sz="1600">
+                <a:solidFill>
+                  <a:schemeClr val="tx1"/>
+                </a:solidFill>
+                <a:latin typeface="+mn-lt"/>
+                <a:ea typeface="+mn-ea"/>
+              </a:defRPr>
+            </a:lvl7pPr>
+            <a:lvl8pPr marL="3294063" indent="-228600" algn="l" rtl="0" eaLnBrk="1" fontAlgn="base" hangingPunct="1">
+              <a:spcBef>
+                <a:spcPct val="0"/>
+              </a:spcBef>
+              <a:spcAft>
+                <a:spcPct val="30000"/>
+              </a:spcAft>
+              <a:buClr>
+                <a:srgbClr val="00377D"/>
+              </a:buClr>
+              <a:buFont typeface="Wingdings" charset="0"/>
+              <a:buChar char="§"/>
+              <a:defRPr sz="1600">
+                <a:solidFill>
+                  <a:schemeClr val="tx1"/>
+                </a:solidFill>
+                <a:latin typeface="+mn-lt"/>
+                <a:ea typeface="+mn-ea"/>
+              </a:defRPr>
+            </a:lvl8pPr>
+            <a:lvl9pPr marL="3751263" indent="-228600" algn="l" rtl="0" eaLnBrk="1" fontAlgn="base" hangingPunct="1">
+              <a:spcBef>
+                <a:spcPct val="0"/>
+              </a:spcBef>
+              <a:spcAft>
+                <a:spcPct val="30000"/>
+              </a:spcAft>
+              <a:buClr>
+                <a:srgbClr val="00377D"/>
+              </a:buClr>
+              <a:buFont typeface="Wingdings" charset="0"/>
+              <a:buChar char="§"/>
+              <a:defRPr sz="1600">
+                <a:solidFill>
+                  <a:schemeClr val="tx1"/>
+                </a:solidFill>
+                <a:latin typeface="+mn-lt"/>
+                <a:ea typeface="+mn-ea"/>
+              </a:defRPr>
+            </a:lvl9pPr>
+          </a:lstStyle>
+          <a:p>
+            <a:pPr>
+              <a:spcAft>
+                <a:spcPts val="400"/>
+              </a:spcAft>
+            </a:pPr>
+            <a:r>
+              <a:rPr lang="de-DE" sz="1200" kern="0" dirty="0"/>
+              <a:t>Einstiegsliteratur</a:t>
+            </a:r>
+          </a:p>
+        </p:txBody>
+      </p:sp>
+      <p:sp>
+        <p:nvSpPr>
+          <p:cNvPr id="20" name="Textfeld 19">
+            <a:extLst>
+              <a:ext uri="{FF2B5EF4-FFF2-40B4-BE49-F238E27FC236}">
+                <a16:creationId xmlns:a16="http://schemas.microsoft.com/office/drawing/2014/main" id="{13DF7190-1F7E-D237-76E2-3F46968A25AE}"/>
+              </a:ext>
+            </a:extLst>
+          </p:cNvPr>
+          <p:cNvSpPr txBox="1"/>
+          <p:nvPr/>
+        </p:nvSpPr>
+        <p:spPr>
+          <a:xfrm>
+            <a:off x="5198510" y="3957851"/>
+            <a:ext cx="3689688" cy="504322"/>
+          </a:xfrm>
+          <a:prstGeom prst="rect">
+            <a:avLst/>
+          </a:prstGeom>
+          <a:noFill/>
+          <a:ln>
+            <a:solidFill>
+              <a:schemeClr val="bg1">
+                <a:lumMod val="50000"/>
+              </a:schemeClr>
+            </a:solidFill>
+          </a:ln>
+        </p:spPr>
+        <p:txBody>
+          <a:bodyPr wrap="square" numCol="2" rtlCol="0" anchor="ctr">
+            <a:noAutofit/>
+          </a:bodyPr>
+          <a:lstStyle/>
+          <a:p>
+            <a:pPr algn="l"/>
+            <a:r>
+              <a:rPr lang="de-DE" sz="800" b="1" dirty="0">
+                <a:solidFill>
+                  <a:schemeClr val="bg1">
+                    <a:lumMod val="50000"/>
+                  </a:schemeClr>
+                </a:solidFill>
+              </a:rPr>
+              <a:t>Niveau</a:t>
+            </a:r>
+            <a:r>
+              <a:rPr lang="de-DE" sz="800" dirty="0">
+                <a:solidFill>
+                  <a:schemeClr val="bg1">
+                    <a:lumMod val="50000"/>
+                  </a:schemeClr>
+                </a:solidFill>
+              </a:rPr>
+              <a:t>: Bachelor oder Master</a:t>
+            </a:r>
+          </a:p>
+          <a:p>
+            <a:pPr algn="l"/>
+            <a:r>
+              <a:rPr lang="de-DE" sz="800" b="1" dirty="0">
+                <a:solidFill>
+                  <a:schemeClr val="bg1">
+                    <a:lumMod val="50000"/>
+                  </a:schemeClr>
+                </a:solidFill>
+              </a:rPr>
+              <a:t>Art</a:t>
+            </a:r>
+            <a:r>
+              <a:rPr lang="de-DE" sz="800" dirty="0">
+                <a:solidFill>
+                  <a:schemeClr val="bg1">
+                    <a:lumMod val="50000"/>
+                  </a:schemeClr>
+                </a:solidFill>
+              </a:rPr>
+              <a:t>: Seminar- &amp; Abschlussarbeit</a:t>
+            </a:r>
+          </a:p>
+          <a:p>
+            <a:pPr algn="l"/>
+            <a:r>
+              <a:rPr lang="de-DE" sz="800" b="1" dirty="0">
+                <a:solidFill>
+                  <a:schemeClr val="bg1">
+                    <a:lumMod val="50000"/>
+                  </a:schemeClr>
+                </a:solidFill>
+              </a:rPr>
+              <a:t>Methode: </a:t>
+            </a:r>
+            <a:r>
+              <a:rPr lang="de-DE" sz="800" dirty="0">
+                <a:solidFill>
+                  <a:schemeClr val="bg1">
+                    <a:lumMod val="50000"/>
+                  </a:schemeClr>
+                </a:solidFill>
+              </a:rPr>
+              <a:t>Empirisch &amp; Entwicklung</a:t>
+            </a:r>
+          </a:p>
+          <a:p>
+            <a:pPr algn="l"/>
+            <a:r>
+              <a:rPr lang="de-DE" sz="800" b="1" dirty="0">
+                <a:solidFill>
+                  <a:schemeClr val="bg1">
+                    <a:lumMod val="50000"/>
+                  </a:schemeClr>
+                </a:solidFill>
+              </a:rPr>
+              <a:t>Unternehmenskooperation</a:t>
+            </a:r>
+            <a:r>
+              <a:rPr lang="de-DE" sz="800" dirty="0">
+                <a:solidFill>
+                  <a:schemeClr val="bg1">
+                    <a:lumMod val="50000"/>
+                  </a:schemeClr>
+                </a:solidFill>
+              </a:rPr>
+              <a:t>: Nein</a:t>
+            </a:r>
+          </a:p>
+          <a:p>
+            <a:pPr algn="l"/>
+            <a:r>
+              <a:rPr lang="de-DE" sz="800" b="1" dirty="0">
+                <a:solidFill>
+                  <a:schemeClr val="bg1">
+                    <a:lumMod val="50000"/>
+                  </a:schemeClr>
+                </a:solidFill>
+              </a:rPr>
+              <a:t>Sperrvermerk</a:t>
+            </a:r>
+            <a:r>
+              <a:rPr lang="de-DE" sz="800" dirty="0">
+                <a:solidFill>
+                  <a:schemeClr val="bg1">
+                    <a:lumMod val="50000"/>
+                  </a:schemeClr>
+                </a:solidFill>
+              </a:rPr>
+              <a:t>: Nein</a:t>
+            </a:r>
+          </a:p>
+          <a:p>
+            <a:pPr algn="l"/>
+            <a:r>
+              <a:rPr lang="de-DE" sz="800" b="1" dirty="0">
+                <a:solidFill>
+                  <a:schemeClr val="bg1">
+                    <a:lumMod val="50000"/>
+                  </a:schemeClr>
+                </a:solidFill>
+              </a:rPr>
+              <a:t>Start: </a:t>
+            </a:r>
+            <a:r>
+              <a:rPr lang="de-DE" sz="800" dirty="0">
+                <a:solidFill>
+                  <a:schemeClr val="bg1">
+                    <a:lumMod val="50000"/>
+                  </a:schemeClr>
+                </a:solidFill>
+              </a:rPr>
+              <a:t>ab sofort</a:t>
+            </a:r>
+          </a:p>
+        </p:txBody>
+      </p:sp>
+    </p:spTree>
+    <p:extLst>
+      <p:ext uri="{BB962C8B-B14F-4D97-AF65-F5344CB8AC3E}">
+        <p14:creationId xmlns:p14="http://schemas.microsoft.com/office/powerpoint/2010/main" val="2038355833"/>
+      </p:ext>
+    </p:extLst>
+  </p:cSld>
+  <p:clrMapOvr>
+    <a:masterClrMapping/>
+  </p:clrMapOvr>
+  <p:transition>
+    <p:fade/>
+  </p:transition>
+</p:sld>
+</file>
+
+<file path=ppt/slides/slide4.xml><?xml version="1.0" encoding="utf-8"?>
+<p:sld xmlns:a="http://schemas.openxmlformats.org/drawingml/2006/main" xmlns:r="http://schemas.openxmlformats.org/officeDocument/2006/relationships" xmlns:p="http://schemas.openxmlformats.org/presentationml/2006/main" show="0">
+  <p:cSld>
+    <p:spTree>
+      <p:nvGrpSpPr>
+        <p:cNvPr id="1" name="">
+          <a:extLst>
+            <a:ext uri="{FF2B5EF4-FFF2-40B4-BE49-F238E27FC236}">
+              <a16:creationId xmlns:a16="http://schemas.microsoft.com/office/drawing/2014/main" id="{7370DDB1-D839-A959-076C-B6B7E6EC6DBC}"/>
+            </a:ext>
+          </a:extLst>
+        </p:cNvPr>
+        <p:cNvGrpSpPr/>
+        <p:nvPr/>
+      </p:nvGrpSpPr>
+      <p:grpSpPr>
+        <a:xfrm>
+          <a:off x="0" y="0"/>
+          <a:ext cx="0" cy="0"/>
+          <a:chOff x="0" y="0"/>
+          <a:chExt cx="0" cy="0"/>
+        </a:xfrm>
+      </p:grpSpPr>
+      <p:sp>
+        <p:nvSpPr>
+          <p:cNvPr id="2" name="Titel 1">
+            <a:extLst>
+              <a:ext uri="{FF2B5EF4-FFF2-40B4-BE49-F238E27FC236}">
+                <a16:creationId xmlns:a16="http://schemas.microsoft.com/office/drawing/2014/main" id="{86F76CE6-9990-7051-3ACE-101177A8D106}"/>
+              </a:ext>
+            </a:extLst>
+          </p:cNvPr>
+          <p:cNvSpPr>
+            <a:spLocks noGrp="1"/>
+          </p:cNvSpPr>
+          <p:nvPr>
+            <p:ph type="title"/>
+          </p:nvPr>
+        </p:nvSpPr>
+        <p:spPr/>
+        <p:txBody>
+          <a:bodyPr/>
+          <a:lstStyle/>
+          <a:p>
+            <a:r>
+              <a:rPr lang="de-DE" sz="1800" dirty="0"/>
+              <a:t>VORLAGE: Titel</a:t>
+            </a:r>
+          </a:p>
+        </p:txBody>
+      </p:sp>
+      <p:sp>
+        <p:nvSpPr>
+          <p:cNvPr id="3" name="Textplatzhalter 2">
+            <a:extLst>
+              <a:ext uri="{FF2B5EF4-FFF2-40B4-BE49-F238E27FC236}">
+                <a16:creationId xmlns:a16="http://schemas.microsoft.com/office/drawing/2014/main" id="{279A0DC2-07C9-9E12-C393-8EC8D893BA42}"/>
+              </a:ext>
+            </a:extLst>
+          </p:cNvPr>
+          <p:cNvSpPr>
+            <a:spLocks noGrp="1"/>
+          </p:cNvSpPr>
+          <p:nvPr>
+            <p:ph type="body" sz="quarter" idx="10"/>
+          </p:nvPr>
+        </p:nvSpPr>
+        <p:spPr/>
+        <p:txBody>
+          <a:bodyPr/>
+          <a:lstStyle/>
+          <a:p>
+            <a:r>
+              <a:rPr lang="en-GB" sz="1400" noProof="0" dirty="0"/>
+              <a:t>Titel Englisch</a:t>
+            </a:r>
+          </a:p>
+        </p:txBody>
+      </p:sp>
+      <p:sp>
+        <p:nvSpPr>
+          <p:cNvPr id="5" name="Inhaltsplatzhalter 3">
+            <a:extLst>
+              <a:ext uri="{FF2B5EF4-FFF2-40B4-BE49-F238E27FC236}">
+                <a16:creationId xmlns:a16="http://schemas.microsoft.com/office/drawing/2014/main" id="{1D8E8259-933E-A15F-7A40-FEA2C129EC68}"/>
+              </a:ext>
+            </a:extLst>
+          </p:cNvPr>
+          <p:cNvSpPr txBox="1">
+            <a:spLocks/>
+          </p:cNvSpPr>
+          <p:nvPr/>
+        </p:nvSpPr>
+        <p:spPr>
+          <a:xfrm>
+            <a:off x="254713" y="1128025"/>
+            <a:ext cx="4432849" cy="3423387"/>
+          </a:xfrm>
+          <a:prstGeom prst="rect">
+            <a:avLst/>
+          </a:prstGeom>
+        </p:spPr>
+        <p:txBody>
+          <a:bodyPr lIns="0" tIns="0" rIns="0" bIns="0"/>
+          <a:lstStyle>
+            <a:lvl1pPr marL="0" indent="0" algn="l" rtl="0" eaLnBrk="1" fontAlgn="base" hangingPunct="1">
+              <a:spcBef>
+                <a:spcPct val="0"/>
+              </a:spcBef>
+              <a:spcAft>
+                <a:spcPct val="30000"/>
+              </a:spcAft>
+              <a:buClr>
+                <a:srgbClr val="005EAD"/>
+              </a:buClr>
+              <a:buFont typeface="Wingdings" charset="0"/>
+              <a:buNone/>
+              <a:defRPr sz="1400">
+                <a:solidFill>
+                  <a:schemeClr val="tx1"/>
+                </a:solidFill>
+                <a:latin typeface="Arial"/>
+                <a:ea typeface="+mn-ea"/>
+                <a:cs typeface="Arial"/>
+              </a:defRPr>
+            </a:lvl1pPr>
+            <a:lvl2pPr marL="631825" indent="-180975" algn="l" rtl="0" eaLnBrk="1" fontAlgn="base" hangingPunct="1">
+              <a:spcBef>
+                <a:spcPct val="0"/>
+              </a:spcBef>
+              <a:spcAft>
+                <a:spcPct val="30000"/>
+              </a:spcAft>
+              <a:buClr>
+                <a:srgbClr val="005EAD"/>
+              </a:buClr>
+              <a:buFont typeface="Wingdings" charset="0"/>
+              <a:buChar char="§"/>
+              <a:defRPr sz="1600">
+                <a:solidFill>
+                  <a:schemeClr val="tx1"/>
+                </a:solidFill>
+                <a:latin typeface="Arial"/>
+                <a:ea typeface="+mn-ea"/>
+                <a:cs typeface="Arial"/>
+              </a:defRPr>
+            </a:lvl2pPr>
+            <a:lvl3pPr marL="1084263" indent="-228600" algn="l" rtl="0" eaLnBrk="1" fontAlgn="base" hangingPunct="1">
+              <a:spcBef>
+                <a:spcPct val="0"/>
+              </a:spcBef>
+              <a:spcAft>
+                <a:spcPct val="30000"/>
+              </a:spcAft>
+              <a:buClr>
+                <a:srgbClr val="005EAD"/>
+              </a:buClr>
+              <a:buFont typeface="Wingdings" charset="0"/>
+              <a:buChar char="§"/>
+              <a:defRPr sz="1600">
+                <a:solidFill>
+                  <a:schemeClr val="tx1"/>
+                </a:solidFill>
+                <a:latin typeface="Arial"/>
+                <a:ea typeface="+mn-ea"/>
+                <a:cs typeface="Arial"/>
+              </a:defRPr>
+            </a:lvl3pPr>
+            <a:lvl4pPr marL="1503363" indent="-228600" algn="l" rtl="0" eaLnBrk="1" fontAlgn="base" hangingPunct="1">
+              <a:spcBef>
+                <a:spcPct val="0"/>
+              </a:spcBef>
+              <a:spcAft>
+                <a:spcPct val="30000"/>
+              </a:spcAft>
+              <a:buClr>
+                <a:srgbClr val="005EAD"/>
+              </a:buClr>
+              <a:buFont typeface="Wingdings" charset="0"/>
+              <a:buChar char="§"/>
+              <a:tabLst/>
+              <a:defRPr sz="1600">
+                <a:solidFill>
+                  <a:schemeClr val="tx1"/>
+                </a:solidFill>
+                <a:latin typeface="Arial"/>
+                <a:ea typeface="+mn-ea"/>
+                <a:cs typeface="Arial"/>
+              </a:defRPr>
+            </a:lvl4pPr>
+            <a:lvl5pPr marL="1922463" indent="-228600" algn="l" rtl="0" eaLnBrk="1" fontAlgn="base" hangingPunct="1">
+              <a:spcBef>
+                <a:spcPct val="0"/>
+              </a:spcBef>
+              <a:spcAft>
+                <a:spcPct val="30000"/>
+              </a:spcAft>
+              <a:buClr>
+                <a:srgbClr val="005EAD"/>
+              </a:buClr>
+              <a:buFont typeface="Wingdings" charset="0"/>
+              <a:buChar char="§"/>
+              <a:defRPr sz="1600">
+                <a:solidFill>
+                  <a:schemeClr val="tx1"/>
+                </a:solidFill>
+                <a:latin typeface="Arial"/>
+                <a:ea typeface="+mn-ea"/>
+                <a:cs typeface="Arial"/>
+              </a:defRPr>
+            </a:lvl5pPr>
+            <a:lvl6pPr marL="2379663" indent="-228600" algn="l" rtl="0" eaLnBrk="1" fontAlgn="base" hangingPunct="1">
+              <a:spcBef>
+                <a:spcPct val="0"/>
+              </a:spcBef>
+              <a:spcAft>
+                <a:spcPct val="30000"/>
+              </a:spcAft>
+              <a:buClr>
+                <a:srgbClr val="00377D"/>
+              </a:buClr>
+              <a:buFont typeface="Wingdings" charset="0"/>
+              <a:buChar char="§"/>
+              <a:defRPr sz="1600">
+                <a:solidFill>
+                  <a:schemeClr val="tx1"/>
+                </a:solidFill>
+                <a:latin typeface="+mn-lt"/>
+                <a:ea typeface="+mn-ea"/>
+              </a:defRPr>
+            </a:lvl6pPr>
+            <a:lvl7pPr marL="2836863" indent="-228600" algn="l" rtl="0" eaLnBrk="1" fontAlgn="base" hangingPunct="1">
+              <a:spcBef>
+                <a:spcPct val="0"/>
+              </a:spcBef>
+              <a:spcAft>
+                <a:spcPct val="30000"/>
+              </a:spcAft>
+              <a:buClr>
+                <a:srgbClr val="00377D"/>
+              </a:buClr>
+              <a:buFont typeface="Wingdings" charset="0"/>
+              <a:buChar char="§"/>
+              <a:defRPr sz="1600">
+                <a:solidFill>
+                  <a:schemeClr val="tx1"/>
+                </a:solidFill>
+                <a:latin typeface="+mn-lt"/>
+                <a:ea typeface="+mn-ea"/>
+              </a:defRPr>
+            </a:lvl7pPr>
+            <a:lvl8pPr marL="3294063" indent="-228600" algn="l" rtl="0" eaLnBrk="1" fontAlgn="base" hangingPunct="1">
+              <a:spcBef>
+                <a:spcPct val="0"/>
+              </a:spcBef>
+              <a:spcAft>
+                <a:spcPct val="30000"/>
+              </a:spcAft>
+              <a:buClr>
+                <a:srgbClr val="00377D"/>
+              </a:buClr>
+              <a:buFont typeface="Wingdings" charset="0"/>
+              <a:buChar char="§"/>
+              <a:defRPr sz="1600">
+                <a:solidFill>
+                  <a:schemeClr val="tx1"/>
+                </a:solidFill>
+                <a:latin typeface="+mn-lt"/>
+                <a:ea typeface="+mn-ea"/>
+              </a:defRPr>
+            </a:lvl8pPr>
+            <a:lvl9pPr marL="3751263" indent="-228600" algn="l" rtl="0" eaLnBrk="1" fontAlgn="base" hangingPunct="1">
+              <a:spcBef>
+                <a:spcPct val="0"/>
+              </a:spcBef>
+              <a:spcAft>
+                <a:spcPct val="30000"/>
+              </a:spcAft>
+              <a:buClr>
+                <a:srgbClr val="00377D"/>
+              </a:buClr>
+              <a:buFont typeface="Wingdings" charset="0"/>
+              <a:buChar char="§"/>
+              <a:defRPr sz="1600">
+                <a:solidFill>
+                  <a:schemeClr val="tx1"/>
+                </a:solidFill>
+                <a:latin typeface="+mn-lt"/>
+                <a:ea typeface="+mn-ea"/>
+              </a:defRPr>
+            </a:lvl9pPr>
+          </a:lstStyle>
+          <a:p>
+            <a:pPr algn="just"/>
+            <a:r>
+              <a:rPr lang="de-DE" sz="1000" dirty="0">
+                <a:latin typeface="Arial" panose="020B0604020202020204" pitchFamily="34" charset="0"/>
+                <a:ea typeface="Helvetica Neue" panose="02000503000000020004" pitchFamily="2" charset="0"/>
+                <a:cs typeface="Arial" panose="020B0604020202020204" pitchFamily="34" charset="0"/>
+              </a:rPr>
+              <a:t>Lorem </a:t>
+            </a:r>
+            <a:r>
+              <a:rPr lang="de-DE" sz="1000" dirty="0" err="1">
+                <a:latin typeface="Arial" panose="020B0604020202020204" pitchFamily="34" charset="0"/>
+                <a:ea typeface="Helvetica Neue" panose="02000503000000020004" pitchFamily="2" charset="0"/>
+                <a:cs typeface="Arial" panose="020B0604020202020204" pitchFamily="34" charset="0"/>
+              </a:rPr>
+              <a:t>ipsum</a:t>
+            </a:r>
+            <a:r>
+              <a:rPr lang="de-DE" sz="1000" dirty="0">
+                <a:latin typeface="Arial" panose="020B0604020202020204" pitchFamily="34" charset="0"/>
+                <a:ea typeface="Helvetica Neue" panose="02000503000000020004" pitchFamily="2" charset="0"/>
+                <a:cs typeface="Arial" panose="020B0604020202020204" pitchFamily="34" charset="0"/>
+              </a:rPr>
+              <a:t> </a:t>
+            </a:r>
+            <a:r>
+              <a:rPr lang="de-DE" sz="1000" dirty="0" err="1">
+                <a:latin typeface="Arial" panose="020B0604020202020204" pitchFamily="34" charset="0"/>
+                <a:ea typeface="Helvetica Neue" panose="02000503000000020004" pitchFamily="2" charset="0"/>
+                <a:cs typeface="Arial" panose="020B0604020202020204" pitchFamily="34" charset="0"/>
+              </a:rPr>
+              <a:t>dolor</a:t>
+            </a:r>
+            <a:r>
+              <a:rPr lang="de-DE" sz="1000" dirty="0">
+                <a:latin typeface="Arial" panose="020B0604020202020204" pitchFamily="34" charset="0"/>
+                <a:ea typeface="Helvetica Neue" panose="02000503000000020004" pitchFamily="2" charset="0"/>
+                <a:cs typeface="Arial" panose="020B0604020202020204" pitchFamily="34" charset="0"/>
+              </a:rPr>
+              <a:t> </a:t>
+            </a:r>
+            <a:r>
+              <a:rPr lang="de-DE" sz="1000" dirty="0" err="1">
+                <a:latin typeface="Arial" panose="020B0604020202020204" pitchFamily="34" charset="0"/>
+                <a:ea typeface="Helvetica Neue" panose="02000503000000020004" pitchFamily="2" charset="0"/>
+                <a:cs typeface="Arial" panose="020B0604020202020204" pitchFamily="34" charset="0"/>
+              </a:rPr>
+              <a:t>sit</a:t>
+            </a:r>
+            <a:r>
+              <a:rPr lang="de-DE" sz="1000" dirty="0">
+                <a:latin typeface="Arial" panose="020B0604020202020204" pitchFamily="34" charset="0"/>
+                <a:ea typeface="Helvetica Neue" panose="02000503000000020004" pitchFamily="2" charset="0"/>
+                <a:cs typeface="Arial" panose="020B0604020202020204" pitchFamily="34" charset="0"/>
+              </a:rPr>
+              <a:t> </a:t>
+            </a:r>
+            <a:r>
+              <a:rPr lang="de-DE" sz="1000" dirty="0" err="1">
+                <a:latin typeface="Arial" panose="020B0604020202020204" pitchFamily="34" charset="0"/>
+                <a:ea typeface="Helvetica Neue" panose="02000503000000020004" pitchFamily="2" charset="0"/>
+                <a:cs typeface="Arial" panose="020B0604020202020204" pitchFamily="34" charset="0"/>
+              </a:rPr>
+              <a:t>amet</a:t>
+            </a:r>
+            <a:r>
+              <a:rPr lang="de-DE" sz="1000" dirty="0">
+                <a:latin typeface="Arial" panose="020B0604020202020204" pitchFamily="34" charset="0"/>
+                <a:ea typeface="Helvetica Neue" panose="02000503000000020004" pitchFamily="2" charset="0"/>
+                <a:cs typeface="Arial" panose="020B0604020202020204" pitchFamily="34" charset="0"/>
+              </a:rPr>
+              <a:t> Beschreibung ….</a:t>
+            </a:r>
+          </a:p>
+          <a:p>
+            <a:pPr algn="just"/>
+            <a:endParaRPr lang="de-DE" sz="1000" kern="0" dirty="0">
+              <a:latin typeface="Arial" panose="020B0604020202020204" pitchFamily="34" charset="0"/>
+              <a:ea typeface="Helvetica Neue" panose="02000503000000020004" pitchFamily="2" charset="0"/>
+              <a:cs typeface="Arial" panose="020B0604020202020204" pitchFamily="34" charset="0"/>
+            </a:endParaRPr>
+          </a:p>
+        </p:txBody>
+      </p:sp>
+      <p:cxnSp>
+        <p:nvCxnSpPr>
+          <p:cNvPr id="6" name="Gerade Verbindung 5">
+            <a:extLst>
+              <a:ext uri="{FF2B5EF4-FFF2-40B4-BE49-F238E27FC236}">
+                <a16:creationId xmlns:a16="http://schemas.microsoft.com/office/drawing/2014/main" id="{856BE49C-E23E-53FE-681D-F1A6399FB497}"/>
+              </a:ext>
+            </a:extLst>
+          </p:cNvPr>
+          <p:cNvCxnSpPr>
+            <a:cxnSpLocks/>
+          </p:cNvCxnSpPr>
+          <p:nvPr/>
+        </p:nvCxnSpPr>
+        <p:spPr bwMode="auto">
+          <a:xfrm>
+            <a:off x="5038699" y="3147633"/>
+            <a:ext cx="4104000" cy="0"/>
+          </a:xfrm>
+          <a:prstGeom prst="line">
+            <a:avLst/>
+          </a:prstGeom>
+          <a:noFill/>
+          <a:ln w="38100" cap="sq" cmpd="sng" algn="ctr">
+            <a:solidFill>
+              <a:srgbClr val="BE006E"/>
+            </a:solidFill>
+            <a:prstDash val="solid"/>
+            <a:miter lim="800000"/>
+            <a:headEnd type="none" w="med" len="med"/>
+            <a:tailEnd type="none" w="med" len="med"/>
+          </a:ln>
+          <a:effectLst/>
+          <a:extLst>
+            <a:ext uri="{909E8E84-426E-40dd-AFC4-6F175D3DCCD1}">
+              <a14:hiddenFill xmlns="" xmlns:a14="http://schemas.microsoft.com/office/drawing/2010/main">
+                <a:solidFill>
+                  <a:schemeClr val="accent2"/>
+                </a:solidFill>
+              </a14:hiddenFill>
+            </a:ext>
+            <a:ext uri="{AF507438-7753-43e0-B8FC-AC1667EBCBE1}">
+              <a14:hiddenEffects xmlns="" xmlns:a14="http://schemas.microsoft.com/office/drawing/2010/main">
+                <a:effectLst>
+                  <a:outerShdw blurRad="63500" dist="35921" dir="2700000" algn="ctr" rotWithShape="0">
+                    <a:schemeClr val="bg2"/>
+                  </a:outerShdw>
+                </a:effectLst>
+              </a14:hiddenEffects>
+            </a:ext>
+          </a:extLst>
+        </p:spPr>
+      </p:cxnSp>
+      <p:sp>
+        <p:nvSpPr>
+          <p:cNvPr id="7" name="Inhaltsplatzhalter 3">
+            <a:extLst>
+              <a:ext uri="{FF2B5EF4-FFF2-40B4-BE49-F238E27FC236}">
+                <a16:creationId xmlns:a16="http://schemas.microsoft.com/office/drawing/2014/main" id="{FABC9D9F-77DB-BCE1-8D1D-C91530880C9C}"/>
+              </a:ext>
+            </a:extLst>
+          </p:cNvPr>
+          <p:cNvSpPr txBox="1">
+            <a:spLocks/>
+          </p:cNvSpPr>
+          <p:nvPr/>
+        </p:nvSpPr>
+        <p:spPr>
+          <a:xfrm>
+            <a:off x="5198510" y="3212688"/>
+            <a:ext cx="1939270" cy="504322"/>
+          </a:xfrm>
+          <a:prstGeom prst="rect">
+            <a:avLst/>
+          </a:prstGeom>
+        </p:spPr>
+        <p:txBody>
+          <a:bodyPr lIns="0" tIns="0" rIns="0" bIns="0"/>
+          <a:lstStyle>
+            <a:lvl1pPr marL="0" indent="0" algn="l" rtl="0" eaLnBrk="1" fontAlgn="base" hangingPunct="1">
+              <a:spcBef>
+                <a:spcPct val="0"/>
+              </a:spcBef>
+              <a:spcAft>
+                <a:spcPct val="30000"/>
+              </a:spcAft>
+              <a:buClr>
+                <a:srgbClr val="005EAD"/>
+              </a:buClr>
+              <a:buFont typeface="Wingdings" charset="0"/>
+              <a:buNone/>
+              <a:defRPr sz="1400">
+                <a:solidFill>
+                  <a:schemeClr val="tx1"/>
+                </a:solidFill>
+                <a:latin typeface="Arial"/>
+                <a:ea typeface="+mn-ea"/>
+                <a:cs typeface="Arial"/>
+              </a:defRPr>
+            </a:lvl1pPr>
+            <a:lvl2pPr marL="631825" indent="-180975" algn="l" rtl="0" eaLnBrk="1" fontAlgn="base" hangingPunct="1">
+              <a:spcBef>
+                <a:spcPct val="0"/>
+              </a:spcBef>
+              <a:spcAft>
+                <a:spcPct val="30000"/>
+              </a:spcAft>
+              <a:buClr>
+                <a:srgbClr val="005EAD"/>
+              </a:buClr>
+              <a:buFont typeface="Wingdings" charset="0"/>
+              <a:buChar char="§"/>
+              <a:defRPr sz="1600">
+                <a:solidFill>
+                  <a:schemeClr val="tx1"/>
+                </a:solidFill>
+                <a:latin typeface="Arial"/>
+                <a:ea typeface="+mn-ea"/>
+                <a:cs typeface="Arial"/>
+              </a:defRPr>
+            </a:lvl2pPr>
+            <a:lvl3pPr marL="1084263" indent="-228600" algn="l" rtl="0" eaLnBrk="1" fontAlgn="base" hangingPunct="1">
+              <a:spcBef>
+                <a:spcPct val="0"/>
+              </a:spcBef>
+              <a:spcAft>
+                <a:spcPct val="30000"/>
+              </a:spcAft>
+              <a:buClr>
+                <a:srgbClr val="005EAD"/>
+              </a:buClr>
+              <a:buFont typeface="Wingdings" charset="0"/>
+              <a:buChar char="§"/>
+              <a:defRPr sz="1600">
+                <a:solidFill>
+                  <a:schemeClr val="tx1"/>
+                </a:solidFill>
+                <a:latin typeface="Arial"/>
+                <a:ea typeface="+mn-ea"/>
+                <a:cs typeface="Arial"/>
+              </a:defRPr>
+            </a:lvl3pPr>
+            <a:lvl4pPr marL="1503363" indent="-228600" algn="l" rtl="0" eaLnBrk="1" fontAlgn="base" hangingPunct="1">
+              <a:spcBef>
+                <a:spcPct val="0"/>
+              </a:spcBef>
+              <a:spcAft>
+                <a:spcPct val="30000"/>
+              </a:spcAft>
+              <a:buClr>
+                <a:srgbClr val="005EAD"/>
+              </a:buClr>
+              <a:buFont typeface="Wingdings" charset="0"/>
+              <a:buChar char="§"/>
+              <a:tabLst/>
+              <a:defRPr sz="1600">
+                <a:solidFill>
+                  <a:schemeClr val="tx1"/>
+                </a:solidFill>
+                <a:latin typeface="Arial"/>
+                <a:ea typeface="+mn-ea"/>
+                <a:cs typeface="Arial"/>
+              </a:defRPr>
+            </a:lvl4pPr>
+            <a:lvl5pPr marL="1922463" indent="-228600" algn="l" rtl="0" eaLnBrk="1" fontAlgn="base" hangingPunct="1">
+              <a:spcBef>
+                <a:spcPct val="0"/>
+              </a:spcBef>
+              <a:spcAft>
+                <a:spcPct val="30000"/>
+              </a:spcAft>
+              <a:buClr>
+                <a:srgbClr val="005EAD"/>
+              </a:buClr>
+              <a:buFont typeface="Wingdings" charset="0"/>
+              <a:buChar char="§"/>
+              <a:defRPr sz="1600">
+                <a:solidFill>
+                  <a:schemeClr val="tx1"/>
+                </a:solidFill>
+                <a:latin typeface="Arial"/>
+                <a:ea typeface="+mn-ea"/>
+                <a:cs typeface="Arial"/>
+              </a:defRPr>
+            </a:lvl5pPr>
+            <a:lvl6pPr marL="2379663" indent="-228600" algn="l" rtl="0" eaLnBrk="1" fontAlgn="base" hangingPunct="1">
+              <a:spcBef>
+                <a:spcPct val="0"/>
+              </a:spcBef>
+              <a:spcAft>
+                <a:spcPct val="30000"/>
+              </a:spcAft>
+              <a:buClr>
+                <a:srgbClr val="00377D"/>
+              </a:buClr>
+              <a:buFont typeface="Wingdings" charset="0"/>
+              <a:buChar char="§"/>
+              <a:defRPr sz="1600">
+                <a:solidFill>
+                  <a:schemeClr val="tx1"/>
+                </a:solidFill>
+                <a:latin typeface="+mn-lt"/>
+                <a:ea typeface="+mn-ea"/>
+              </a:defRPr>
+            </a:lvl6pPr>
+            <a:lvl7pPr marL="2836863" indent="-228600" algn="l" rtl="0" eaLnBrk="1" fontAlgn="base" hangingPunct="1">
+              <a:spcBef>
+                <a:spcPct val="0"/>
+              </a:spcBef>
+              <a:spcAft>
+                <a:spcPct val="30000"/>
+              </a:spcAft>
+              <a:buClr>
+                <a:srgbClr val="00377D"/>
+              </a:buClr>
+              <a:buFont typeface="Wingdings" charset="0"/>
+              <a:buChar char="§"/>
+              <a:defRPr sz="1600">
+                <a:solidFill>
+                  <a:schemeClr val="tx1"/>
+                </a:solidFill>
+                <a:latin typeface="+mn-lt"/>
+                <a:ea typeface="+mn-ea"/>
+              </a:defRPr>
+            </a:lvl7pPr>
+            <a:lvl8pPr marL="3294063" indent="-228600" algn="l" rtl="0" eaLnBrk="1" fontAlgn="base" hangingPunct="1">
+              <a:spcBef>
+                <a:spcPct val="0"/>
+              </a:spcBef>
+              <a:spcAft>
+                <a:spcPct val="30000"/>
+              </a:spcAft>
+              <a:buClr>
+                <a:srgbClr val="00377D"/>
+              </a:buClr>
+              <a:buFont typeface="Wingdings" charset="0"/>
+              <a:buChar char="§"/>
+              <a:defRPr sz="1600">
+                <a:solidFill>
+                  <a:schemeClr val="tx1"/>
+                </a:solidFill>
+                <a:latin typeface="+mn-lt"/>
+                <a:ea typeface="+mn-ea"/>
+              </a:defRPr>
+            </a:lvl8pPr>
+            <a:lvl9pPr marL="3751263" indent="-228600" algn="l" rtl="0" eaLnBrk="1" fontAlgn="base" hangingPunct="1">
+              <a:spcBef>
+                <a:spcPct val="0"/>
+              </a:spcBef>
+              <a:spcAft>
+                <a:spcPct val="30000"/>
+              </a:spcAft>
+              <a:buClr>
+                <a:srgbClr val="00377D"/>
+              </a:buClr>
+              <a:buFont typeface="Wingdings" charset="0"/>
+              <a:buChar char="§"/>
+              <a:defRPr sz="1600">
+                <a:solidFill>
+                  <a:schemeClr val="tx1"/>
+                </a:solidFill>
+                <a:latin typeface="+mn-lt"/>
+                <a:ea typeface="+mn-ea"/>
+              </a:defRPr>
+            </a:lvl9pPr>
+          </a:lstStyle>
+          <a:p>
+            <a:pPr>
+              <a:spcAft>
+                <a:spcPts val="0"/>
+              </a:spcAft>
+            </a:pPr>
+            <a:r>
+              <a:rPr lang="de-DE" sz="1000" b="1" kern="0" dirty="0"/>
+              <a:t>Prof. Dr. Benjamin Buchwitz</a:t>
+            </a:r>
+          </a:p>
+          <a:p>
+            <a:pPr>
+              <a:spcAft>
+                <a:spcPts val="0"/>
+              </a:spcAft>
+            </a:pPr>
+            <a:r>
+              <a:rPr lang="de-DE" sz="1000" i="1" kern="0" dirty="0"/>
+              <a:t>Fachhochschule Südwestfalen</a:t>
+            </a:r>
+          </a:p>
+          <a:p>
+            <a:pPr>
+              <a:spcBef>
+                <a:spcPts val="400"/>
+              </a:spcBef>
+              <a:spcAft>
+                <a:spcPts val="0"/>
+              </a:spcAft>
+            </a:pPr>
+            <a:r>
+              <a:rPr lang="de-DE" sz="1000" kern="0" dirty="0" err="1"/>
+              <a:t>benjamin.buchwitz@fh-swf.de</a:t>
+            </a:r>
+            <a:endParaRPr lang="de-DE" sz="1000" kern="0" dirty="0"/>
+          </a:p>
+        </p:txBody>
+      </p:sp>
+      <p:sp>
+        <p:nvSpPr>
+          <p:cNvPr id="9" name="Textplatzhalter 2">
+            <a:extLst>
+              <a:ext uri="{FF2B5EF4-FFF2-40B4-BE49-F238E27FC236}">
+                <a16:creationId xmlns:a16="http://schemas.microsoft.com/office/drawing/2014/main" id="{FEABD3CB-75A3-50A0-454E-B4A195F665C7}"/>
+              </a:ext>
+            </a:extLst>
+          </p:cNvPr>
+          <p:cNvSpPr txBox="1">
+            <a:spLocks/>
+          </p:cNvSpPr>
+          <p:nvPr/>
+        </p:nvSpPr>
+        <p:spPr>
+          <a:xfrm>
+            <a:off x="5025052" y="2900723"/>
+            <a:ext cx="4432850" cy="260558"/>
+          </a:xfrm>
+          <a:prstGeom prst="rect">
+            <a:avLst/>
+          </a:prstGeom>
+        </p:spPr>
+        <p:txBody>
+          <a:bodyPr vert="horz" lIns="0" tIns="0" rIns="0" bIns="0" anchor="t" anchorCtr="0"/>
+          <a:lstStyle>
+            <a:lvl1pPr marL="0" marR="0" indent="0" algn="l" defTabSz="914400" rtl="0" eaLnBrk="0" fontAlgn="base" latinLnBrk="0" hangingPunct="0">
+              <a:lnSpc>
+                <a:spcPct val="100000"/>
+              </a:lnSpc>
+              <a:spcBef>
+                <a:spcPct val="0"/>
+              </a:spcBef>
+              <a:spcAft>
+                <a:spcPct val="30000"/>
+              </a:spcAft>
+              <a:buClr>
+                <a:srgbClr val="005EAD"/>
+              </a:buClr>
+              <a:buSzTx/>
+              <a:buFont typeface="Wingdings" charset="0"/>
+              <a:buNone/>
+              <a:tabLst/>
+              <a:defRPr sz="1800" b="1">
+                <a:solidFill>
+                  <a:schemeClr val="tx1"/>
+                </a:solidFill>
+                <a:latin typeface="Arial"/>
+                <a:ea typeface="+mn-ea"/>
+                <a:cs typeface="Arial"/>
+              </a:defRPr>
+            </a:lvl1pPr>
+            <a:lvl2pPr marL="665163" indent="-285750" algn="l" rtl="0" eaLnBrk="1" fontAlgn="base" hangingPunct="1">
+              <a:spcBef>
+                <a:spcPct val="0"/>
+              </a:spcBef>
+              <a:spcAft>
+                <a:spcPct val="30000"/>
+              </a:spcAft>
+              <a:buClr>
+                <a:srgbClr val="005EAD"/>
+              </a:buClr>
+              <a:buFont typeface="Wingdings" charset="0"/>
+              <a:buChar char="§"/>
+              <a:defRPr sz="1600">
+                <a:solidFill>
+                  <a:schemeClr val="tx1"/>
+                </a:solidFill>
+                <a:latin typeface="Arial"/>
+                <a:ea typeface="+mn-ea"/>
+                <a:cs typeface="Arial"/>
+              </a:defRPr>
+            </a:lvl2pPr>
+            <a:lvl3pPr marL="1084263" indent="-228600" algn="l" rtl="0" eaLnBrk="1" fontAlgn="base" hangingPunct="1">
+              <a:spcBef>
+                <a:spcPct val="0"/>
+              </a:spcBef>
+              <a:spcAft>
+                <a:spcPct val="30000"/>
+              </a:spcAft>
+              <a:buClr>
+                <a:srgbClr val="005EAD"/>
+              </a:buClr>
+              <a:buFont typeface="Wingdings" charset="0"/>
+              <a:buChar char="§"/>
+              <a:defRPr sz="1600">
+                <a:solidFill>
+                  <a:schemeClr val="tx1"/>
+                </a:solidFill>
+                <a:latin typeface="Arial"/>
+                <a:ea typeface="+mn-ea"/>
+                <a:cs typeface="Arial"/>
+              </a:defRPr>
+            </a:lvl3pPr>
+            <a:lvl4pPr marL="1503363" indent="-228600" algn="l" rtl="0" eaLnBrk="1" fontAlgn="base" hangingPunct="1">
+              <a:spcBef>
+                <a:spcPct val="0"/>
+              </a:spcBef>
+              <a:spcAft>
+                <a:spcPct val="30000"/>
+              </a:spcAft>
+              <a:buClr>
+                <a:srgbClr val="005EAD"/>
+              </a:buClr>
+              <a:buFont typeface="Wingdings" charset="0"/>
+              <a:buChar char="§"/>
+              <a:tabLst/>
+              <a:defRPr sz="1600">
+                <a:solidFill>
+                  <a:schemeClr val="tx1"/>
+                </a:solidFill>
+                <a:latin typeface="Arial"/>
+                <a:ea typeface="+mn-ea"/>
+                <a:cs typeface="Arial"/>
+              </a:defRPr>
+            </a:lvl4pPr>
+            <a:lvl5pPr marL="1922463" indent="-228600" algn="l" rtl="0" eaLnBrk="1" fontAlgn="base" hangingPunct="1">
+              <a:spcBef>
+                <a:spcPct val="0"/>
+              </a:spcBef>
+              <a:spcAft>
+                <a:spcPct val="30000"/>
+              </a:spcAft>
+              <a:buClr>
+                <a:srgbClr val="005EAD"/>
+              </a:buClr>
+              <a:buFont typeface="Wingdings" charset="0"/>
+              <a:buChar char="§"/>
+              <a:defRPr sz="1600">
+                <a:solidFill>
+                  <a:schemeClr val="tx1"/>
+                </a:solidFill>
+                <a:latin typeface="Arial"/>
+                <a:ea typeface="+mn-ea"/>
+                <a:cs typeface="Arial"/>
+              </a:defRPr>
+            </a:lvl5pPr>
+            <a:lvl6pPr marL="2379663" indent="-228600" algn="l" rtl="0" eaLnBrk="1" fontAlgn="base" hangingPunct="1">
+              <a:spcBef>
+                <a:spcPct val="0"/>
+              </a:spcBef>
+              <a:spcAft>
+                <a:spcPct val="30000"/>
+              </a:spcAft>
+              <a:buClr>
+                <a:srgbClr val="00377D"/>
+              </a:buClr>
+              <a:buFont typeface="Wingdings" charset="0"/>
+              <a:buChar char="§"/>
+              <a:defRPr sz="1600">
+                <a:solidFill>
+                  <a:schemeClr val="tx1"/>
+                </a:solidFill>
+                <a:latin typeface="+mn-lt"/>
+                <a:ea typeface="+mn-ea"/>
+              </a:defRPr>
+            </a:lvl6pPr>
+            <a:lvl7pPr marL="2836863" indent="-228600" algn="l" rtl="0" eaLnBrk="1" fontAlgn="base" hangingPunct="1">
+              <a:spcBef>
+                <a:spcPct val="0"/>
+              </a:spcBef>
+              <a:spcAft>
+                <a:spcPct val="30000"/>
+              </a:spcAft>
+              <a:buClr>
+                <a:srgbClr val="00377D"/>
+              </a:buClr>
+              <a:buFont typeface="Wingdings" charset="0"/>
+              <a:buChar char="§"/>
+              <a:defRPr sz="1600">
+                <a:solidFill>
+                  <a:schemeClr val="tx1"/>
+                </a:solidFill>
+                <a:latin typeface="+mn-lt"/>
+                <a:ea typeface="+mn-ea"/>
+              </a:defRPr>
+            </a:lvl7pPr>
+            <a:lvl8pPr marL="3294063" indent="-228600" algn="l" rtl="0" eaLnBrk="1" fontAlgn="base" hangingPunct="1">
+              <a:spcBef>
+                <a:spcPct val="0"/>
+              </a:spcBef>
+              <a:spcAft>
+                <a:spcPct val="30000"/>
+              </a:spcAft>
+              <a:buClr>
+                <a:srgbClr val="00377D"/>
+              </a:buClr>
+              <a:buFont typeface="Wingdings" charset="0"/>
+              <a:buChar char="§"/>
+              <a:defRPr sz="1600">
+                <a:solidFill>
+                  <a:schemeClr val="tx1"/>
+                </a:solidFill>
+                <a:latin typeface="+mn-lt"/>
+                <a:ea typeface="+mn-ea"/>
+              </a:defRPr>
+            </a:lvl8pPr>
+            <a:lvl9pPr marL="3751263" indent="-228600" algn="l" rtl="0" eaLnBrk="1" fontAlgn="base" hangingPunct="1">
+              <a:spcBef>
+                <a:spcPct val="0"/>
+              </a:spcBef>
+              <a:spcAft>
+                <a:spcPct val="30000"/>
+              </a:spcAft>
+              <a:buClr>
+                <a:srgbClr val="00377D"/>
+              </a:buClr>
+              <a:buFont typeface="Wingdings" charset="0"/>
+              <a:buChar char="§"/>
+              <a:defRPr sz="1600">
+                <a:solidFill>
+                  <a:schemeClr val="tx1"/>
+                </a:solidFill>
+                <a:latin typeface="+mn-lt"/>
+                <a:ea typeface="+mn-ea"/>
+              </a:defRPr>
+            </a:lvl9pPr>
+          </a:lstStyle>
+          <a:p>
+            <a:pPr>
+              <a:spcAft>
+                <a:spcPts val="400"/>
+              </a:spcAft>
+            </a:pPr>
+            <a:r>
+              <a:rPr lang="de-DE" sz="1200" kern="0" dirty="0"/>
+              <a:t>Ansprechpartner</a:t>
+            </a:r>
+          </a:p>
+        </p:txBody>
+      </p:sp>
+      <p:sp>
+        <p:nvSpPr>
+          <p:cNvPr id="10" name="Inhaltsplatzhalter 3">
+            <a:extLst>
+              <a:ext uri="{FF2B5EF4-FFF2-40B4-BE49-F238E27FC236}">
+                <a16:creationId xmlns:a16="http://schemas.microsoft.com/office/drawing/2014/main" id="{9A64A5D8-9132-2C22-B52C-F23EC67A04E7}"/>
+              </a:ext>
+            </a:extLst>
+          </p:cNvPr>
+          <p:cNvSpPr txBox="1">
+            <a:spLocks/>
+          </p:cNvSpPr>
+          <p:nvPr/>
+        </p:nvSpPr>
+        <p:spPr>
+          <a:xfrm>
+            <a:off x="7293333" y="3212688"/>
+            <a:ext cx="1850668" cy="504322"/>
+          </a:xfrm>
+          <a:prstGeom prst="rect">
+            <a:avLst/>
+          </a:prstGeom>
+        </p:spPr>
+        <p:txBody>
+          <a:bodyPr lIns="0" tIns="0" rIns="0" bIns="0"/>
+          <a:lstStyle>
+            <a:lvl1pPr marL="0" indent="0" algn="l" rtl="0" eaLnBrk="1" fontAlgn="base" hangingPunct="1">
+              <a:spcBef>
+                <a:spcPct val="0"/>
+              </a:spcBef>
+              <a:spcAft>
+                <a:spcPct val="30000"/>
+              </a:spcAft>
+              <a:buClr>
+                <a:srgbClr val="005EAD"/>
+              </a:buClr>
+              <a:buFont typeface="Wingdings" charset="0"/>
+              <a:buNone/>
+              <a:defRPr sz="1400">
+                <a:solidFill>
+                  <a:schemeClr val="tx1"/>
+                </a:solidFill>
+                <a:latin typeface="Arial"/>
+                <a:ea typeface="+mn-ea"/>
+                <a:cs typeface="Arial"/>
+              </a:defRPr>
+            </a:lvl1pPr>
+            <a:lvl2pPr marL="631825" indent="-180975" algn="l" rtl="0" eaLnBrk="1" fontAlgn="base" hangingPunct="1">
+              <a:spcBef>
+                <a:spcPct val="0"/>
+              </a:spcBef>
+              <a:spcAft>
+                <a:spcPct val="30000"/>
+              </a:spcAft>
+              <a:buClr>
+                <a:srgbClr val="005EAD"/>
+              </a:buClr>
+              <a:buFont typeface="Wingdings" charset="0"/>
+              <a:buChar char="§"/>
+              <a:defRPr sz="1600">
+                <a:solidFill>
+                  <a:schemeClr val="tx1"/>
+                </a:solidFill>
+                <a:latin typeface="Arial"/>
+                <a:ea typeface="+mn-ea"/>
+                <a:cs typeface="Arial"/>
+              </a:defRPr>
+            </a:lvl2pPr>
+            <a:lvl3pPr marL="1084263" indent="-228600" algn="l" rtl="0" eaLnBrk="1" fontAlgn="base" hangingPunct="1">
+              <a:spcBef>
+                <a:spcPct val="0"/>
+              </a:spcBef>
+              <a:spcAft>
+                <a:spcPct val="30000"/>
+              </a:spcAft>
+              <a:buClr>
+                <a:srgbClr val="005EAD"/>
+              </a:buClr>
+              <a:buFont typeface="Wingdings" charset="0"/>
+              <a:buChar char="§"/>
+              <a:defRPr sz="1600">
+                <a:solidFill>
+                  <a:schemeClr val="tx1"/>
+                </a:solidFill>
+                <a:latin typeface="Arial"/>
+                <a:ea typeface="+mn-ea"/>
+                <a:cs typeface="Arial"/>
+              </a:defRPr>
+            </a:lvl3pPr>
+            <a:lvl4pPr marL="1503363" indent="-228600" algn="l" rtl="0" eaLnBrk="1" fontAlgn="base" hangingPunct="1">
+              <a:spcBef>
+                <a:spcPct val="0"/>
+              </a:spcBef>
+              <a:spcAft>
+                <a:spcPct val="30000"/>
+              </a:spcAft>
+              <a:buClr>
+                <a:srgbClr val="005EAD"/>
+              </a:buClr>
+              <a:buFont typeface="Wingdings" charset="0"/>
+              <a:buChar char="§"/>
+              <a:tabLst/>
+              <a:defRPr sz="1600">
+                <a:solidFill>
+                  <a:schemeClr val="tx1"/>
+                </a:solidFill>
+                <a:latin typeface="Arial"/>
+                <a:ea typeface="+mn-ea"/>
+                <a:cs typeface="Arial"/>
+              </a:defRPr>
+            </a:lvl4pPr>
+            <a:lvl5pPr marL="1922463" indent="-228600" algn="l" rtl="0" eaLnBrk="1" fontAlgn="base" hangingPunct="1">
+              <a:spcBef>
+                <a:spcPct val="0"/>
+              </a:spcBef>
+              <a:spcAft>
+                <a:spcPct val="30000"/>
+              </a:spcAft>
+              <a:buClr>
+                <a:srgbClr val="005EAD"/>
+              </a:buClr>
+              <a:buFont typeface="Wingdings" charset="0"/>
+              <a:buChar char="§"/>
+              <a:defRPr sz="1600">
+                <a:solidFill>
+                  <a:schemeClr val="tx1"/>
+                </a:solidFill>
+                <a:latin typeface="Arial"/>
+                <a:ea typeface="+mn-ea"/>
+                <a:cs typeface="Arial"/>
+              </a:defRPr>
+            </a:lvl5pPr>
+            <a:lvl6pPr marL="2379663" indent="-228600" algn="l" rtl="0" eaLnBrk="1" fontAlgn="base" hangingPunct="1">
+              <a:spcBef>
+                <a:spcPct val="0"/>
+              </a:spcBef>
+              <a:spcAft>
+                <a:spcPct val="30000"/>
+              </a:spcAft>
+              <a:buClr>
+                <a:srgbClr val="00377D"/>
+              </a:buClr>
+              <a:buFont typeface="Wingdings" charset="0"/>
+              <a:buChar char="§"/>
+              <a:defRPr sz="1600">
+                <a:solidFill>
+                  <a:schemeClr val="tx1"/>
+                </a:solidFill>
+                <a:latin typeface="+mn-lt"/>
+                <a:ea typeface="+mn-ea"/>
+              </a:defRPr>
+            </a:lvl6pPr>
+            <a:lvl7pPr marL="2836863" indent="-228600" algn="l" rtl="0" eaLnBrk="1" fontAlgn="base" hangingPunct="1">
+              <a:spcBef>
+                <a:spcPct val="0"/>
+              </a:spcBef>
+              <a:spcAft>
+                <a:spcPct val="30000"/>
+              </a:spcAft>
+              <a:buClr>
+                <a:srgbClr val="00377D"/>
+              </a:buClr>
+              <a:buFont typeface="Wingdings" charset="0"/>
+              <a:buChar char="§"/>
+              <a:defRPr sz="1600">
+                <a:solidFill>
+                  <a:schemeClr val="tx1"/>
+                </a:solidFill>
+                <a:latin typeface="+mn-lt"/>
+                <a:ea typeface="+mn-ea"/>
+              </a:defRPr>
+            </a:lvl7pPr>
+            <a:lvl8pPr marL="3294063" indent="-228600" algn="l" rtl="0" eaLnBrk="1" fontAlgn="base" hangingPunct="1">
+              <a:spcBef>
+                <a:spcPct val="0"/>
+              </a:spcBef>
+              <a:spcAft>
+                <a:spcPct val="30000"/>
+              </a:spcAft>
+              <a:buClr>
+                <a:srgbClr val="00377D"/>
+              </a:buClr>
+              <a:buFont typeface="Wingdings" charset="0"/>
+              <a:buChar char="§"/>
+              <a:defRPr sz="1600">
+                <a:solidFill>
+                  <a:schemeClr val="tx1"/>
+                </a:solidFill>
+                <a:latin typeface="+mn-lt"/>
+                <a:ea typeface="+mn-ea"/>
+              </a:defRPr>
+            </a:lvl8pPr>
+            <a:lvl9pPr marL="3751263" indent="-228600" algn="l" rtl="0" eaLnBrk="1" fontAlgn="base" hangingPunct="1">
+              <a:spcBef>
+                <a:spcPct val="0"/>
+              </a:spcBef>
+              <a:spcAft>
+                <a:spcPct val="30000"/>
+              </a:spcAft>
+              <a:buClr>
+                <a:srgbClr val="00377D"/>
+              </a:buClr>
+              <a:buFont typeface="Wingdings" charset="0"/>
+              <a:buChar char="§"/>
+              <a:defRPr sz="1600">
+                <a:solidFill>
+                  <a:schemeClr val="tx1"/>
+                </a:solidFill>
+                <a:latin typeface="+mn-lt"/>
+                <a:ea typeface="+mn-ea"/>
+              </a:defRPr>
+            </a:lvl9pPr>
+          </a:lstStyle>
+          <a:p>
+            <a:pPr>
+              <a:spcAft>
+                <a:spcPts val="0"/>
+              </a:spcAft>
+            </a:pPr>
+            <a:r>
+              <a:rPr lang="de-DE" sz="1000" b="1" kern="0" dirty="0"/>
+              <a:t>André Münzberg, </a:t>
+            </a:r>
+            <a:r>
+              <a:rPr lang="de-DE" sz="1000" b="1" kern="0" dirty="0" err="1"/>
+              <a:t>M.Sc</a:t>
+            </a:r>
+            <a:r>
+              <a:rPr lang="de-DE" sz="1000" b="1" kern="0" dirty="0"/>
+              <a:t>.</a:t>
+            </a:r>
+          </a:p>
+          <a:p>
+            <a:pPr>
+              <a:spcAft>
+                <a:spcPts val="0"/>
+              </a:spcAft>
+            </a:pPr>
+            <a:r>
+              <a:rPr lang="de-DE" sz="1000" i="1" kern="0" dirty="0"/>
+              <a:t>Firma/Organisation</a:t>
+            </a:r>
+          </a:p>
+          <a:p>
+            <a:pPr>
+              <a:spcBef>
+                <a:spcPts val="400"/>
+              </a:spcBef>
+              <a:spcAft>
+                <a:spcPts val="0"/>
+              </a:spcAft>
+            </a:pPr>
+            <a:r>
+              <a:rPr lang="de-DE" sz="1000" kern="0" dirty="0" err="1"/>
+              <a:t>email@email.com</a:t>
+            </a:r>
+            <a:endParaRPr lang="de-DE" sz="1000" kern="0" dirty="0"/>
+          </a:p>
+        </p:txBody>
+      </p:sp>
+      <p:cxnSp>
+        <p:nvCxnSpPr>
+          <p:cNvPr id="12" name="Gerade Verbindung 11">
+            <a:extLst>
+              <a:ext uri="{FF2B5EF4-FFF2-40B4-BE49-F238E27FC236}">
+                <a16:creationId xmlns:a16="http://schemas.microsoft.com/office/drawing/2014/main" id="{D6F33B2D-BAB9-7B3B-24F3-2E3CE2CC87E4}"/>
+              </a:ext>
+            </a:extLst>
+          </p:cNvPr>
+          <p:cNvCxnSpPr/>
+          <p:nvPr/>
+        </p:nvCxnSpPr>
+        <p:spPr bwMode="auto">
+          <a:xfrm>
+            <a:off x="5052346" y="1374935"/>
+            <a:ext cx="4104000" cy="0"/>
+          </a:xfrm>
+          <a:prstGeom prst="line">
+            <a:avLst/>
+          </a:prstGeom>
+          <a:noFill/>
+          <a:ln w="38100" cap="sq" cmpd="sng" algn="ctr">
+            <a:solidFill>
+              <a:srgbClr val="BE006E"/>
+            </a:solidFill>
+            <a:prstDash val="solid"/>
+            <a:miter lim="800000"/>
+            <a:headEnd type="none" w="med" len="med"/>
+            <a:tailEnd type="none" w="med" len="med"/>
+          </a:ln>
+          <a:effectLst/>
+          <a:extLst>
+            <a:ext uri="{909E8E84-426E-40dd-AFC4-6F175D3DCCD1}">
+              <a14:hiddenFill xmlns="" xmlns:a14="http://schemas.microsoft.com/office/drawing/2010/main">
+                <a:solidFill>
+                  <a:schemeClr val="accent2"/>
+                </a:solidFill>
+              </a14:hiddenFill>
+            </a:ext>
+            <a:ext uri="{AF507438-7753-43e0-B8FC-AC1667EBCBE1}">
+              <a14:hiddenEffects xmlns="" xmlns:a14="http://schemas.microsoft.com/office/drawing/2010/main">
+                <a:effectLst>
+                  <a:outerShdw blurRad="63500" dist="35921" dir="2700000" algn="ctr" rotWithShape="0">
+                    <a:schemeClr val="bg2"/>
+                  </a:outerShdw>
+                </a:effectLst>
+              </a14:hiddenEffects>
+            </a:ext>
+          </a:extLst>
+        </p:spPr>
+      </p:cxnSp>
+      <p:sp>
+        <p:nvSpPr>
+          <p:cNvPr id="13" name="Inhaltsplatzhalter 3">
+            <a:extLst>
+              <a:ext uri="{FF2B5EF4-FFF2-40B4-BE49-F238E27FC236}">
+                <a16:creationId xmlns:a16="http://schemas.microsoft.com/office/drawing/2014/main" id="{81AAD97A-ECF4-A7C9-6975-7074118A30D8}"/>
+              </a:ext>
+            </a:extLst>
+          </p:cNvPr>
+          <p:cNvSpPr txBox="1">
+            <a:spLocks/>
+          </p:cNvSpPr>
+          <p:nvPr/>
+        </p:nvSpPr>
+        <p:spPr>
+          <a:xfrm>
+            <a:off x="5212157" y="1439990"/>
+            <a:ext cx="3676042" cy="1309224"/>
+          </a:xfrm>
+          <a:prstGeom prst="rect">
+            <a:avLst/>
+          </a:prstGeom>
+        </p:spPr>
+        <p:txBody>
+          <a:bodyPr lIns="0" tIns="0" rIns="0" bIns="0"/>
+          <a:lstStyle>
+            <a:lvl1pPr marL="0" indent="0" algn="l" rtl="0" eaLnBrk="1" fontAlgn="base" hangingPunct="1">
+              <a:spcBef>
+                <a:spcPct val="0"/>
+              </a:spcBef>
+              <a:spcAft>
+                <a:spcPct val="30000"/>
+              </a:spcAft>
+              <a:buClr>
+                <a:srgbClr val="005EAD"/>
+              </a:buClr>
+              <a:buFont typeface="Wingdings" charset="0"/>
+              <a:buNone/>
+              <a:defRPr sz="1400">
+                <a:solidFill>
+                  <a:schemeClr val="tx1"/>
+                </a:solidFill>
+                <a:latin typeface="Arial"/>
+                <a:ea typeface="+mn-ea"/>
+                <a:cs typeface="Arial"/>
+              </a:defRPr>
+            </a:lvl1pPr>
+            <a:lvl2pPr marL="631825" indent="-180975" algn="l" rtl="0" eaLnBrk="1" fontAlgn="base" hangingPunct="1">
+              <a:spcBef>
+                <a:spcPct val="0"/>
+              </a:spcBef>
+              <a:spcAft>
+                <a:spcPct val="30000"/>
+              </a:spcAft>
+              <a:buClr>
+                <a:srgbClr val="005EAD"/>
+              </a:buClr>
+              <a:buFont typeface="Wingdings" charset="0"/>
+              <a:buChar char="§"/>
+              <a:defRPr sz="1600">
+                <a:solidFill>
+                  <a:schemeClr val="tx1"/>
+                </a:solidFill>
+                <a:latin typeface="Arial"/>
+                <a:ea typeface="+mn-ea"/>
+                <a:cs typeface="Arial"/>
+              </a:defRPr>
+            </a:lvl2pPr>
+            <a:lvl3pPr marL="1084263" indent="-228600" algn="l" rtl="0" eaLnBrk="1" fontAlgn="base" hangingPunct="1">
+              <a:spcBef>
+                <a:spcPct val="0"/>
+              </a:spcBef>
+              <a:spcAft>
+                <a:spcPct val="30000"/>
+              </a:spcAft>
+              <a:buClr>
+                <a:srgbClr val="005EAD"/>
+              </a:buClr>
+              <a:buFont typeface="Wingdings" charset="0"/>
+              <a:buChar char="§"/>
+              <a:defRPr sz="1600">
+                <a:solidFill>
+                  <a:schemeClr val="tx1"/>
+                </a:solidFill>
+                <a:latin typeface="Arial"/>
+                <a:ea typeface="+mn-ea"/>
+                <a:cs typeface="Arial"/>
+              </a:defRPr>
+            </a:lvl3pPr>
+            <a:lvl4pPr marL="1503363" indent="-228600" algn="l" rtl="0" eaLnBrk="1" fontAlgn="base" hangingPunct="1">
+              <a:spcBef>
+                <a:spcPct val="0"/>
+              </a:spcBef>
+              <a:spcAft>
+                <a:spcPct val="30000"/>
+              </a:spcAft>
+              <a:buClr>
+                <a:srgbClr val="005EAD"/>
+              </a:buClr>
+              <a:buFont typeface="Wingdings" charset="0"/>
+              <a:buChar char="§"/>
+              <a:tabLst/>
+              <a:defRPr sz="1600">
+                <a:solidFill>
+                  <a:schemeClr val="tx1"/>
+                </a:solidFill>
+                <a:latin typeface="Arial"/>
+                <a:ea typeface="+mn-ea"/>
+                <a:cs typeface="Arial"/>
+              </a:defRPr>
+            </a:lvl4pPr>
+            <a:lvl5pPr marL="1922463" indent="-228600" algn="l" rtl="0" eaLnBrk="1" fontAlgn="base" hangingPunct="1">
+              <a:spcBef>
+                <a:spcPct val="0"/>
+              </a:spcBef>
+              <a:spcAft>
+                <a:spcPct val="30000"/>
+              </a:spcAft>
+              <a:buClr>
+                <a:srgbClr val="005EAD"/>
+              </a:buClr>
+              <a:buFont typeface="Wingdings" charset="0"/>
+              <a:buChar char="§"/>
+              <a:defRPr sz="1600">
+                <a:solidFill>
+                  <a:schemeClr val="tx1"/>
+                </a:solidFill>
+                <a:latin typeface="Arial"/>
+                <a:ea typeface="+mn-ea"/>
+                <a:cs typeface="Arial"/>
+              </a:defRPr>
+            </a:lvl5pPr>
+            <a:lvl6pPr marL="2379663" indent="-228600" algn="l" rtl="0" eaLnBrk="1" fontAlgn="base" hangingPunct="1">
+              <a:spcBef>
+                <a:spcPct val="0"/>
+              </a:spcBef>
+              <a:spcAft>
+                <a:spcPct val="30000"/>
+              </a:spcAft>
+              <a:buClr>
+                <a:srgbClr val="00377D"/>
+              </a:buClr>
+              <a:buFont typeface="Wingdings" charset="0"/>
+              <a:buChar char="§"/>
+              <a:defRPr sz="1600">
+                <a:solidFill>
+                  <a:schemeClr val="tx1"/>
+                </a:solidFill>
+                <a:latin typeface="+mn-lt"/>
+                <a:ea typeface="+mn-ea"/>
+              </a:defRPr>
+            </a:lvl6pPr>
+            <a:lvl7pPr marL="2836863" indent="-228600" algn="l" rtl="0" eaLnBrk="1" fontAlgn="base" hangingPunct="1">
+              <a:spcBef>
+                <a:spcPct val="0"/>
+              </a:spcBef>
+              <a:spcAft>
+                <a:spcPct val="30000"/>
+              </a:spcAft>
+              <a:buClr>
+                <a:srgbClr val="00377D"/>
+              </a:buClr>
+              <a:buFont typeface="Wingdings" charset="0"/>
+              <a:buChar char="§"/>
+              <a:defRPr sz="1600">
+                <a:solidFill>
+                  <a:schemeClr val="tx1"/>
+                </a:solidFill>
+                <a:latin typeface="+mn-lt"/>
+                <a:ea typeface="+mn-ea"/>
+              </a:defRPr>
+            </a:lvl7pPr>
+            <a:lvl8pPr marL="3294063" indent="-228600" algn="l" rtl="0" eaLnBrk="1" fontAlgn="base" hangingPunct="1">
+              <a:spcBef>
+                <a:spcPct val="0"/>
+              </a:spcBef>
+              <a:spcAft>
+                <a:spcPct val="30000"/>
+              </a:spcAft>
+              <a:buClr>
+                <a:srgbClr val="00377D"/>
+              </a:buClr>
+              <a:buFont typeface="Wingdings" charset="0"/>
+              <a:buChar char="§"/>
+              <a:defRPr sz="1600">
+                <a:solidFill>
+                  <a:schemeClr val="tx1"/>
+                </a:solidFill>
+                <a:latin typeface="+mn-lt"/>
+                <a:ea typeface="+mn-ea"/>
+              </a:defRPr>
+            </a:lvl8pPr>
+            <a:lvl9pPr marL="3751263" indent="-228600" algn="l" rtl="0" eaLnBrk="1" fontAlgn="base" hangingPunct="1">
+              <a:spcBef>
+                <a:spcPct val="0"/>
+              </a:spcBef>
+              <a:spcAft>
+                <a:spcPct val="30000"/>
+              </a:spcAft>
+              <a:buClr>
+                <a:srgbClr val="00377D"/>
+              </a:buClr>
+              <a:buFont typeface="Wingdings" charset="0"/>
+              <a:buChar char="§"/>
+              <a:defRPr sz="1600">
+                <a:solidFill>
+                  <a:schemeClr val="tx1"/>
+                </a:solidFill>
+                <a:latin typeface="+mn-lt"/>
+                <a:ea typeface="+mn-ea"/>
+              </a:defRPr>
+            </a:lvl9pPr>
+          </a:lstStyle>
+          <a:p>
+            <a:pPr>
+              <a:spcAft>
+                <a:spcPts val="400"/>
+              </a:spcAft>
+            </a:pPr>
+            <a:r>
+              <a:rPr lang="en-GB" sz="1000" noProof="0" dirty="0">
+                <a:latin typeface="Arial" panose="020B0604020202020204" pitchFamily="34" charset="0"/>
+                <a:ea typeface="Helvetica Neue" panose="02000503000000020004" pitchFamily="2" charset="0"/>
+                <a:cs typeface="Arial" panose="020B0604020202020204" pitchFamily="34" charset="0"/>
+              </a:rPr>
+              <a:t>Ordentlich </a:t>
+            </a:r>
+            <a:r>
+              <a:rPr lang="en-GB" sz="1000" noProof="0" dirty="0" err="1">
+                <a:latin typeface="Arial" panose="020B0604020202020204" pitchFamily="34" charset="0"/>
+                <a:ea typeface="Helvetica Neue" panose="02000503000000020004" pitchFamily="2" charset="0"/>
+                <a:cs typeface="Arial" panose="020B0604020202020204" pitchFamily="34" charset="0"/>
+              </a:rPr>
+              <a:t>formatierte</a:t>
+            </a:r>
+            <a:r>
+              <a:rPr lang="en-GB" sz="1000" noProof="0" dirty="0">
+                <a:latin typeface="Arial" panose="020B0604020202020204" pitchFamily="34" charset="0"/>
+                <a:ea typeface="Helvetica Neue" panose="02000503000000020004" pitchFamily="2" charset="0"/>
+                <a:cs typeface="Arial" panose="020B0604020202020204" pitchFamily="34" charset="0"/>
+              </a:rPr>
+              <a:t> </a:t>
+            </a:r>
+            <a:r>
+              <a:rPr lang="en-GB" sz="1000" noProof="0" dirty="0" err="1">
+                <a:latin typeface="Arial" panose="020B0604020202020204" pitchFamily="34" charset="0"/>
+                <a:ea typeface="Helvetica Neue" panose="02000503000000020004" pitchFamily="2" charset="0"/>
+                <a:cs typeface="Arial" panose="020B0604020202020204" pitchFamily="34" charset="0"/>
+              </a:rPr>
+              <a:t>Quellenangabe</a:t>
+            </a:r>
+            <a:endParaRPr lang="en-GB" sz="1000" kern="0" noProof="0" dirty="0"/>
+          </a:p>
+        </p:txBody>
+      </p:sp>
+      <p:sp>
+        <p:nvSpPr>
+          <p:cNvPr id="14" name="Textplatzhalter 2">
+            <a:extLst>
+              <a:ext uri="{FF2B5EF4-FFF2-40B4-BE49-F238E27FC236}">
+                <a16:creationId xmlns:a16="http://schemas.microsoft.com/office/drawing/2014/main" id="{707F1DEF-E60A-1B77-7520-5A4DFD2DFA7F}"/>
+              </a:ext>
+            </a:extLst>
+          </p:cNvPr>
+          <p:cNvSpPr txBox="1">
+            <a:spLocks/>
+          </p:cNvSpPr>
+          <p:nvPr/>
+        </p:nvSpPr>
+        <p:spPr>
+          <a:xfrm>
+            <a:off x="5038699" y="1128025"/>
+            <a:ext cx="4432850" cy="260558"/>
+          </a:xfrm>
+          <a:prstGeom prst="rect">
+            <a:avLst/>
+          </a:prstGeom>
+        </p:spPr>
+        <p:txBody>
+          <a:bodyPr vert="horz" lIns="0" tIns="0" rIns="0" bIns="0" anchor="t" anchorCtr="0"/>
+          <a:lstStyle>
+            <a:lvl1pPr marL="0" marR="0" indent="0" algn="l" defTabSz="914400" rtl="0" eaLnBrk="0" fontAlgn="base" latinLnBrk="0" hangingPunct="0">
+              <a:lnSpc>
+                <a:spcPct val="100000"/>
+              </a:lnSpc>
+              <a:spcBef>
+                <a:spcPct val="0"/>
+              </a:spcBef>
+              <a:spcAft>
+                <a:spcPct val="30000"/>
+              </a:spcAft>
+              <a:buClr>
+                <a:srgbClr val="005EAD"/>
+              </a:buClr>
+              <a:buSzTx/>
+              <a:buFont typeface="Wingdings" charset="0"/>
+              <a:buNone/>
+              <a:tabLst/>
+              <a:defRPr sz="1800" b="1">
+                <a:solidFill>
+                  <a:schemeClr val="tx1"/>
+                </a:solidFill>
+                <a:latin typeface="Arial"/>
+                <a:ea typeface="+mn-ea"/>
+                <a:cs typeface="Arial"/>
+              </a:defRPr>
+            </a:lvl1pPr>
+            <a:lvl2pPr marL="665163" indent="-285750" algn="l" rtl="0" eaLnBrk="1" fontAlgn="base" hangingPunct="1">
+              <a:spcBef>
+                <a:spcPct val="0"/>
+              </a:spcBef>
+              <a:spcAft>
+                <a:spcPct val="30000"/>
+              </a:spcAft>
+              <a:buClr>
+                <a:srgbClr val="005EAD"/>
+              </a:buClr>
+              <a:buFont typeface="Wingdings" charset="0"/>
+              <a:buChar char="§"/>
+              <a:defRPr sz="1600">
+                <a:solidFill>
+                  <a:schemeClr val="tx1"/>
+                </a:solidFill>
+                <a:latin typeface="Arial"/>
+                <a:ea typeface="+mn-ea"/>
+                <a:cs typeface="Arial"/>
+              </a:defRPr>
+            </a:lvl2pPr>
+            <a:lvl3pPr marL="1084263" indent="-228600" algn="l" rtl="0" eaLnBrk="1" fontAlgn="base" hangingPunct="1">
+              <a:spcBef>
+                <a:spcPct val="0"/>
+              </a:spcBef>
+              <a:spcAft>
+                <a:spcPct val="30000"/>
+              </a:spcAft>
+              <a:buClr>
+                <a:srgbClr val="005EAD"/>
+              </a:buClr>
+              <a:buFont typeface="Wingdings" charset="0"/>
+              <a:buChar char="§"/>
+              <a:defRPr sz="1600">
+                <a:solidFill>
+                  <a:schemeClr val="tx1"/>
+                </a:solidFill>
+                <a:latin typeface="Arial"/>
+                <a:ea typeface="+mn-ea"/>
+                <a:cs typeface="Arial"/>
+              </a:defRPr>
+            </a:lvl3pPr>
+            <a:lvl4pPr marL="1503363" indent="-228600" algn="l" rtl="0" eaLnBrk="1" fontAlgn="base" hangingPunct="1">
+              <a:spcBef>
+                <a:spcPct val="0"/>
+              </a:spcBef>
+              <a:spcAft>
+                <a:spcPct val="30000"/>
+              </a:spcAft>
+              <a:buClr>
+                <a:srgbClr val="005EAD"/>
+              </a:buClr>
+              <a:buFont typeface="Wingdings" charset="0"/>
+              <a:buChar char="§"/>
+              <a:tabLst/>
+              <a:defRPr sz="1600">
+                <a:solidFill>
+                  <a:schemeClr val="tx1"/>
+                </a:solidFill>
+                <a:latin typeface="Arial"/>
+                <a:ea typeface="+mn-ea"/>
+                <a:cs typeface="Arial"/>
+              </a:defRPr>
+            </a:lvl4pPr>
+            <a:lvl5pPr marL="1922463" indent="-228600" algn="l" rtl="0" eaLnBrk="1" fontAlgn="base" hangingPunct="1">
+              <a:spcBef>
+                <a:spcPct val="0"/>
+              </a:spcBef>
+              <a:spcAft>
+                <a:spcPct val="30000"/>
+              </a:spcAft>
+              <a:buClr>
+                <a:srgbClr val="005EAD"/>
+              </a:buClr>
+              <a:buFont typeface="Wingdings" charset="0"/>
+              <a:buChar char="§"/>
+              <a:defRPr sz="1600">
+                <a:solidFill>
+                  <a:schemeClr val="tx1"/>
+                </a:solidFill>
+                <a:latin typeface="Arial"/>
+                <a:ea typeface="+mn-ea"/>
+                <a:cs typeface="Arial"/>
+              </a:defRPr>
+            </a:lvl5pPr>
+            <a:lvl6pPr marL="2379663" indent="-228600" algn="l" rtl="0" eaLnBrk="1" fontAlgn="base" hangingPunct="1">
+              <a:spcBef>
+                <a:spcPct val="0"/>
+              </a:spcBef>
+              <a:spcAft>
+                <a:spcPct val="30000"/>
+              </a:spcAft>
+              <a:buClr>
+                <a:srgbClr val="00377D"/>
+              </a:buClr>
+              <a:buFont typeface="Wingdings" charset="0"/>
+              <a:buChar char="§"/>
+              <a:defRPr sz="1600">
+                <a:solidFill>
+                  <a:schemeClr val="tx1"/>
+                </a:solidFill>
+                <a:latin typeface="+mn-lt"/>
+                <a:ea typeface="+mn-ea"/>
+              </a:defRPr>
+            </a:lvl6pPr>
+            <a:lvl7pPr marL="2836863" indent="-228600" algn="l" rtl="0" eaLnBrk="1" fontAlgn="base" hangingPunct="1">
+              <a:spcBef>
+                <a:spcPct val="0"/>
+              </a:spcBef>
+              <a:spcAft>
+                <a:spcPct val="30000"/>
+              </a:spcAft>
+              <a:buClr>
+                <a:srgbClr val="00377D"/>
+              </a:buClr>
+              <a:buFont typeface="Wingdings" charset="0"/>
+              <a:buChar char="§"/>
+              <a:defRPr sz="1600">
+                <a:solidFill>
+                  <a:schemeClr val="tx1"/>
+                </a:solidFill>
+                <a:latin typeface="+mn-lt"/>
+                <a:ea typeface="+mn-ea"/>
+              </a:defRPr>
+            </a:lvl7pPr>
+            <a:lvl8pPr marL="3294063" indent="-228600" algn="l" rtl="0" eaLnBrk="1" fontAlgn="base" hangingPunct="1">
+              <a:spcBef>
+                <a:spcPct val="0"/>
+              </a:spcBef>
+              <a:spcAft>
+                <a:spcPct val="30000"/>
+              </a:spcAft>
+              <a:buClr>
+                <a:srgbClr val="00377D"/>
+              </a:buClr>
+              <a:buFont typeface="Wingdings" charset="0"/>
+              <a:buChar char="§"/>
+              <a:defRPr sz="1600">
+                <a:solidFill>
+                  <a:schemeClr val="tx1"/>
+                </a:solidFill>
+                <a:latin typeface="+mn-lt"/>
+                <a:ea typeface="+mn-ea"/>
+              </a:defRPr>
+            </a:lvl8pPr>
+            <a:lvl9pPr marL="3751263" indent="-228600" algn="l" rtl="0" eaLnBrk="1" fontAlgn="base" hangingPunct="1">
+              <a:spcBef>
+                <a:spcPct val="0"/>
+              </a:spcBef>
+              <a:spcAft>
+                <a:spcPct val="30000"/>
+              </a:spcAft>
+              <a:buClr>
+                <a:srgbClr val="00377D"/>
+              </a:buClr>
+              <a:buFont typeface="Wingdings" charset="0"/>
+              <a:buChar char="§"/>
+              <a:defRPr sz="1600">
+                <a:solidFill>
+                  <a:schemeClr val="tx1"/>
+                </a:solidFill>
+                <a:latin typeface="+mn-lt"/>
+                <a:ea typeface="+mn-ea"/>
+              </a:defRPr>
+            </a:lvl9pPr>
+          </a:lstStyle>
+          <a:p>
+            <a:pPr>
+              <a:spcAft>
+                <a:spcPts val="400"/>
+              </a:spcAft>
+            </a:pPr>
+            <a:r>
+              <a:rPr lang="de-DE" sz="1200" kern="0" dirty="0"/>
+              <a:t>Einstiegsliteratur</a:t>
+            </a:r>
+          </a:p>
+        </p:txBody>
+      </p:sp>
+      <p:sp>
+        <p:nvSpPr>
+          <p:cNvPr id="20" name="Textfeld 19">
+            <a:extLst>
+              <a:ext uri="{FF2B5EF4-FFF2-40B4-BE49-F238E27FC236}">
+                <a16:creationId xmlns:a16="http://schemas.microsoft.com/office/drawing/2014/main" id="{D7A300C9-7F69-7AF9-1DBB-F109F3865252}"/>
+              </a:ext>
+            </a:extLst>
+          </p:cNvPr>
+          <p:cNvSpPr txBox="1"/>
+          <p:nvPr/>
+        </p:nvSpPr>
+        <p:spPr>
+          <a:xfrm>
+            <a:off x="5198510" y="3957851"/>
+            <a:ext cx="3689688" cy="504322"/>
+          </a:xfrm>
+          <a:prstGeom prst="rect">
+            <a:avLst/>
+          </a:prstGeom>
+          <a:noFill/>
+          <a:ln>
+            <a:solidFill>
+              <a:schemeClr val="bg1">
+                <a:lumMod val="50000"/>
+              </a:schemeClr>
+            </a:solidFill>
+          </a:ln>
+        </p:spPr>
+        <p:txBody>
+          <a:bodyPr wrap="square" numCol="2" rtlCol="0" anchor="ctr">
+            <a:noAutofit/>
+          </a:bodyPr>
+          <a:lstStyle/>
+          <a:p>
+            <a:pPr algn="l"/>
+            <a:r>
+              <a:rPr lang="de-DE" sz="800" b="1" dirty="0">
+                <a:solidFill>
+                  <a:schemeClr val="bg1">
+                    <a:lumMod val="50000"/>
+                  </a:schemeClr>
+                </a:solidFill>
+              </a:rPr>
+              <a:t>Niveau</a:t>
+            </a:r>
+            <a:r>
+              <a:rPr lang="de-DE" sz="800" dirty="0">
+                <a:solidFill>
+                  <a:schemeClr val="bg1">
+                    <a:lumMod val="50000"/>
+                  </a:schemeClr>
+                </a:solidFill>
+              </a:rPr>
+              <a:t>: Master</a:t>
+            </a:r>
+          </a:p>
+          <a:p>
+            <a:pPr algn="l"/>
+            <a:r>
+              <a:rPr lang="de-DE" sz="800" b="1" dirty="0">
+                <a:solidFill>
+                  <a:schemeClr val="bg1">
+                    <a:lumMod val="50000"/>
+                  </a:schemeClr>
+                </a:solidFill>
+              </a:rPr>
+              <a:t>Art</a:t>
+            </a:r>
+            <a:r>
+              <a:rPr lang="de-DE" sz="800" dirty="0">
+                <a:solidFill>
+                  <a:schemeClr val="bg1">
+                    <a:lumMod val="50000"/>
+                  </a:schemeClr>
+                </a:solidFill>
+              </a:rPr>
+              <a:t>: Seminar- &amp; Abschlussarbeit</a:t>
+            </a:r>
+          </a:p>
+          <a:p>
+            <a:pPr algn="l"/>
+            <a:r>
+              <a:rPr lang="de-DE" sz="800" b="1" dirty="0">
+                <a:solidFill>
+                  <a:schemeClr val="bg1">
+                    <a:lumMod val="50000"/>
+                  </a:schemeClr>
+                </a:solidFill>
+              </a:rPr>
+              <a:t>Methode: </a:t>
+            </a:r>
+            <a:r>
+              <a:rPr lang="de-DE" sz="800" dirty="0">
+                <a:solidFill>
+                  <a:schemeClr val="bg1">
+                    <a:lumMod val="50000"/>
+                  </a:schemeClr>
+                </a:solidFill>
+              </a:rPr>
+              <a:t>Empirisch &amp; Entwicklung</a:t>
+            </a:r>
+          </a:p>
+          <a:p>
+            <a:pPr algn="l"/>
+            <a:r>
+              <a:rPr lang="de-DE" sz="800" b="1" dirty="0">
+                <a:solidFill>
+                  <a:schemeClr val="bg1">
+                    <a:lumMod val="50000"/>
+                  </a:schemeClr>
+                </a:solidFill>
+              </a:rPr>
+              <a:t>Unternehmenskooperation</a:t>
+            </a:r>
+            <a:r>
+              <a:rPr lang="de-DE" sz="800" dirty="0">
+                <a:solidFill>
+                  <a:schemeClr val="bg1">
+                    <a:lumMod val="50000"/>
+                  </a:schemeClr>
+                </a:solidFill>
+              </a:rPr>
+              <a:t>: Nein</a:t>
+            </a:r>
+          </a:p>
+          <a:p>
+            <a:pPr algn="l"/>
+            <a:r>
+              <a:rPr lang="de-DE" sz="800" b="1" dirty="0">
+                <a:solidFill>
+                  <a:schemeClr val="bg1">
+                    <a:lumMod val="50000"/>
+                  </a:schemeClr>
+                </a:solidFill>
+              </a:rPr>
+              <a:t>Sperrvermerk</a:t>
+            </a:r>
+            <a:r>
+              <a:rPr lang="de-DE" sz="800" dirty="0">
+                <a:solidFill>
+                  <a:schemeClr val="bg1">
+                    <a:lumMod val="50000"/>
+                  </a:schemeClr>
+                </a:solidFill>
+              </a:rPr>
+              <a:t>: Nein</a:t>
+            </a:r>
+          </a:p>
+          <a:p>
+            <a:pPr algn="l"/>
+            <a:r>
+              <a:rPr lang="de-DE" sz="800" b="1" dirty="0">
+                <a:solidFill>
+                  <a:schemeClr val="bg1">
+                    <a:lumMod val="50000"/>
+                  </a:schemeClr>
+                </a:solidFill>
+              </a:rPr>
+              <a:t>Start: </a:t>
+            </a:r>
+            <a:r>
+              <a:rPr lang="de-DE" sz="800" dirty="0">
+                <a:solidFill>
+                  <a:schemeClr val="bg1">
+                    <a:lumMod val="50000"/>
+                  </a:schemeClr>
+                </a:solidFill>
+              </a:rPr>
+              <a:t>ab sofort</a:t>
+            </a:r>
+          </a:p>
+        </p:txBody>
+      </p:sp>
+    </p:spTree>
+    <p:extLst>
+      <p:ext uri="{BB962C8B-B14F-4D97-AF65-F5344CB8AC3E}">
+        <p14:creationId xmlns:p14="http://schemas.microsoft.com/office/powerpoint/2010/main" val="2003205683"/>
       </p:ext>
     </p:extLst>
   </p:cSld>
